--- a/presentation/ModelBuilder_4.2_Presentation.pptx
+++ b/presentation/ModelBuilder_4.2_Presentation.pptx
@@ -3924,7 +3924,7 @@
                 </a:solidFill>
                 <a:latin typeface="Arial"/>
               </a:rPr>
-              <a:t>The three new warnings are visible here: a licensed factor still neutral, the optimistic equation 9, and N_W derived from R.</a:t>
+              <a:t>The dialog reports the outcome, it does not dress it up: no errors, the warning count, and the reminder that the strength calculation stays labelled CORE-SCREENING.</a:t>
             </a:r>
           </a:p>
           <a:p>
@@ -3943,7 +3943,7 @@
                 </a:solidFill>
                 <a:latin typeface="Arial"/>
               </a:rPr>
-              <a:t>An error blocks the build before Abaqus is touched; a warning informs and is recorded.</a:t>
+              <a:t>An error blocks the build before Abaqus is touched; a warning informs and is recorded in the audit.</a:t>
             </a:r>
           </a:p>
         </p:txBody>
@@ -4006,7 +4006,7 @@
                 </a:solidFill>
                 <a:latin typeface="Arial"/>
               </a:rPr>
-              <a:t>0 errors and 3 warnings in the default configuration.</a:t>
+              <a:t>By default: 0 errors and 3 warnings — a licensed factor still neutral, the optimistic equation 9, and a high axial aspect ratio expected at the notch.</a:t>
             </a:r>
           </a:p>
         </p:txBody>

--- a/presentation/ModelBuilder_4.2_Presentation.pptx
+++ b/presentation/ModelBuilder_4.2_Presentation.pptx
@@ -34,6 +34,16 @@
     <p:sldId id="282" r:id="rId33"/>
     <p:sldId id="283" r:id="rId34"/>
     <p:sldId id="284" r:id="rId35"/>
+    <p:sldId id="285" r:id="rId36"/>
+    <p:sldId id="286" r:id="rId37"/>
+    <p:sldId id="287" r:id="rId38"/>
+    <p:sldId id="288" r:id="rId39"/>
+    <p:sldId id="289" r:id="rId40"/>
+    <p:sldId id="290" r:id="rId41"/>
+    <p:sldId id="291" r:id="rId42"/>
+    <p:sldId id="292" r:id="rId43"/>
+    <p:sldId id="293" r:id="rId44"/>
+    <p:sldId id="294" r:id="rId45"/>
   </p:sldIdLst>
   <p:sldSz cx="12191695" cy="6858000" type="screen4x3"/>
   <p:notesSz cx="6858000" cy="9144000"/>
@@ -4320,7 +4330,7 @@
     <p:bg>
       <p:bgPr>
         <a:solidFill>
-          <a:srgbClr val="0A0A0C"/>
+          <a:srgbClr val="FFFFFF"/>
         </a:solidFill>
         <a:effectLst/>
       </p:bgPr>
@@ -4362,11 +4372,11 @@
             <a:r>
               <a:rPr sz="1150" b="1">
                 <a:solidFill>
-                  <a:srgbClr val="2997FF"/>
-                </a:solidFill>
-                <a:latin typeface="Arial"/>
-              </a:rPr>
-              <a:t>THE RESULT</a:t>
+                  <a:srgbClr val="0071E3"/>
+                </a:solidFill>
+                <a:latin typeface="Arial"/>
+              </a:rPr>
+              <a:t>STARTING POINTS</a:t>
             </a:r>
           </a:p>
         </p:txBody>
@@ -4379,121 +4389,742 @@
         </p:nvSpPr>
         <p:spPr>
           <a:xfrm>
-            <a:off x="777240" y="1024128"/>
-            <a:ext cx="3840480" cy="4206240"/>
-          </a:xfrm>
-          <a:prstGeom prst="rect">
-            <a:avLst/>
-          </a:prstGeom>
-          <a:noFill/>
-        </p:spPr>
-        <p:txBody>
-          <a:bodyPr wrap="square" anchor="t" lIns="0" rIns="0" tIns="0" bIns="0">
-            <a:spAutoFit/>
-          </a:bodyPr>
-          <a:lstStyle/>
-          <a:p>
-            <a:pPr algn="l">
-              <a:lnSpc>
-                <a:spcPct val="100000"/>
-              </a:lnSpc>
-            </a:pPr>
-            <a:r>
-              <a:rPr sz="2800" b="1">
-                <a:solidFill>
-                  <a:srgbClr val="FFFFFF"/>
-                </a:solidFill>
-                <a:latin typeface="Arial"/>
-              </a:rPr>
-              <a:t>Solids, not shells</a:t>
-            </a:r>
-          </a:p>
-          <a:p>
-            <a:pPr algn="l">
-              <a:lnSpc>
-                <a:spcPct val="135000"/>
+            <a:off x="777240" y="932688"/>
+            <a:ext cx="10637215" cy="914400"/>
+          </a:xfrm>
+          <a:prstGeom prst="rect">
+            <a:avLst/>
+          </a:prstGeom>
+          <a:noFill/>
+        </p:spPr>
+        <p:txBody>
+          <a:bodyPr wrap="square" anchor="t" lIns="0" rIns="0" tIns="0" bIns="0">
+            <a:spAutoFit/>
+          </a:bodyPr>
+          <a:lstStyle/>
+          <a:p>
+            <a:pPr algn="l">
+              <a:lnSpc>
+                <a:spcPct val="95000"/>
+              </a:lnSpc>
+            </a:pPr>
+            <a:r>
+              <a:rPr sz="3000" b="1">
+                <a:solidFill>
+                  <a:srgbClr val="1D1D1F"/>
+                </a:solidFill>
+                <a:latin typeface="Arial"/>
+              </a:rPr>
+              <a:t>Fifteen presets, none of which skips validation</a:t>
+            </a:r>
+          </a:p>
+        </p:txBody>
+      </p:sp>
+      <p:sp>
+        <p:nvSpPr>
+          <p:cNvPr id="4" name="TextBox 3"/>
+          <p:cNvSpPr txBox="1"/>
+          <p:nvPr/>
+        </p:nvSpPr>
+        <p:spPr>
+          <a:xfrm>
+            <a:off x="777240" y="1700784"/>
+            <a:ext cx="9509760" cy="822960"/>
+          </a:xfrm>
+          <a:prstGeom prst="rect">
+            <a:avLst/>
+          </a:prstGeom>
+          <a:noFill/>
+        </p:spPr>
+        <p:txBody>
+          <a:bodyPr wrap="square" anchor="t" lIns="0" rIns="0" tIns="0" bIns="0">
+            <a:spAutoFit/>
+          </a:bodyPr>
+          <a:lstStyle/>
+          <a:p>
+            <a:pPr algn="l">
+              <a:lnSpc>
+                <a:spcPct val="125000"/>
+              </a:lnSpc>
+            </a:pPr>
+            <a:r>
+              <a:rPr sz="1450" b="0">
+                <a:solidFill>
+                  <a:srgbClr val="6E6E73"/>
+                </a:solidFill>
+                <a:latin typeface="Arial"/>
+              </a:rPr>
+              <a:t>A preset only sets parameters. It is then merged onto the defaults and re-derived and re-validated exactly as if it had been typed in by hand.</a:t>
+            </a:r>
+          </a:p>
+        </p:txBody>
+      </p:sp>
+      <p:sp>
+        <p:nvSpPr>
+          <p:cNvPr id="5" name="Rounded Rectangle 4"/>
+          <p:cNvSpPr/>
+          <p:nvPr/>
+        </p:nvSpPr>
+        <p:spPr>
+          <a:xfrm>
+            <a:off x="777240" y="2487168"/>
+            <a:ext cx="3411626" cy="1664208"/>
+          </a:xfrm>
+          <a:prstGeom prst="roundRect">
+            <a:avLst>
+              <a:gd name="adj" fmla="val 3500"/>
+            </a:avLst>
+          </a:prstGeom>
+          <a:solidFill>
+            <a:srgbClr val="F5F5F7"/>
+          </a:solidFill>
+          <a:ln>
+            <a:noFill/>
+          </a:ln>
+          <a:effectLst/>
+        </p:spPr>
+        <p:style>
+          <a:lnRef idx="1">
+            <a:schemeClr val="accent1"/>
+          </a:lnRef>
+          <a:fillRef idx="3">
+            <a:schemeClr val="accent1"/>
+          </a:fillRef>
+          <a:effectRef idx="2">
+            <a:schemeClr val="accent1"/>
+          </a:effectRef>
+          <a:fontRef idx="minor">
+            <a:schemeClr val="lt1"/>
+          </a:fontRef>
+        </p:style>
+        <p:txBody>
+          <a:bodyPr rtlCol="0" anchor="ctr"/>
+          <a:lstStyle/>
+          <a:p>
+            <a:pPr algn="ctr"/>
+          </a:p>
+        </p:txBody>
+      </p:sp>
+      <p:sp>
+        <p:nvSpPr>
+          <p:cNvPr id="6" name="TextBox 5"/>
+          <p:cNvSpPr txBox="1"/>
+          <p:nvPr/>
+        </p:nvSpPr>
+        <p:spPr>
+          <a:xfrm>
+            <a:off x="996696" y="2670048"/>
+            <a:ext cx="2972714" cy="1371600"/>
+          </a:xfrm>
+          <a:prstGeom prst="rect">
+            <a:avLst/>
+          </a:prstGeom>
+          <a:noFill/>
+        </p:spPr>
+        <p:txBody>
+          <a:bodyPr wrap="square" anchor="t" lIns="0" rIns="0" tIns="0" bIns="0">
+            <a:spAutoFit/>
+          </a:bodyPr>
+          <a:lstStyle/>
+          <a:p>
+            <a:pPr algn="l">
+              <a:lnSpc>
+                <a:spcPct val="110000"/>
+              </a:lnSpc>
+            </a:pPr>
+            <a:r>
+              <a:rPr sz="1350" b="1">
+                <a:solidFill>
+                  <a:srgbClr val="1D1D1F"/>
+                </a:solidFill>
+                <a:latin typeface="Arial"/>
+              </a:rPr>
+              <a:t>5 geometry and analysis</a:t>
+            </a:r>
+          </a:p>
+          <a:p>
+            <a:pPr algn="l">
+              <a:lnSpc>
+                <a:spcPct val="130000"/>
               </a:lnSpc>
               <a:spcBef>
-                <a:spcPts val="1300"/>
+                <a:spcPts val="600"/>
               </a:spcBef>
             </a:pPr>
             <a:r>
-              <a:rPr sz="1250" b="0">
-                <a:solidFill>
-                  <a:srgbClr val="9E9EA7"/>
-                </a:solidFill>
-                <a:latin typeface="Arial"/>
-              </a:rPr>
-              <a:t>Shaft, key and hub are built as independent solids and assembled with the tolerances of the standard.</a:t>
-            </a:r>
-          </a:p>
-          <a:p>
-            <a:pPr algn="l">
-              <a:lnSpc>
-                <a:spcPct val="135000"/>
+              <a:rPr sz="1050" b="0">
+                <a:solidFill>
+                  <a:srgbClr val="6E6E73"/>
+                </a:solidFill>
+                <a:latin typeface="Arial"/>
+              </a:rPr>
+              <a:t>D25 small joint, D40 validated default, D50 next DIN band, D40 quadratic C3D20 and D40 with torsion analysis.</a:t>
+            </a:r>
+          </a:p>
+        </p:txBody>
+      </p:sp>
+      <p:sp>
+        <p:nvSpPr>
+          <p:cNvPr id="7" name="Rounded Rectangle 6"/>
+          <p:cNvSpPr/>
+          <p:nvPr/>
+        </p:nvSpPr>
+        <p:spPr>
+          <a:xfrm>
+            <a:off x="4390034" y="2487168"/>
+            <a:ext cx="3411626" cy="1664208"/>
+          </a:xfrm>
+          <a:prstGeom prst="roundRect">
+            <a:avLst>
+              <a:gd name="adj" fmla="val 3500"/>
+            </a:avLst>
+          </a:prstGeom>
+          <a:solidFill>
+            <a:srgbClr val="F5F5F7"/>
+          </a:solidFill>
+          <a:ln>
+            <a:noFill/>
+          </a:ln>
+          <a:effectLst/>
+        </p:spPr>
+        <p:style>
+          <a:lnRef idx="1">
+            <a:schemeClr val="accent1"/>
+          </a:lnRef>
+          <a:fillRef idx="3">
+            <a:schemeClr val="accent1"/>
+          </a:fillRef>
+          <a:effectRef idx="2">
+            <a:schemeClr val="accent1"/>
+          </a:effectRef>
+          <a:fontRef idx="minor">
+            <a:schemeClr val="lt1"/>
+          </a:fontRef>
+        </p:style>
+        <p:txBody>
+          <a:bodyPr rtlCol="0" anchor="ctr"/>
+          <a:lstStyle/>
+          <a:p>
+            <a:pPr algn="ctr"/>
+          </a:p>
+        </p:txBody>
+      </p:sp>
+      <p:sp>
+        <p:nvSpPr>
+          <p:cNvPr id="8" name="TextBox 7"/>
+          <p:cNvSpPr txBox="1"/>
+          <p:nvPr/>
+        </p:nvSpPr>
+        <p:spPr>
+          <a:xfrm>
+            <a:off x="4609490" y="2670048"/>
+            <a:ext cx="2972714" cy="1371600"/>
+          </a:xfrm>
+          <a:prstGeom prst="rect">
+            <a:avLst/>
+          </a:prstGeom>
+          <a:noFill/>
+        </p:spPr>
+        <p:txBody>
+          <a:bodyPr wrap="square" anchor="t" lIns="0" rIns="0" tIns="0" bIns="0">
+            <a:spAutoFit/>
+          </a:bodyPr>
+          <a:lstStyle/>
+          <a:p>
+            <a:pPr algn="l">
+              <a:lnSpc>
+                <a:spcPct val="110000"/>
+              </a:lnSpc>
+            </a:pPr>
+            <a:r>
+              <a:rPr sz="1350" b="1">
+                <a:solidFill>
+                  <a:srgbClr val="1D1D1F"/>
+                </a:solidFill>
+                <a:latin typeface="Arial"/>
+              </a:rPr>
+              <a:t>8 mesh policies</a:t>
+            </a:r>
+          </a:p>
+          <a:p>
+            <a:pPr algn="l">
+              <a:lnSpc>
+                <a:spcPct val="130000"/>
               </a:lnSpc>
               <a:spcBef>
-                <a:spcPts val="1300"/>
+                <a:spcPts val="600"/>
               </a:spcBef>
             </a:pPr>
             <a:r>
-              <a:rPr sz="1250" b="0">
-                <a:solidFill>
-                  <a:srgbClr val="9E9EA7"/>
-                </a:solidFill>
-                <a:latin typeface="Arial"/>
-              </a:rPr>
-              <a:t>The mesh is hexahedral and matching on the interfaces that carry load.</a:t>
-            </a:r>
-          </a:p>
-          <a:p>
-            <a:pPr algn="l">
-              <a:lnSpc>
-                <a:spcPct val="135000"/>
+              <a:rPr sz="1050" b="0">
+                <a:solidFill>
+                  <a:srgbClr val="6E6E73"/>
+                </a:solidFill>
+                <a:latin typeface="Arial"/>
+              </a:rPr>
+              <a:t>One per template: hex certified, FVA Method A hybrid, balanced, quality critical, fast preview, hex dominant, quadratic accuracy and robust fallback.</a:t>
+            </a:r>
+          </a:p>
+        </p:txBody>
+      </p:sp>
+      <p:sp>
+        <p:nvSpPr>
+          <p:cNvPr id="9" name="Rounded Rectangle 8"/>
+          <p:cNvSpPr/>
+          <p:nvPr/>
+        </p:nvSpPr>
+        <p:spPr>
+          <a:xfrm>
+            <a:off x="8002828" y="2487168"/>
+            <a:ext cx="3411626" cy="1664208"/>
+          </a:xfrm>
+          <a:prstGeom prst="roundRect">
+            <a:avLst>
+              <a:gd name="adj" fmla="val 3500"/>
+            </a:avLst>
+          </a:prstGeom>
+          <a:solidFill>
+            <a:srgbClr val="F5F5F7"/>
+          </a:solidFill>
+          <a:ln>
+            <a:noFill/>
+          </a:ln>
+          <a:effectLst/>
+        </p:spPr>
+        <p:style>
+          <a:lnRef idx="1">
+            <a:schemeClr val="accent1"/>
+          </a:lnRef>
+          <a:fillRef idx="3">
+            <a:schemeClr val="accent1"/>
+          </a:fillRef>
+          <a:effectRef idx="2">
+            <a:schemeClr val="accent1"/>
+          </a:effectRef>
+          <a:fontRef idx="minor">
+            <a:schemeClr val="lt1"/>
+          </a:fontRef>
+        </p:style>
+        <p:txBody>
+          <a:bodyPr rtlCol="0" anchor="ctr"/>
+          <a:lstStyle/>
+          <a:p>
+            <a:pPr algn="ctr"/>
+          </a:p>
+        </p:txBody>
+      </p:sp>
+      <p:sp>
+        <p:nvSpPr>
+          <p:cNvPr id="10" name="TextBox 9"/>
+          <p:cNvSpPr txBox="1"/>
+          <p:nvPr/>
+        </p:nvSpPr>
+        <p:spPr>
+          <a:xfrm>
+            <a:off x="8222284" y="2670048"/>
+            <a:ext cx="2972714" cy="1371600"/>
+          </a:xfrm>
+          <a:prstGeom prst="rect">
+            <a:avLst/>
+          </a:prstGeom>
+          <a:noFill/>
+        </p:spPr>
+        <p:txBody>
+          <a:bodyPr wrap="square" anchor="t" lIns="0" rIns="0" tIns="0" bIns="0">
+            <a:spAutoFit/>
+          </a:bodyPr>
+          <a:lstStyle/>
+          <a:p>
+            <a:pPr algn="l">
+              <a:lnSpc>
+                <a:spcPct val="110000"/>
+              </a:lnSpc>
+            </a:pPr>
+            <a:r>
+              <a:rPr sz="1350" b="1">
+                <a:solidFill>
+                  <a:srgbClr val="1D1D1F"/>
+                </a:solidFill>
+                <a:latin typeface="Arial"/>
+              </a:rPr>
+              <a:t>2 FVA research</a:t>
+            </a:r>
+          </a:p>
+          <a:p>
+            <a:pPr algn="l">
+              <a:lnSpc>
+                <a:spcPct val="130000"/>
               </a:lnSpc>
               <a:spcBef>
-                <a:spcPts val="1300"/>
+                <a:spcPts val="600"/>
               </a:spcBef>
             </a:pPr>
             <a:r>
-              <a:rPr sz="1250" b="0">
-                <a:solidFill>
-                  <a:srgbClr val="9E9EA7"/>
-                </a:solidFill>
-                <a:latin typeface="Arial"/>
-              </a:rPr>
-              <a:t>This is the image the engine itself saves to screenshots/ when it finishes.</a:t>
-            </a:r>
-          </a:p>
-        </p:txBody>
-      </p:sp>
-      <p:pic>
-        <p:nvPicPr>
-          <p:cNvPr id="4" name="Picture 3" descr="model_assembly_hex.png"/>
-          <p:cNvPicPr>
-            <a:picLocks noChangeAspect="1"/>
-          </p:cNvPicPr>
-          <p:nvPr/>
-        </p:nvPicPr>
-        <p:blipFill>
-          <a:blip r:embed="rId2"/>
-          <a:stretch>
-            <a:fillRect/>
-          </a:stretch>
-        </p:blipFill>
-        <p:spPr>
-          <a:xfrm>
-            <a:off x="5071897" y="685800"/>
-            <a:ext cx="6406845" cy="5486400"/>
-          </a:xfrm>
-          <a:prstGeom prst="rect">
-            <a:avLst/>
-          </a:prstGeom>
-        </p:spPr>
-      </p:pic>
-      <p:sp>
-        <p:nvSpPr>
-          <p:cNvPr id="5" name="TextBox 4"/>
+              <a:rPr sz="1050" b="0">
+                <a:solidFill>
+                  <a:srgbClr val="6E6E73"/>
+                </a:solidFill>
+                <a:latin typeface="Arial"/>
+              </a:rPr>
+              <a:t>D40 1-cycle pre-solve and Method A D40 with matching mesh over 20 cycles. Both with the solver deliberately off.</a:t>
+            </a:r>
+          </a:p>
+        </p:txBody>
+      </p:sp>
+      <p:sp>
+        <p:nvSpPr>
+          <p:cNvPr id="11" name="Rounded Rectangle 10"/>
+          <p:cNvSpPr/>
+          <p:nvPr/>
+        </p:nvSpPr>
+        <p:spPr>
+          <a:xfrm>
+            <a:off x="777240" y="4334256"/>
+            <a:ext cx="3411626" cy="1664208"/>
+          </a:xfrm>
+          <a:prstGeom prst="roundRect">
+            <a:avLst>
+              <a:gd name="adj" fmla="val 3500"/>
+            </a:avLst>
+          </a:prstGeom>
+          <a:solidFill>
+            <a:srgbClr val="F5F5F7"/>
+          </a:solidFill>
+          <a:ln>
+            <a:noFill/>
+          </a:ln>
+          <a:effectLst/>
+        </p:spPr>
+        <p:style>
+          <a:lnRef idx="1">
+            <a:schemeClr val="accent1"/>
+          </a:lnRef>
+          <a:fillRef idx="3">
+            <a:schemeClr val="accent1"/>
+          </a:fillRef>
+          <a:effectRef idx="2">
+            <a:schemeClr val="accent1"/>
+          </a:effectRef>
+          <a:fontRef idx="minor">
+            <a:schemeClr val="lt1"/>
+          </a:fontRef>
+        </p:style>
+        <p:txBody>
+          <a:bodyPr rtlCol="0" anchor="ctr"/>
+          <a:lstStyle/>
+          <a:p>
+            <a:pPr algn="ctr"/>
+          </a:p>
+        </p:txBody>
+      </p:sp>
+      <p:sp>
+        <p:nvSpPr>
+          <p:cNvPr id="12" name="TextBox 11"/>
+          <p:cNvSpPr txBox="1"/>
+          <p:nvPr/>
+        </p:nvSpPr>
+        <p:spPr>
+          <a:xfrm>
+            <a:off x="996696" y="4517136"/>
+            <a:ext cx="2972714" cy="1371600"/>
+          </a:xfrm>
+          <a:prstGeom prst="rect">
+            <a:avLst/>
+          </a:prstGeom>
+          <a:noFill/>
+        </p:spPr>
+        <p:txBody>
+          <a:bodyPr wrap="square" anchor="t" lIns="0" rIns="0" tIns="0" bIns="0">
+            <a:spAutoFit/>
+          </a:bodyPr>
+          <a:lstStyle/>
+          <a:p>
+            <a:pPr algn="l">
+              <a:lnSpc>
+                <a:spcPct val="110000"/>
+              </a:lnSpc>
+            </a:pPr>
+            <a:r>
+              <a:rPr sz="1350" b="1">
+                <a:solidFill>
+                  <a:srgbClr val="1D1D1F"/>
+                </a:solidFill>
+                <a:latin typeface="Arial"/>
+              </a:rPr>
+              <a:t>A preset is not a shortcut</a:t>
+            </a:r>
+          </a:p>
+          <a:p>
+            <a:pPr algn="l">
+              <a:lnSpc>
+                <a:spcPct val="130000"/>
+              </a:lnSpc>
+              <a:spcBef>
+                <a:spcPts val="600"/>
+              </a:spcBef>
+            </a:pPr>
+            <a:r>
+              <a:rPr sz="1050" b="0">
+                <a:solidFill>
+                  <a:srgbClr val="6E6E73"/>
+                </a:solidFill>
+                <a:latin typeface="Arial"/>
+              </a:rPr>
+              <a:t>It goes through the same gates: if the result leaves the normative envelope, the error blocks it just the same.</a:t>
+            </a:r>
+          </a:p>
+        </p:txBody>
+      </p:sp>
+      <p:sp>
+        <p:nvSpPr>
+          <p:cNvPr id="13" name="Rounded Rectangle 12"/>
+          <p:cNvSpPr/>
+          <p:nvPr/>
+        </p:nvSpPr>
+        <p:spPr>
+          <a:xfrm>
+            <a:off x="4390034" y="4334256"/>
+            <a:ext cx="3411626" cy="1664208"/>
+          </a:xfrm>
+          <a:prstGeom prst="roundRect">
+            <a:avLst>
+              <a:gd name="adj" fmla="val 3500"/>
+            </a:avLst>
+          </a:prstGeom>
+          <a:solidFill>
+            <a:srgbClr val="F5F5F7"/>
+          </a:solidFill>
+          <a:ln>
+            <a:noFill/>
+          </a:ln>
+          <a:effectLst/>
+        </p:spPr>
+        <p:style>
+          <a:lnRef idx="1">
+            <a:schemeClr val="accent1"/>
+          </a:lnRef>
+          <a:fillRef idx="3">
+            <a:schemeClr val="accent1"/>
+          </a:fillRef>
+          <a:effectRef idx="2">
+            <a:schemeClr val="accent1"/>
+          </a:effectRef>
+          <a:fontRef idx="minor">
+            <a:schemeClr val="lt1"/>
+          </a:fontRef>
+        </p:style>
+        <p:txBody>
+          <a:bodyPr rtlCol="0" anchor="ctr"/>
+          <a:lstStyle/>
+          <a:p>
+            <a:pPr algn="ctr"/>
+          </a:p>
+        </p:txBody>
+      </p:sp>
+      <p:sp>
+        <p:nvSpPr>
+          <p:cNvPr id="14" name="TextBox 13"/>
+          <p:cNvSpPr txBox="1"/>
+          <p:nvPr/>
+        </p:nvSpPr>
+        <p:spPr>
+          <a:xfrm>
+            <a:off x="4609490" y="4517136"/>
+            <a:ext cx="2972714" cy="1371600"/>
+          </a:xfrm>
+          <a:prstGeom prst="rect">
+            <a:avLst/>
+          </a:prstGeom>
+          <a:noFill/>
+        </p:spPr>
+        <p:txBody>
+          <a:bodyPr wrap="square" anchor="t" lIns="0" rIns="0" tIns="0" bIns="0">
+            <a:spAutoFit/>
+          </a:bodyPr>
+          <a:lstStyle/>
+          <a:p>
+            <a:pPr algn="l">
+              <a:lnSpc>
+                <a:spcPct val="110000"/>
+              </a:lnSpc>
+            </a:pPr>
+            <a:r>
+              <a:rPr sz="1350" b="1">
+                <a:solidFill>
+                  <a:srgbClr val="1D1D1F"/>
+                </a:solidFill>
+                <a:latin typeface="Arial"/>
+              </a:rPr>
+              <a:t>Saved and reloaded</a:t>
+            </a:r>
+          </a:p>
+          <a:p>
+            <a:pPr algn="l">
+              <a:lnSpc>
+                <a:spcPct val="130000"/>
+              </a:lnSpc>
+              <a:spcBef>
+                <a:spcPts val="600"/>
+              </a:spcBef>
+            </a:pPr>
+            <a:r>
+              <a:rPr sz="1050" b="0">
+                <a:solidFill>
+                  <a:srgbClr val="6E6E73"/>
+                </a:solidFill>
+                <a:latin typeface="Arial"/>
+              </a:rPr>
+              <a:t>The configuration round-trips to JSON, so a case can be handed over as a file and reproduced exactly.</a:t>
+            </a:r>
+          </a:p>
+        </p:txBody>
+      </p:sp>
+      <p:sp>
+        <p:nvSpPr>
+          <p:cNvPr id="15" name="Rounded Rectangle 14"/>
+          <p:cNvSpPr/>
+          <p:nvPr/>
+        </p:nvSpPr>
+        <p:spPr>
+          <a:xfrm>
+            <a:off x="8002828" y="4334256"/>
+            <a:ext cx="3411626" cy="1664208"/>
+          </a:xfrm>
+          <a:prstGeom prst="roundRect">
+            <a:avLst>
+              <a:gd name="adj" fmla="val 3500"/>
+            </a:avLst>
+          </a:prstGeom>
+          <a:solidFill>
+            <a:srgbClr val="F5F5F7"/>
+          </a:solidFill>
+          <a:ln>
+            <a:noFill/>
+          </a:ln>
+          <a:effectLst/>
+        </p:spPr>
+        <p:style>
+          <a:lnRef idx="1">
+            <a:schemeClr val="accent1"/>
+          </a:lnRef>
+          <a:fillRef idx="3">
+            <a:schemeClr val="accent1"/>
+          </a:fillRef>
+          <a:effectRef idx="2">
+            <a:schemeClr val="accent1"/>
+          </a:effectRef>
+          <a:fontRef idx="minor">
+            <a:schemeClr val="lt1"/>
+          </a:fontRef>
+        </p:style>
+        <p:txBody>
+          <a:bodyPr rtlCol="0" anchor="ctr"/>
+          <a:lstStyle/>
+          <a:p>
+            <a:pPr algn="ctr"/>
+          </a:p>
+        </p:txBody>
+      </p:sp>
+      <p:sp>
+        <p:nvSpPr>
+          <p:cNvPr id="16" name="TextBox 15"/>
+          <p:cNvSpPr txBox="1"/>
+          <p:nvPr/>
+        </p:nvSpPr>
+        <p:spPr>
+          <a:xfrm>
+            <a:off x="8222284" y="4517136"/>
+            <a:ext cx="2972714" cy="1371600"/>
+          </a:xfrm>
+          <a:prstGeom prst="rect">
+            <a:avLst/>
+          </a:prstGeom>
+          <a:noFill/>
+        </p:spPr>
+        <p:txBody>
+          <a:bodyPr wrap="square" anchor="t" lIns="0" rIns="0" tIns="0" bIns="0">
+            <a:spAutoFit/>
+          </a:bodyPr>
+          <a:lstStyle/>
+          <a:p>
+            <a:pPr algn="l">
+              <a:lnSpc>
+                <a:spcPct val="110000"/>
+              </a:lnSpc>
+            </a:pPr>
+            <a:r>
+              <a:rPr sz="1350" b="1">
+                <a:solidFill>
+                  <a:srgbClr val="1D1D1F"/>
+                </a:solidFill>
+                <a:latin typeface="Arial"/>
+              </a:rPr>
+              <a:t>The bundled presets are guarded</a:t>
+            </a:r>
+          </a:p>
+          <a:p>
+            <a:pPr algn="l">
+              <a:lnSpc>
+                <a:spcPct val="130000"/>
+              </a:lnSpc>
+              <a:spcBef>
+                <a:spcPts val="600"/>
+              </a:spcBef>
+            </a:pPr>
+            <a:r>
+              <a:rPr sz="1050" b="0">
+                <a:solidFill>
+                  <a:srgbClr val="6E6E73"/>
+                </a:solidFill>
+                <a:latin typeface="Arial"/>
+              </a:rPr>
+              <a:t>The publisher checks the two FVA companions field by field: they cannot change silently between versions.</a:t>
+            </a:r>
+          </a:p>
+        </p:txBody>
+      </p:sp>
+      <p:sp>
+        <p:nvSpPr>
+          <p:cNvPr id="17" name="TextBox 16"/>
+          <p:cNvSpPr txBox="1"/>
+          <p:nvPr/>
+        </p:nvSpPr>
+        <p:spPr>
+          <a:xfrm>
+            <a:off x="777240" y="6035040"/>
+            <a:ext cx="10058400" cy="640080"/>
+          </a:xfrm>
+          <a:prstGeom prst="rect">
+            <a:avLst/>
+          </a:prstGeom>
+          <a:noFill/>
+        </p:spPr>
+        <p:txBody>
+          <a:bodyPr wrap="square" anchor="t" lIns="0" rIns="0" tIns="0" bIns="0">
+            <a:spAutoFit/>
+          </a:bodyPr>
+          <a:lstStyle/>
+          <a:p>
+            <a:pPr algn="l">
+              <a:lnSpc>
+                <a:spcPct val="125000"/>
+              </a:lnSpc>
+            </a:pPr>
+            <a:r>
+              <a:rPr sz="1150" b="0">
+                <a:solidFill>
+                  <a:srgbClr val="86868B"/>
+                </a:solidFill>
+                <a:latin typeface="Arial"/>
+              </a:rPr>
+              <a:t>The mesh presets exist to make the policy explicit, not to hide it.</a:t>
+            </a:r>
+          </a:p>
+        </p:txBody>
+      </p:sp>
+      <p:sp>
+        <p:nvSpPr>
+          <p:cNvPr id="18" name="TextBox 17"/>
           <p:cNvSpPr txBox="1"/>
           <p:nvPr/>
         </p:nvSpPr>
@@ -4521,7 +5152,7 @@
             <a:r>
               <a:rPr sz="1000" b="0">
                 <a:solidFill>
-                  <a:srgbClr val="9E9EA7"/>
+                  <a:srgbClr val="86868B"/>
                 </a:solidFill>
                 <a:latin typeface="Arial"/>
               </a:rPr>
@@ -4590,7 +5221,7 @@
                 </a:solidFill>
                 <a:latin typeface="Arial"/>
               </a:rPr>
-              <a:t>THE DETAIL THAT MATTERS</a:t>
+              <a:t>DESIGN SPACE</a:t>
             </a:r>
           </a:p>
         </p:txBody>
@@ -4603,121 +5234,664 @@
         </p:nvSpPr>
         <p:spPr>
           <a:xfrm>
-            <a:off x="777240" y="1024128"/>
-            <a:ext cx="3840480" cy="4206240"/>
-          </a:xfrm>
-          <a:prstGeom prst="rect">
-            <a:avLst/>
-          </a:prstGeom>
-          <a:noFill/>
-        </p:spPr>
-        <p:txBody>
-          <a:bodyPr wrap="square" anchor="t" lIns="0" rIns="0" tIns="0" bIns="0">
-            <a:spAutoFit/>
-          </a:bodyPr>
-          <a:lstStyle/>
-          <a:p>
-            <a:pPr algn="l">
-              <a:lnSpc>
-                <a:spcPct val="100000"/>
-              </a:lnSpc>
-            </a:pPr>
-            <a:r>
-              <a:rPr sz="2800" b="1">
+            <a:off x="777240" y="932688"/>
+            <a:ext cx="10637215" cy="914400"/>
+          </a:xfrm>
+          <a:prstGeom prst="rect">
+            <a:avLst/>
+          </a:prstGeom>
+          <a:noFill/>
+        </p:spPr>
+        <p:txBody>
+          <a:bodyPr wrap="square" anchor="t" lIns="0" rIns="0" tIns="0" bIns="0">
+            <a:spAutoFit/>
+          </a:bodyPr>
+          <a:lstStyle/>
+          <a:p>
+            <a:pPr algn="l">
+              <a:lnSpc>
+                <a:spcPct val="95000"/>
+              </a:lnSpc>
+            </a:pPr>
+            <a:r>
+              <a:rPr sz="3000" b="1">
                 <a:solidFill>
                   <a:srgbClr val="1D1D1F"/>
                 </a:solidFill>
                 <a:latin typeface="Arial"/>
               </a:rPr>
-              <a:t>The keyway band</a:t>
-            </a:r>
-          </a:p>
-          <a:p>
-            <a:pPr algn="l">
-              <a:lnSpc>
-                <a:spcPct val="135000"/>
+              <a:t>What can be built, and what is deliberately refused</a:t>
+            </a:r>
+          </a:p>
+        </p:txBody>
+      </p:sp>
+      <p:sp>
+        <p:nvSpPr>
+          <p:cNvPr id="4" name="Rounded Rectangle 3"/>
+          <p:cNvSpPr/>
+          <p:nvPr/>
+        </p:nvSpPr>
+        <p:spPr>
+          <a:xfrm>
+            <a:off x="777240" y="2011680"/>
+            <a:ext cx="3411626" cy="1664208"/>
+          </a:xfrm>
+          <a:prstGeom prst="roundRect">
+            <a:avLst>
+              <a:gd name="adj" fmla="val 3500"/>
+            </a:avLst>
+          </a:prstGeom>
+          <a:solidFill>
+            <a:srgbClr val="F5F5F7"/>
+          </a:solidFill>
+          <a:ln>
+            <a:noFill/>
+          </a:ln>
+          <a:effectLst/>
+        </p:spPr>
+        <p:style>
+          <a:lnRef idx="1">
+            <a:schemeClr val="accent1"/>
+          </a:lnRef>
+          <a:fillRef idx="3">
+            <a:schemeClr val="accent1"/>
+          </a:fillRef>
+          <a:effectRef idx="2">
+            <a:schemeClr val="accent1"/>
+          </a:effectRef>
+          <a:fontRef idx="minor">
+            <a:schemeClr val="lt1"/>
+          </a:fontRef>
+        </p:style>
+        <p:txBody>
+          <a:bodyPr rtlCol="0" anchor="ctr"/>
+          <a:lstStyle/>
+          <a:p>
+            <a:pPr algn="ctr"/>
+          </a:p>
+        </p:txBody>
+      </p:sp>
+      <p:sp>
+        <p:nvSpPr>
+          <p:cNvPr id="5" name="TextBox 4"/>
+          <p:cNvSpPr txBox="1"/>
+          <p:nvPr/>
+        </p:nvSpPr>
+        <p:spPr>
+          <a:xfrm>
+            <a:off x="996696" y="2194560"/>
+            <a:ext cx="2972714" cy="1371600"/>
+          </a:xfrm>
+          <a:prstGeom prst="rect">
+            <a:avLst/>
+          </a:prstGeom>
+          <a:noFill/>
+        </p:spPr>
+        <p:txBody>
+          <a:bodyPr wrap="square" anchor="t" lIns="0" rIns="0" tIns="0" bIns="0">
+            <a:spAutoFit/>
+          </a:bodyPr>
+          <a:lstStyle/>
+          <a:p>
+            <a:pPr algn="l">
+              <a:lnSpc>
+                <a:spcPct val="110000"/>
+              </a:lnSpc>
+            </a:pPr>
+            <a:r>
+              <a:rPr sz="1350" b="1">
+                <a:solidFill>
+                  <a:srgbClr val="1D1D1F"/>
+                </a:solidFill>
+                <a:latin typeface="Arial"/>
+              </a:rPr>
+              <a:t>Key forms</a:t>
+            </a:r>
+          </a:p>
+          <a:p>
+            <a:pPr algn="l">
+              <a:lnSpc>
+                <a:spcPct val="130000"/>
               </a:lnSpc>
               <a:spcBef>
-                <a:spcPts val="1300"/>
+                <a:spcPts val="600"/>
               </a:spcBef>
             </a:pPr>
             <a:r>
-              <a:rPr sz="1250" b="0">
+              <a:rPr sz="1050" b="0">
                 <a:solidFill>
                   <a:srgbClr val="6E6E73"/>
                 </a:solidFill>
                 <a:latin typeface="Arial"/>
               </a:rPr>
-              <a:t>The section shows the band of finer elements around the keyway: not a uniformly denser mesh, but refinement where the gradient is.</a:t>
-            </a:r>
-          </a:p>
-          <a:p>
-            <a:pPr algn="l">
-              <a:lnSpc>
-                <a:spcPct val="135000"/>
+              <a:t>A, B and AB implemented. C through J are refused with their own message: they need hole and chamfer dimensions that are not implemented.</a:t>
+            </a:r>
+          </a:p>
+        </p:txBody>
+      </p:sp>
+      <p:sp>
+        <p:nvSpPr>
+          <p:cNvPr id="6" name="Rounded Rectangle 5"/>
+          <p:cNvSpPr/>
+          <p:nvPr/>
+        </p:nvSpPr>
+        <p:spPr>
+          <a:xfrm>
+            <a:off x="4390034" y="2011680"/>
+            <a:ext cx="3411626" cy="1664208"/>
+          </a:xfrm>
+          <a:prstGeom prst="roundRect">
+            <a:avLst>
+              <a:gd name="adj" fmla="val 3500"/>
+            </a:avLst>
+          </a:prstGeom>
+          <a:solidFill>
+            <a:srgbClr val="F5F5F7"/>
+          </a:solidFill>
+          <a:ln>
+            <a:noFill/>
+          </a:ln>
+          <a:effectLst/>
+        </p:spPr>
+        <p:style>
+          <a:lnRef idx="1">
+            <a:schemeClr val="accent1"/>
+          </a:lnRef>
+          <a:fillRef idx="3">
+            <a:schemeClr val="accent1"/>
+          </a:fillRef>
+          <a:effectRef idx="2">
+            <a:schemeClr val="accent1"/>
+          </a:effectRef>
+          <a:fontRef idx="minor">
+            <a:schemeClr val="lt1"/>
+          </a:fontRef>
+        </p:style>
+        <p:txBody>
+          <a:bodyPr rtlCol="0" anchor="ctr"/>
+          <a:lstStyle/>
+          <a:p>
+            <a:pPr algn="ctr"/>
+          </a:p>
+        </p:txBody>
+      </p:sp>
+      <p:sp>
+        <p:nvSpPr>
+          <p:cNvPr id="7" name="TextBox 6"/>
+          <p:cNvSpPr txBox="1"/>
+          <p:nvPr/>
+        </p:nvSpPr>
+        <p:spPr>
+          <a:xfrm>
+            <a:off x="4609490" y="2194560"/>
+            <a:ext cx="2972714" cy="1371600"/>
+          </a:xfrm>
+          <a:prstGeom prst="rect">
+            <a:avLst/>
+          </a:prstGeom>
+          <a:noFill/>
+        </p:spPr>
+        <p:txBody>
+          <a:bodyPr wrap="square" anchor="t" lIns="0" rIns="0" tIns="0" bIns="0">
+            <a:spAutoFit/>
+          </a:bodyPr>
+          <a:lstStyle/>
+          <a:p>
+            <a:pPr algn="l">
+              <a:lnSpc>
+                <a:spcPct val="110000"/>
+              </a:lnSpc>
+            </a:pPr>
+            <a:r>
+              <a:rPr sz="1350" b="1">
+                <a:solidFill>
+                  <a:srgbClr val="1D1D1F"/>
+                </a:solidFill>
+                <a:latin typeface="Arial"/>
+              </a:rPr>
+              <a:t>Cylindrical or tapered hub</a:t>
+            </a:r>
+          </a:p>
+          <a:p>
+            <a:pPr algn="l">
+              <a:lnSpc>
+                <a:spcPct val="130000"/>
               </a:lnSpc>
               <a:spcBef>
-                <a:spcPts val="1300"/>
+                <a:spcPts val="600"/>
               </a:spcBef>
             </a:pPr>
             <a:r>
-              <a:rPr sz="1250" b="0">
+              <a:rPr sz="1050" b="0">
                 <a:solidFill>
                   <a:srgbClr val="6E6E73"/>
                 </a:solidFill>
                 <a:latin typeface="Arial"/>
               </a:rPr>
-              <a:t>The band width and the number of elements across the r2 fillet arc are parameters, and the audit checks that they were honoured.</a:t>
-            </a:r>
-          </a:p>
-          <a:p>
-            <a:pPr algn="l">
-              <a:lnSpc>
-                <a:spcPct val="135000"/>
+              <a:t>Tapered adds a fourth solid, the bushing, and switches off the notch band refinement; the model declares it.</a:t>
+            </a:r>
+          </a:p>
+        </p:txBody>
+      </p:sp>
+      <p:sp>
+        <p:nvSpPr>
+          <p:cNvPr id="8" name="Rounded Rectangle 7"/>
+          <p:cNvSpPr/>
+          <p:nvPr/>
+        </p:nvSpPr>
+        <p:spPr>
+          <a:xfrm>
+            <a:off x="8002828" y="2011680"/>
+            <a:ext cx="3411626" cy="1664208"/>
+          </a:xfrm>
+          <a:prstGeom prst="roundRect">
+            <a:avLst>
+              <a:gd name="adj" fmla="val 3500"/>
+            </a:avLst>
+          </a:prstGeom>
+          <a:solidFill>
+            <a:srgbClr val="F5F5F7"/>
+          </a:solidFill>
+          <a:ln>
+            <a:noFill/>
+          </a:ln>
+          <a:effectLst/>
+        </p:spPr>
+        <p:style>
+          <a:lnRef idx="1">
+            <a:schemeClr val="accent1"/>
+          </a:lnRef>
+          <a:fillRef idx="3">
+            <a:schemeClr val="accent1"/>
+          </a:fillRef>
+          <a:effectRef idx="2">
+            <a:schemeClr val="accent1"/>
+          </a:effectRef>
+          <a:fontRef idx="minor">
+            <a:schemeClr val="lt1"/>
+          </a:fontRef>
+        </p:style>
+        <p:txBody>
+          <a:bodyPr rtlCol="0" anchor="ctr"/>
+          <a:lstStyle/>
+          <a:p>
+            <a:pPr algn="ctr"/>
+          </a:p>
+        </p:txBody>
+      </p:sp>
+      <p:sp>
+        <p:nvSpPr>
+          <p:cNvPr id="9" name="TextBox 8"/>
+          <p:cNvSpPr txBox="1"/>
+          <p:nvPr/>
+        </p:nvSpPr>
+        <p:spPr>
+          <a:xfrm>
+            <a:off x="8222284" y="2194560"/>
+            <a:ext cx="2972714" cy="1371600"/>
+          </a:xfrm>
+          <a:prstGeom prst="rect">
+            <a:avLst/>
+          </a:prstGeom>
+          <a:noFill/>
+        </p:spPr>
+        <p:txBody>
+          <a:bodyPr wrap="square" anchor="t" lIns="0" rIns="0" tIns="0" bIns="0">
+            <a:spAutoFit/>
+          </a:bodyPr>
+          <a:lstStyle/>
+          <a:p>
+            <a:pPr algn="l">
+              <a:lnSpc>
+                <a:spcPct val="110000"/>
+              </a:lnSpc>
+            </a:pPr>
+            <a:r>
+              <a:rPr sz="1350" b="1">
+                <a:solidFill>
+                  <a:srgbClr val="1D1D1F"/>
+                </a:solidFill>
+                <a:latin typeface="Arial"/>
+              </a:rPr>
+              <a:t>Diameter</a:t>
+            </a:r>
+          </a:p>
+          <a:p>
+            <a:pPr algn="l">
+              <a:lnSpc>
+                <a:spcPct val="130000"/>
               </a:lnSpc>
               <a:spcBef>
-                <a:spcPts val="1300"/>
+                <a:spcPts val="600"/>
               </a:spcBef>
             </a:pPr>
             <a:r>
-              <a:rPr sz="1250" b="0">
+              <a:rPr sz="1050" b="0">
                 <a:solidFill>
                   <a:srgbClr val="6E6E73"/>
                 </a:solidFill>
                 <a:latin typeface="Arial"/>
               </a:rPr>
-              <a:t>The NOTCH_SHAFT element set is built around both keyway corners so the stress-concentration query cannot wander off to an unrelated hot spot.</a:t>
-            </a:r>
-          </a:p>
-        </p:txBody>
-      </p:sp>
-      <p:pic>
-        <p:nvPicPr>
-          <p:cNvPr id="4" name="Picture 3" descr="model_notch_section.png"/>
-          <p:cNvPicPr>
-            <a:picLocks noChangeAspect="1"/>
-          </p:cNvPicPr>
-          <p:nvPr/>
-        </p:nvPicPr>
-        <p:blipFill>
-          <a:blip r:embed="rId2"/>
-          <a:stretch>
-            <a:fillRect/>
-          </a:stretch>
-        </p:blipFill>
-        <p:spPr>
-          <a:xfrm>
-            <a:off x="5046267" y="685800"/>
-            <a:ext cx="6458105" cy="5486400"/>
-          </a:xfrm>
-          <a:prstGeom prst="rect">
-            <a:avLst/>
-          </a:prstGeom>
-        </p:spPr>
-      </p:pic>
-      <p:sp>
-        <p:nvSpPr>
-          <p:cNvPr id="5" name="TextBox 4"/>
+              <a:t>Continuous over 6 &lt; d1 &lt;= 500 mm, resolved to one of the 26 rows. Outside that it raises instead of approximating.</a:t>
+            </a:r>
+          </a:p>
+        </p:txBody>
+      </p:sp>
+      <p:sp>
+        <p:nvSpPr>
+          <p:cNvPr id="10" name="Rounded Rectangle 9"/>
+          <p:cNvSpPr/>
+          <p:nvPr/>
+        </p:nvSpPr>
+        <p:spPr>
+          <a:xfrm>
+            <a:off x="777240" y="3858768"/>
+            <a:ext cx="3411626" cy="1664208"/>
+          </a:xfrm>
+          <a:prstGeom prst="roundRect">
+            <a:avLst>
+              <a:gd name="adj" fmla="val 3500"/>
+            </a:avLst>
+          </a:prstGeom>
+          <a:solidFill>
+            <a:srgbClr val="F5F5F7"/>
+          </a:solidFill>
+          <a:ln>
+            <a:noFill/>
+          </a:ln>
+          <a:effectLst/>
+        </p:spPr>
+        <p:style>
+          <a:lnRef idx="1">
+            <a:schemeClr val="accent1"/>
+          </a:lnRef>
+          <a:fillRef idx="3">
+            <a:schemeClr val="accent1"/>
+          </a:fillRef>
+          <a:effectRef idx="2">
+            <a:schemeClr val="accent1"/>
+          </a:effectRef>
+          <a:fontRef idx="minor">
+            <a:schemeClr val="lt1"/>
+          </a:fontRef>
+        </p:style>
+        <p:txBody>
+          <a:bodyPr rtlCol="0" anchor="ctr"/>
+          <a:lstStyle/>
+          <a:p>
+            <a:pPr algn="ctr"/>
+          </a:p>
+        </p:txBody>
+      </p:sp>
+      <p:sp>
+        <p:nvSpPr>
+          <p:cNvPr id="11" name="TextBox 10"/>
+          <p:cNvSpPr txBox="1"/>
+          <p:nvPr/>
+        </p:nvSpPr>
+        <p:spPr>
+          <a:xfrm>
+            <a:off x="996696" y="4041648"/>
+            <a:ext cx="2972714" cy="1371600"/>
+          </a:xfrm>
+          <a:prstGeom prst="rect">
+            <a:avLst/>
+          </a:prstGeom>
+          <a:noFill/>
+        </p:spPr>
+        <p:txBody>
+          <a:bodyPr wrap="square" anchor="t" lIns="0" rIns="0" tIns="0" bIns="0">
+            <a:spAutoFit/>
+          </a:bodyPr>
+          <a:lstStyle/>
+          <a:p>
+            <a:pPr algn="l">
+              <a:lnSpc>
+                <a:spcPct val="110000"/>
+              </a:lnSpc>
+            </a:pPr>
+            <a:r>
+              <a:rPr sz="1350" b="1">
+                <a:solidFill>
+                  <a:srgbClr val="1D1D1F"/>
+                </a:solidFill>
+                <a:latin typeface="Arial"/>
+              </a:rPr>
+              <a:t>Element order and type</a:t>
+            </a:r>
+          </a:p>
+          <a:p>
+            <a:pPr algn="l">
+              <a:lnSpc>
+                <a:spcPct val="130000"/>
+              </a:lnSpc>
+              <a:spcBef>
+                <a:spcPts val="600"/>
+              </a:spcBef>
+            </a:pPr>
+            <a:r>
+              <a:rPr sz="1050" b="0">
+                <a:solidFill>
+                  <a:srgbClr val="6E6E73"/>
+                </a:solidFill>
+                <a:latin typeface="Arial"/>
+              </a:rPr>
+              <a:t>Linear or quadratic (default), C3D8/C3D8I or C3D20/C3D20R. C3D8R is accepted only as an explicit legacy choice, and it raises a warning.</a:t>
+            </a:r>
+          </a:p>
+        </p:txBody>
+      </p:sp>
+      <p:sp>
+        <p:nvSpPr>
+          <p:cNvPr id="12" name="Rounded Rectangle 11"/>
+          <p:cNvSpPr/>
+          <p:nvPr/>
+        </p:nvSpPr>
+        <p:spPr>
+          <a:xfrm>
+            <a:off x="4390034" y="3858768"/>
+            <a:ext cx="3411626" cy="1664208"/>
+          </a:xfrm>
+          <a:prstGeom prst="roundRect">
+            <a:avLst>
+              <a:gd name="adj" fmla="val 3500"/>
+            </a:avLst>
+          </a:prstGeom>
+          <a:solidFill>
+            <a:srgbClr val="F5F5F7"/>
+          </a:solidFill>
+          <a:ln>
+            <a:noFill/>
+          </a:ln>
+          <a:effectLst/>
+        </p:spPr>
+        <p:style>
+          <a:lnRef idx="1">
+            <a:schemeClr val="accent1"/>
+          </a:lnRef>
+          <a:fillRef idx="3">
+            <a:schemeClr val="accent1"/>
+          </a:fillRef>
+          <a:effectRef idx="2">
+            <a:schemeClr val="accent1"/>
+          </a:effectRef>
+          <a:fontRef idx="minor">
+            <a:schemeClr val="lt1"/>
+          </a:fontRef>
+        </p:style>
+        <p:txBody>
+          <a:bodyPr rtlCol="0" anchor="ctr"/>
+          <a:lstStyle/>
+          <a:p>
+            <a:pPr algn="ctr"/>
+          </a:p>
+        </p:txBody>
+      </p:sp>
+      <p:sp>
+        <p:nvSpPr>
+          <p:cNvPr id="13" name="TextBox 12"/>
+          <p:cNvSpPr txBox="1"/>
+          <p:nvPr/>
+        </p:nvSpPr>
+        <p:spPr>
+          <a:xfrm>
+            <a:off x="4609490" y="4041648"/>
+            <a:ext cx="2972714" cy="1371600"/>
+          </a:xfrm>
+          <a:prstGeom prst="rect">
+            <a:avLst/>
+          </a:prstGeom>
+          <a:noFill/>
+        </p:spPr>
+        <p:txBody>
+          <a:bodyPr wrap="square" anchor="t" lIns="0" rIns="0" tIns="0" bIns="0">
+            <a:spAutoFit/>
+          </a:bodyPr>
+          <a:lstStyle/>
+          <a:p>
+            <a:pPr algn="l">
+              <a:lnSpc>
+                <a:spcPct val="110000"/>
+              </a:lnSpc>
+            </a:pPr>
+            <a:r>
+              <a:rPr sz="1350" b="1">
+                <a:solidFill>
+                  <a:srgbClr val="1D1D1F"/>
+                </a:solidFill>
+                <a:latin typeface="Arial"/>
+              </a:rPr>
+              <a:t>Automatic seeds</a:t>
+            </a:r>
+          </a:p>
+          <a:p>
+            <a:pPr algn="l">
+              <a:lnSpc>
+                <a:spcPct val="130000"/>
+              </a:lnSpc>
+              <a:spcBef>
+                <a:spcPts val="600"/>
+              </a:spcBef>
+            </a:pPr>
+            <a:r>
+              <a:rPr sz="1050" b="0">
+                <a:solidFill>
+                  <a:srgbClr val="6E6E73"/>
+                </a:solidFill>
+                <a:latin typeface="Arial"/>
+              </a:rPr>
+              <a:t>With notch refinement, which is the default: D/16 on the shaft and d_a/40 on the hub. Without it, D/32 and d_a/80. The rule actually used is written into the audit.</a:t>
+            </a:r>
+          </a:p>
+        </p:txBody>
+      </p:sp>
+      <p:sp>
+        <p:nvSpPr>
+          <p:cNvPr id="14" name="Rounded Rectangle 13"/>
+          <p:cNvSpPr/>
+          <p:nvPr/>
+        </p:nvSpPr>
+        <p:spPr>
+          <a:xfrm>
+            <a:off x="8002828" y="3858768"/>
+            <a:ext cx="3411626" cy="1664208"/>
+          </a:xfrm>
+          <a:prstGeom prst="roundRect">
+            <a:avLst>
+              <a:gd name="adj" fmla="val 3500"/>
+            </a:avLst>
+          </a:prstGeom>
+          <a:solidFill>
+            <a:srgbClr val="F5F5F7"/>
+          </a:solidFill>
+          <a:ln>
+            <a:noFill/>
+          </a:ln>
+          <a:effectLst/>
+        </p:spPr>
+        <p:style>
+          <a:lnRef idx="1">
+            <a:schemeClr val="accent1"/>
+          </a:lnRef>
+          <a:fillRef idx="3">
+            <a:schemeClr val="accent1"/>
+          </a:fillRef>
+          <a:effectRef idx="2">
+            <a:schemeClr val="accent1"/>
+          </a:effectRef>
+          <a:fontRef idx="minor">
+            <a:schemeClr val="lt1"/>
+          </a:fontRef>
+        </p:style>
+        <p:txBody>
+          <a:bodyPr rtlCol="0" anchor="ctr"/>
+          <a:lstStyle/>
+          <a:p>
+            <a:pPr algn="ctr"/>
+          </a:p>
+        </p:txBody>
+      </p:sp>
+      <p:sp>
+        <p:nvSpPr>
+          <p:cNvPr id="15" name="TextBox 14"/>
+          <p:cNvSpPr txBox="1"/>
+          <p:nvPr/>
+        </p:nvSpPr>
+        <p:spPr>
+          <a:xfrm>
+            <a:off x="8222284" y="4041648"/>
+            <a:ext cx="2972714" cy="1371600"/>
+          </a:xfrm>
+          <a:prstGeom prst="rect">
+            <a:avLst/>
+          </a:prstGeom>
+          <a:noFill/>
+        </p:spPr>
+        <p:txBody>
+          <a:bodyPr wrap="square" anchor="t" lIns="0" rIns="0" tIns="0" bIns="0">
+            <a:spAutoFit/>
+          </a:bodyPr>
+          <a:lstStyle/>
+          <a:p>
+            <a:pPr algn="l">
+              <a:lnSpc>
+                <a:spcPct val="110000"/>
+              </a:lnSpc>
+            </a:pPr>
+            <a:r>
+              <a:rPr sz="1350" b="1">
+                <a:solidFill>
+                  <a:srgbClr val="1D1D1F"/>
+                </a:solidFill>
+                <a:latin typeface="Arial"/>
+              </a:rPr>
+              <a:t>Compliance mode</a:t>
+            </a:r>
+          </a:p>
+          <a:p>
+            <a:pPr algn="l">
+              <a:lnSpc>
+                <a:spcPct val="130000"/>
+              </a:lnSpc>
+              <a:spcBef>
+                <a:spcPts val="600"/>
+              </a:spcBef>
+            </a:pPr>
+            <a:r>
+              <a:rPr sz="1050" b="0">
+                <a:solidFill>
+                  <a:srgbClr val="6E6E73"/>
+                </a:solidFill>
+                <a:latin typeface="Arial"/>
+              </a:rPr>
+              <a:t>Normative or user override. Leaving the envelope is allowed; what is not allowed is for it to go unnoticed.</a:t>
+            </a:r>
+          </a:p>
+        </p:txBody>
+      </p:sp>
+      <p:sp>
+        <p:nvSpPr>
+          <p:cNvPr id="16" name="TextBox 15"/>
           <p:cNvSpPr txBox="1"/>
           <p:nvPr/>
         </p:nvSpPr>
@@ -4768,7 +5942,7 @@
     <p:bg>
       <p:bgPr>
         <a:solidFill>
-          <a:srgbClr val="FFFFFF"/>
+          <a:srgbClr val="0A0A0C"/>
         </a:solidFill>
         <a:effectLst/>
       </p:bgPr>
@@ -4810,18 +5984,114 @@
             <a:r>
               <a:rPr sz="1150" b="1">
                 <a:solidFill>
-                  <a:srgbClr val="0071E3"/>
-                </a:solidFill>
-                <a:latin typeface="Arial"/>
-              </a:rPr>
-              <a:t>MESH POLICY</a:t>
+                  <a:srgbClr val="2997FF"/>
+                </a:solidFill>
+                <a:latin typeface="Arial"/>
+              </a:rPr>
+              <a:t>THE RESULT</a:t>
+            </a:r>
+          </a:p>
+        </p:txBody>
+      </p:sp>
+      <p:sp>
+        <p:nvSpPr>
+          <p:cNvPr id="3" name="TextBox 2"/>
+          <p:cNvSpPr txBox="1"/>
+          <p:nvPr/>
+        </p:nvSpPr>
+        <p:spPr>
+          <a:xfrm>
+            <a:off x="777240" y="1024128"/>
+            <a:ext cx="3840480" cy="4206240"/>
+          </a:xfrm>
+          <a:prstGeom prst="rect">
+            <a:avLst/>
+          </a:prstGeom>
+          <a:noFill/>
+        </p:spPr>
+        <p:txBody>
+          <a:bodyPr wrap="square" anchor="t" lIns="0" rIns="0" tIns="0" bIns="0">
+            <a:spAutoFit/>
+          </a:bodyPr>
+          <a:lstStyle/>
+          <a:p>
+            <a:pPr algn="l">
+              <a:lnSpc>
+                <a:spcPct val="100000"/>
+              </a:lnSpc>
+            </a:pPr>
+            <a:r>
+              <a:rPr sz="2800" b="1">
+                <a:solidFill>
+                  <a:srgbClr val="FFFFFF"/>
+                </a:solidFill>
+                <a:latin typeface="Arial"/>
+              </a:rPr>
+              <a:t>Solids, not shells</a:t>
+            </a:r>
+          </a:p>
+          <a:p>
+            <a:pPr algn="l">
+              <a:lnSpc>
+                <a:spcPct val="135000"/>
+              </a:lnSpc>
+              <a:spcBef>
+                <a:spcPts val="1300"/>
+              </a:spcBef>
+            </a:pPr>
+            <a:r>
+              <a:rPr sz="1250" b="0">
+                <a:solidFill>
+                  <a:srgbClr val="9E9EA7"/>
+                </a:solidFill>
+                <a:latin typeface="Arial"/>
+              </a:rPr>
+              <a:t>Shaft, key and hub are built as independent solids and assembled with the tolerances of the standard.</a:t>
+            </a:r>
+          </a:p>
+          <a:p>
+            <a:pPr algn="l">
+              <a:lnSpc>
+                <a:spcPct val="135000"/>
+              </a:lnSpc>
+              <a:spcBef>
+                <a:spcPts val="1300"/>
+              </a:spcBef>
+            </a:pPr>
+            <a:r>
+              <a:rPr sz="1250" b="0">
+                <a:solidFill>
+                  <a:srgbClr val="9E9EA7"/>
+                </a:solidFill>
+                <a:latin typeface="Arial"/>
+              </a:rPr>
+              <a:t>The mesh is hexahedral and matching on the interfaces that carry load.</a:t>
+            </a:r>
+          </a:p>
+          <a:p>
+            <a:pPr algn="l">
+              <a:lnSpc>
+                <a:spcPct val="135000"/>
+              </a:lnSpc>
+              <a:spcBef>
+                <a:spcPts val="1300"/>
+              </a:spcBef>
+            </a:pPr>
+            <a:r>
+              <a:rPr sz="1250" b="0">
+                <a:solidFill>
+                  <a:srgbClr val="9E9EA7"/>
+                </a:solidFill>
+                <a:latin typeface="Arial"/>
+              </a:rPr>
+              <a:t>This is the image the engine itself saves to screenshots/ when it finishes.</a:t>
             </a:r>
           </a:p>
         </p:txBody>
       </p:sp>
       <p:pic>
         <p:nvPicPr>
-          <p:cNvPr id="3" name="Picture 2" descr="dia_malla.png"/>
+          <p:cNvPr id="4" name="Picture 3" descr="model_assembly_hex.png"/>
           <p:cNvPicPr>
             <a:picLocks noChangeAspect="1"/>
           </p:cNvPicPr>
@@ -4835,8 +6105,8 @@
         </p:blipFill>
         <p:spPr>
           <a:xfrm>
-            <a:off x="1639618" y="1170432"/>
-            <a:ext cx="8912458" cy="4727448"/>
+            <a:off x="5071897" y="685800"/>
+            <a:ext cx="6406845" cy="5486400"/>
           </a:xfrm>
           <a:prstGeom prst="rect">
             <a:avLst/>
@@ -4845,7 +6115,7 @@
       </p:pic>
       <p:sp>
         <p:nvSpPr>
-          <p:cNvPr id="4" name="TextBox 3"/>
+          <p:cNvPr id="5" name="TextBox 4"/>
           <p:cNvSpPr txBox="1"/>
           <p:nvPr/>
         </p:nvSpPr>
@@ -4873,7 +6143,7 @@
             <a:r>
               <a:rPr sz="1000" b="0">
                 <a:solidFill>
-                  <a:srgbClr val="86868B"/>
+                  <a:srgbClr val="9E9EA7"/>
                 </a:solidFill>
                 <a:latin typeface="Arial"/>
               </a:rPr>
@@ -4942,14 +6212,110 @@
                 </a:solidFill>
                 <a:latin typeface="Arial"/>
               </a:rPr>
-              <a:t>TRACEABILITY</a:t>
+              <a:t>THE DETAIL THAT MATTERS</a:t>
+            </a:r>
+          </a:p>
+        </p:txBody>
+      </p:sp>
+      <p:sp>
+        <p:nvSpPr>
+          <p:cNvPr id="3" name="TextBox 2"/>
+          <p:cNvSpPr txBox="1"/>
+          <p:nvPr/>
+        </p:nvSpPr>
+        <p:spPr>
+          <a:xfrm>
+            <a:off x="777240" y="1024128"/>
+            <a:ext cx="3840480" cy="4206240"/>
+          </a:xfrm>
+          <a:prstGeom prst="rect">
+            <a:avLst/>
+          </a:prstGeom>
+          <a:noFill/>
+        </p:spPr>
+        <p:txBody>
+          <a:bodyPr wrap="square" anchor="t" lIns="0" rIns="0" tIns="0" bIns="0">
+            <a:spAutoFit/>
+          </a:bodyPr>
+          <a:lstStyle/>
+          <a:p>
+            <a:pPr algn="l">
+              <a:lnSpc>
+                <a:spcPct val="100000"/>
+              </a:lnSpc>
+            </a:pPr>
+            <a:r>
+              <a:rPr sz="2800" b="1">
+                <a:solidFill>
+                  <a:srgbClr val="1D1D1F"/>
+                </a:solidFill>
+                <a:latin typeface="Arial"/>
+              </a:rPr>
+              <a:t>The keyway band</a:t>
+            </a:r>
+          </a:p>
+          <a:p>
+            <a:pPr algn="l">
+              <a:lnSpc>
+                <a:spcPct val="135000"/>
+              </a:lnSpc>
+              <a:spcBef>
+                <a:spcPts val="1300"/>
+              </a:spcBef>
+            </a:pPr>
+            <a:r>
+              <a:rPr sz="1250" b="0">
+                <a:solidFill>
+                  <a:srgbClr val="6E6E73"/>
+                </a:solidFill>
+                <a:latin typeface="Arial"/>
+              </a:rPr>
+              <a:t>The section shows the band of finer elements around the keyway: not a uniformly denser mesh, but refinement where the gradient is.</a:t>
+            </a:r>
+          </a:p>
+          <a:p>
+            <a:pPr algn="l">
+              <a:lnSpc>
+                <a:spcPct val="135000"/>
+              </a:lnSpc>
+              <a:spcBef>
+                <a:spcPts val="1300"/>
+              </a:spcBef>
+            </a:pPr>
+            <a:r>
+              <a:rPr sz="1250" b="0">
+                <a:solidFill>
+                  <a:srgbClr val="6E6E73"/>
+                </a:solidFill>
+                <a:latin typeface="Arial"/>
+              </a:rPr>
+              <a:t>The band width and the number of elements across the r2 fillet arc are parameters, and the audit checks that they were honoured.</a:t>
+            </a:r>
+          </a:p>
+          <a:p>
+            <a:pPr algn="l">
+              <a:lnSpc>
+                <a:spcPct val="135000"/>
+              </a:lnSpc>
+              <a:spcBef>
+                <a:spcPts val="1300"/>
+              </a:spcBef>
+            </a:pPr>
+            <a:r>
+              <a:rPr sz="1250" b="0">
+                <a:solidFill>
+                  <a:srgbClr val="6E6E73"/>
+                </a:solidFill>
+                <a:latin typeface="Arial"/>
+              </a:rPr>
+              <a:t>The NOTCH_SHAFT element set is built around both keyway corners so the stress-concentration query cannot wander off to an unrelated hot spot.</a:t>
             </a:r>
           </a:p>
         </p:txBody>
       </p:sp>
       <p:pic>
         <p:nvPicPr>
-          <p:cNvPr id="3" name="Picture 2" descr="dia_badges.png"/>
+          <p:cNvPr id="4" name="Picture 3" descr="model_notch_section.png"/>
           <p:cNvPicPr>
             <a:picLocks noChangeAspect="1"/>
           </p:cNvPicPr>
@@ -4963,8 +6329,8 @@
         </p:blipFill>
         <p:spPr>
           <a:xfrm>
-            <a:off x="1126965" y="1170432"/>
-            <a:ext cx="9937765" cy="4727448"/>
+            <a:off x="5046267" y="685800"/>
+            <a:ext cx="6458105" cy="5486400"/>
           </a:xfrm>
           <a:prstGeom prst="rect">
             <a:avLst/>
@@ -4973,7 +6339,7 @@
       </p:pic>
       <p:sp>
         <p:nvSpPr>
-          <p:cNvPr id="4" name="TextBox 3"/>
+          <p:cNvPr id="5" name="TextBox 4"/>
           <p:cNvSpPr txBox="1"/>
           <p:nvPr/>
         </p:nvSpPr>
@@ -5070,605 +6436,38 @@
                 </a:solidFill>
                 <a:latin typeface="Arial"/>
               </a:rPr>
-              <a:t>THE NORMATIVE DATUM</a:t>
-            </a:r>
-          </a:p>
-        </p:txBody>
-      </p:sp>
-      <p:sp>
-        <p:nvSpPr>
-          <p:cNvPr id="3" name="TextBox 2"/>
-          <p:cNvSpPr txBox="1"/>
-          <p:nvPr/>
-        </p:nvSpPr>
-        <p:spPr>
-          <a:xfrm>
-            <a:off x="777240" y="932688"/>
-            <a:ext cx="10637215" cy="914400"/>
-          </a:xfrm>
-          <a:prstGeom prst="rect">
-            <a:avLst/>
-          </a:prstGeom>
-          <a:noFill/>
-        </p:spPr>
-        <p:txBody>
-          <a:bodyPr wrap="square" anchor="t" lIns="0" rIns="0" tIns="0" bIns="0">
-            <a:spAutoFit/>
-          </a:bodyPr>
-          <a:lstStyle/>
-          <a:p>
-            <a:pPr algn="l">
-              <a:lnSpc>
-                <a:spcPct val="95000"/>
-              </a:lnSpc>
-            </a:pPr>
-            <a:r>
-              <a:rPr sz="3100" b="1">
-                <a:solidFill>
-                  <a:srgbClr val="1D1D1F"/>
-                </a:solidFill>
-                <a:latin typeface="Arial"/>
-              </a:rPr>
-              <a:t>The table is never interpolated: either a row or an error</a:t>
-            </a:r>
-          </a:p>
-        </p:txBody>
-      </p:sp>
+              <a:t>MESH POLICY</a:t>
+            </a:r>
+          </a:p>
+        </p:txBody>
+      </p:sp>
+      <p:pic>
+        <p:nvPicPr>
+          <p:cNvPr id="3" name="Picture 2" descr="dia_malla.png"/>
+          <p:cNvPicPr>
+            <a:picLocks noChangeAspect="1"/>
+          </p:cNvPicPr>
+          <p:nvPr/>
+        </p:nvPicPr>
+        <p:blipFill>
+          <a:blip r:embed="rId2"/>
+          <a:stretch>
+            <a:fillRect/>
+          </a:stretch>
+        </p:blipFill>
+        <p:spPr>
+          <a:xfrm>
+            <a:off x="1639618" y="1170432"/>
+            <a:ext cx="8912458" cy="4727448"/>
+          </a:xfrm>
+          <a:prstGeom prst="rect">
+            <a:avLst/>
+          </a:prstGeom>
+        </p:spPr>
+      </p:pic>
       <p:sp>
         <p:nvSpPr>
           <p:cNvPr id="4" name="TextBox 3"/>
-          <p:cNvSpPr txBox="1"/>
-          <p:nvPr/>
-        </p:nvSpPr>
-        <p:spPr>
-          <a:xfrm>
-            <a:off x="777240" y="1700784"/>
-            <a:ext cx="9509760" cy="822960"/>
-          </a:xfrm>
-          <a:prstGeom prst="rect">
-            <a:avLst/>
-          </a:prstGeom>
-          <a:noFill/>
-        </p:spPr>
-        <p:txBody>
-          <a:bodyPr wrap="square" anchor="t" lIns="0" rIns="0" tIns="0" bIns="0">
-            <a:spAutoFit/>
-          </a:bodyPr>
-          <a:lstStyle/>
-          <a:p>
-            <a:pPr algn="l">
-              <a:lnSpc>
-                <a:spcPct val="125000"/>
-              </a:lnSpc>
-            </a:pPr>
-            <a:r>
-              <a:rPr sz="1450" b="0">
-                <a:solidFill>
-                  <a:srgbClr val="6E6E73"/>
-                </a:solidFill>
-                <a:latin typeface="Arial"/>
-              </a:rPr>
-              <a:t>din6885_row() returns the exact row with its NORMATIVE badge. Outside the range of the standard it raises, so nobody can claim DIN compliance from the nearest row.</a:t>
-            </a:r>
-          </a:p>
-        </p:txBody>
-      </p:sp>
-      <p:sp>
-        <p:nvSpPr>
-          <p:cNvPr id="5" name="Rounded Rectangle 4"/>
-          <p:cNvSpPr/>
-          <p:nvPr/>
-        </p:nvSpPr>
-        <p:spPr>
-          <a:xfrm>
-            <a:off x="777240" y="2788920"/>
-            <a:ext cx="2542032" cy="1627632"/>
-          </a:xfrm>
-          <a:prstGeom prst="roundRect">
-            <a:avLst>
-              <a:gd name="adj" fmla="val 3500"/>
-            </a:avLst>
-          </a:prstGeom>
-          <a:solidFill>
-            <a:srgbClr val="F5F5F7"/>
-          </a:solidFill>
-          <a:ln>
-            <a:noFill/>
-          </a:ln>
-          <a:effectLst/>
-        </p:spPr>
-        <p:style>
-          <a:lnRef idx="1">
-            <a:schemeClr val="accent1"/>
-          </a:lnRef>
-          <a:fillRef idx="3">
-            <a:schemeClr val="accent1"/>
-          </a:fillRef>
-          <a:effectRef idx="2">
-            <a:schemeClr val="accent1"/>
-          </a:effectRef>
-          <a:fontRef idx="minor">
-            <a:schemeClr val="lt1"/>
-          </a:fontRef>
-        </p:style>
-        <p:txBody>
-          <a:bodyPr rtlCol="0" anchor="ctr"/>
-          <a:lstStyle/>
-          <a:p>
-            <a:pPr algn="ctr"/>
-          </a:p>
-        </p:txBody>
-      </p:sp>
-      <p:sp>
-        <p:nvSpPr>
-          <p:cNvPr id="6" name="TextBox 5"/>
-          <p:cNvSpPr txBox="1"/>
-          <p:nvPr/>
-        </p:nvSpPr>
-        <p:spPr>
-          <a:xfrm>
-            <a:off x="1014984" y="2990088"/>
-            <a:ext cx="2084832" cy="1298448"/>
-          </a:xfrm>
-          <a:prstGeom prst="rect">
-            <a:avLst/>
-          </a:prstGeom>
-          <a:noFill/>
-        </p:spPr>
-        <p:txBody>
-          <a:bodyPr wrap="square" anchor="t" lIns="0" rIns="0" tIns="0" bIns="0">
-            <a:spAutoFit/>
-          </a:bodyPr>
-          <a:lstStyle/>
-          <a:p>
-            <a:pPr algn="l">
-              <a:lnSpc>
-                <a:spcPct val="105000"/>
-              </a:lnSpc>
-            </a:pPr>
-            <a:r>
-              <a:rPr sz="1450" b="1">
-                <a:solidFill>
-                  <a:srgbClr val="1D1D1F"/>
-                </a:solidFill>
-                <a:latin typeface="Arial"/>
-              </a:rPr>
-              <a:t>26   cross-section rows</a:t>
-            </a:r>
-          </a:p>
-          <a:p>
-            <a:pPr algn="l">
-              <a:lnSpc>
-                <a:spcPct val="130000"/>
-              </a:lnSpc>
-              <a:spcBef>
-                <a:spcPts val="600"/>
-              </a:spcBef>
-            </a:pPr>
-            <a:r>
-              <a:rPr sz="1050" b="0">
-                <a:solidFill>
-                  <a:srgbClr val="6E6E73"/>
-                </a:solidFill>
-                <a:latin typeface="Arial"/>
-              </a:rPr>
-              <a:t>b × h, t1, t2, the t1 tolerance and the d2 increment for every diameter band</a:t>
-            </a:r>
-          </a:p>
-        </p:txBody>
-      </p:sp>
-      <p:sp>
-        <p:nvSpPr>
-          <p:cNvPr id="7" name="Rounded Rectangle 6"/>
-          <p:cNvSpPr/>
-          <p:nvPr/>
-        </p:nvSpPr>
-        <p:spPr>
-          <a:xfrm>
-            <a:off x="3474720" y="2788920"/>
-            <a:ext cx="2542032" cy="1627632"/>
-          </a:xfrm>
-          <a:prstGeom prst="roundRect">
-            <a:avLst>
-              <a:gd name="adj" fmla="val 3500"/>
-            </a:avLst>
-          </a:prstGeom>
-          <a:solidFill>
-            <a:srgbClr val="F5F5F7"/>
-          </a:solidFill>
-          <a:ln>
-            <a:noFill/>
-          </a:ln>
-          <a:effectLst/>
-        </p:spPr>
-        <p:style>
-          <a:lnRef idx="1">
-            <a:schemeClr val="accent1"/>
-          </a:lnRef>
-          <a:fillRef idx="3">
-            <a:schemeClr val="accent1"/>
-          </a:fillRef>
-          <a:effectRef idx="2">
-            <a:schemeClr val="accent1"/>
-          </a:effectRef>
-          <a:fontRef idx="minor">
-            <a:schemeClr val="lt1"/>
-          </a:fontRef>
-        </p:style>
-        <p:txBody>
-          <a:bodyPr rtlCol="0" anchor="ctr"/>
-          <a:lstStyle/>
-          <a:p>
-            <a:pPr algn="ctr"/>
-          </a:p>
-        </p:txBody>
-      </p:sp>
-      <p:sp>
-        <p:nvSpPr>
-          <p:cNvPr id="8" name="TextBox 7"/>
-          <p:cNvSpPr txBox="1"/>
-          <p:nvPr/>
-        </p:nvSpPr>
-        <p:spPr>
-          <a:xfrm>
-            <a:off x="3712464" y="2990088"/>
-            <a:ext cx="2084832" cy="1298448"/>
-          </a:xfrm>
-          <a:prstGeom prst="rect">
-            <a:avLst/>
-          </a:prstGeom>
-          <a:noFill/>
-        </p:spPr>
-        <p:txBody>
-          <a:bodyPr wrap="square" anchor="t" lIns="0" rIns="0" tIns="0" bIns="0">
-            <a:spAutoFit/>
-          </a:bodyPr>
-          <a:lstStyle/>
-          <a:p>
-            <a:pPr algn="l">
-              <a:lnSpc>
-                <a:spcPct val="105000"/>
-              </a:lnSpc>
-            </a:pPr>
-            <a:r>
-              <a:rPr sz="1450" b="1">
-                <a:solidFill>
-                  <a:srgbClr val="1D1D1F"/>
-                </a:solidFill>
-                <a:latin typeface="Arial"/>
-              </a:rPr>
-              <a:t>34   standard lengths</a:t>
-            </a:r>
-          </a:p>
-          <a:p>
-            <a:pPr algn="l">
-              <a:lnSpc>
-                <a:spcPct val="130000"/>
-              </a:lnSpc>
-              <a:spcBef>
-                <a:spcPts val="600"/>
-              </a:spcBef>
-            </a:pPr>
-            <a:r>
-              <a:rPr sz="1050" b="0">
-                <a:solidFill>
-                  <a:srgbClr val="6E6E73"/>
-                </a:solidFill>
-                <a:latin typeface="Arial"/>
-              </a:rPr>
-              <a:t>from 6 to 400 mm; the key is snapped down, never up</a:t>
-            </a:r>
-          </a:p>
-        </p:txBody>
-      </p:sp>
-      <p:sp>
-        <p:nvSpPr>
-          <p:cNvPr id="9" name="Rounded Rectangle 8"/>
-          <p:cNvSpPr/>
-          <p:nvPr/>
-        </p:nvSpPr>
-        <p:spPr>
-          <a:xfrm>
-            <a:off x="6172200" y="2788920"/>
-            <a:ext cx="2542032" cy="1627632"/>
-          </a:xfrm>
-          <a:prstGeom prst="roundRect">
-            <a:avLst>
-              <a:gd name="adj" fmla="val 3500"/>
-            </a:avLst>
-          </a:prstGeom>
-          <a:solidFill>
-            <a:srgbClr val="F5F5F7"/>
-          </a:solidFill>
-          <a:ln>
-            <a:noFill/>
-          </a:ln>
-          <a:effectLst/>
-        </p:spPr>
-        <p:style>
-          <a:lnRef idx="1">
-            <a:schemeClr val="accent1"/>
-          </a:lnRef>
-          <a:fillRef idx="3">
-            <a:schemeClr val="accent1"/>
-          </a:fillRef>
-          <a:effectRef idx="2">
-            <a:schemeClr val="accent1"/>
-          </a:effectRef>
-          <a:fontRef idx="minor">
-            <a:schemeClr val="lt1"/>
-          </a:fontRef>
-        </p:style>
-        <p:txBody>
-          <a:bodyPr rtlCol="0" anchor="ctr"/>
-          <a:lstStyle/>
-          <a:p>
-            <a:pPr algn="ctr"/>
-          </a:p>
-        </p:txBody>
-      </p:sp>
-      <p:sp>
-        <p:nvSpPr>
-          <p:cNvPr id="10" name="TextBox 9"/>
-          <p:cNvSpPr txBox="1"/>
-          <p:nvPr/>
-        </p:nvSpPr>
-        <p:spPr>
-          <a:xfrm>
-            <a:off x="6409944" y="2990088"/>
-            <a:ext cx="2084832" cy="1298448"/>
-          </a:xfrm>
-          <a:prstGeom prst="rect">
-            <a:avLst/>
-          </a:prstGeom>
-          <a:noFill/>
-        </p:spPr>
-        <p:txBody>
-          <a:bodyPr wrap="square" anchor="t" lIns="0" rIns="0" tIns="0" bIns="0">
-            <a:spAutoFit/>
-          </a:bodyPr>
-          <a:lstStyle/>
-          <a:p>
-            <a:pPr algn="l">
-              <a:lnSpc>
-                <a:spcPct val="105000"/>
-              </a:lnSpc>
-            </a:pPr>
-            <a:r>
-              <a:rPr sz="1450" b="1">
-                <a:solidFill>
-                  <a:srgbClr val="1D1D1F"/>
-                </a:solidFill>
-                <a:latin typeface="Arial"/>
-              </a:rPr>
-              <a:t>7   radius bands</a:t>
-            </a:r>
-          </a:p>
-          <a:p>
-            <a:pPr algn="l">
-              <a:lnSpc>
-                <a:spcPct val="130000"/>
-              </a:lnSpc>
-              <a:spcBef>
-                <a:spcPts val="600"/>
-              </a:spcBef>
-            </a:pPr>
-            <a:r>
-              <a:rPr sz="1050" b="0">
-                <a:solidFill>
-                  <a:srgbClr val="6E6E73"/>
-                </a:solidFill>
-                <a:latin typeface="Arial"/>
-              </a:rPr>
-              <a:t>mouth r1 and root r2 separately: they are not the same radius</a:t>
-            </a:r>
-          </a:p>
-        </p:txBody>
-      </p:sp>
-      <p:sp>
-        <p:nvSpPr>
-          <p:cNvPr id="11" name="Rounded Rectangle 10"/>
-          <p:cNvSpPr/>
-          <p:nvPr/>
-        </p:nvSpPr>
-        <p:spPr>
-          <a:xfrm>
-            <a:off x="8869680" y="2788920"/>
-            <a:ext cx="2542032" cy="1627632"/>
-          </a:xfrm>
-          <a:prstGeom prst="roundRect">
-            <a:avLst>
-              <a:gd name="adj" fmla="val 3500"/>
-            </a:avLst>
-          </a:prstGeom>
-          <a:solidFill>
-            <a:srgbClr val="F5F5F7"/>
-          </a:solidFill>
-          <a:ln>
-            <a:noFill/>
-          </a:ln>
-          <a:effectLst/>
-        </p:spPr>
-        <p:style>
-          <a:lnRef idx="1">
-            <a:schemeClr val="accent1"/>
-          </a:lnRef>
-          <a:fillRef idx="3">
-            <a:schemeClr val="accent1"/>
-          </a:fillRef>
-          <a:effectRef idx="2">
-            <a:schemeClr val="accent1"/>
-          </a:effectRef>
-          <a:fontRef idx="minor">
-            <a:schemeClr val="lt1"/>
-          </a:fontRef>
-        </p:style>
-        <p:txBody>
-          <a:bodyPr rtlCol="0" anchor="ctr"/>
-          <a:lstStyle/>
-          <a:p>
-            <a:pPr algn="ctr"/>
-          </a:p>
-        </p:txBody>
-      </p:sp>
-      <p:sp>
-        <p:nvSpPr>
-          <p:cNvPr id="12" name="TextBox 11"/>
-          <p:cNvSpPr txBox="1"/>
-          <p:nvPr/>
-        </p:nvSpPr>
-        <p:spPr>
-          <a:xfrm>
-            <a:off x="9107424" y="2990088"/>
-            <a:ext cx="2084832" cy="1298448"/>
-          </a:xfrm>
-          <a:prstGeom prst="rect">
-            <a:avLst/>
-          </a:prstGeom>
-          <a:noFill/>
-        </p:spPr>
-        <p:txBody>
-          <a:bodyPr wrap="square" anchor="t" lIns="0" rIns="0" tIns="0" bIns="0">
-            <a:spAutoFit/>
-          </a:bodyPr>
-          <a:lstStyle/>
-          <a:p>
-            <a:pPr algn="l">
-              <a:lnSpc>
-                <a:spcPct val="105000"/>
-              </a:lnSpc>
-            </a:pPr>
-            <a:r>
-              <a:rPr sz="1450" b="1">
-                <a:solidFill>
-                  <a:srgbClr val="1D1D1F"/>
-                </a:solidFill>
-                <a:latin typeface="Arial"/>
-              </a:rPr>
-              <a:t>3   forms implemented</a:t>
-            </a:r>
-          </a:p>
-          <a:p>
-            <a:pPr algn="l">
-              <a:lnSpc>
-                <a:spcPct val="130000"/>
-              </a:lnSpc>
-              <a:spcBef>
-                <a:spcPts val="600"/>
-              </a:spcBef>
-            </a:pPr>
-            <a:r>
-              <a:rPr sz="1050" b="0">
-                <a:solidFill>
-                  <a:srgbClr val="6E6E73"/>
-                </a:solidFill>
-                <a:latin typeface="Arial"/>
-              </a:rPr>
-              <a:t>A, B and AB. C through J are rejected with their own message, not silently</a:t>
-            </a:r>
-          </a:p>
-        </p:txBody>
-      </p:sp>
-      <p:sp>
-        <p:nvSpPr>
-          <p:cNvPr id="13" name="TextBox 12"/>
-          <p:cNvSpPr txBox="1"/>
-          <p:nvPr/>
-        </p:nvSpPr>
-        <p:spPr>
-          <a:xfrm>
-            <a:off x="777240" y="4736592"/>
-            <a:ext cx="10637215" cy="1280160"/>
-          </a:xfrm>
-          <a:prstGeom prst="rect">
-            <a:avLst/>
-          </a:prstGeom>
-          <a:noFill/>
-        </p:spPr>
-        <p:txBody>
-          <a:bodyPr wrap="square" anchor="t" lIns="0" rIns="0" tIns="0" bIns="0">
-            <a:spAutoFit/>
-          </a:bodyPr>
-          <a:lstStyle/>
-          <a:p>
-            <a:pPr algn="l">
-              <a:lnSpc>
-                <a:spcPct val="100000"/>
-              </a:lnSpc>
-            </a:pPr>
-            <a:r>
-              <a:rPr sz="1500" b="1">
-                <a:solidFill>
-                  <a:srgbClr val="1D1D1F"/>
-                </a:solidFill>
-                <a:latin typeface="Arial"/>
-              </a:rPr>
-              <a:t>D40, the project's reference row</a:t>
-            </a:r>
-          </a:p>
-          <a:p>
-            <a:pPr algn="l">
-              <a:lnSpc>
-                <a:spcPct val="135000"/>
-              </a:lnSpc>
-              <a:spcBef>
-                <a:spcPts val="1000"/>
-              </a:spcBef>
-            </a:pPr>
-            <a:r>
-              <a:rPr sz="1300" b="0">
-                <a:solidFill>
-                  <a:srgbClr val="6E6E73"/>
-                </a:solidFill>
-                <a:latin typeface="Consolas"/>
-              </a:rPr>
-              <a:t>38 &lt; d1 ≤ 44 mm     b × h = 12 × 8 mm     t1 = 5.00 +0.20 mm     t2 = 3.30 mm     d2(ref) = 48.00 mm     r1 = 0.25…0.40 mm     r2 = 0.16…0.25 mm</a:t>
-            </a:r>
-          </a:p>
-        </p:txBody>
-      </p:sp>
-      <p:sp>
-        <p:nvSpPr>
-          <p:cNvPr id="14" name="TextBox 13"/>
-          <p:cNvSpPr txBox="1"/>
-          <p:nvPr/>
-        </p:nvSpPr>
-        <p:spPr>
-          <a:xfrm>
-            <a:off x="777240" y="5943600"/>
-            <a:ext cx="10058400" cy="640080"/>
-          </a:xfrm>
-          <a:prstGeom prst="rect">
-            <a:avLst/>
-          </a:prstGeom>
-          <a:noFill/>
-        </p:spPr>
-        <p:txBody>
-          <a:bodyPr wrap="square" anchor="t" lIns="0" rIns="0" tIns="0" bIns="0">
-            <a:spAutoFit/>
-          </a:bodyPr>
-          <a:lstStyle/>
-          <a:p>
-            <a:pPr algn="l">
-              <a:lnSpc>
-                <a:spcPct val="125000"/>
-              </a:lnSpc>
-            </a:pPr>
-            <a:r>
-              <a:rPr sz="1150" b="0">
-                <a:solidFill>
-                  <a:srgbClr val="86868B"/>
-                </a:solidFill>
-                <a:latin typeface="Arial"/>
-              </a:rPr>
-              <a:t>The key chamfer is not in the table: it is a user parameter (c = 0.8 mm by default) and the report says so.</a:t>
-            </a:r>
-          </a:p>
-        </p:txBody>
-      </p:sp>
-      <p:sp>
-        <p:nvSpPr>
-          <p:cNvPr id="15" name="TextBox 14"/>
           <p:cNvSpPr txBox="1"/>
           <p:nvPr/>
         </p:nvSpPr>
@@ -6215,14 +7014,14 @@
                 </a:solidFill>
                 <a:latin typeface="Arial"/>
               </a:rPr>
-              <a:t>LOAD CAPACITY</a:t>
+              <a:t>MESH SELECTION</a:t>
             </a:r>
           </a:p>
         </p:txBody>
       </p:sp>
       <p:pic>
         <p:nvPicPr>
-          <p:cNvPr id="3" name="Picture 2" descr="dia_metodos.png"/>
+          <p:cNvPr id="3" name="Picture 2" descr="dia_mesh_loop.png"/>
           <p:cNvPicPr>
             <a:picLocks noChangeAspect="1"/>
           </p:cNvPicPr>
@@ -6236,8 +7035,8 @@
         </p:blipFill>
         <p:spPr>
           <a:xfrm>
-            <a:off x="973788" y="1170432"/>
-            <a:ext cx="10244119" cy="4727448"/>
+            <a:off x="777240" y="1366557"/>
+            <a:ext cx="10637215" cy="4335197"/>
           </a:xfrm>
           <a:prstGeom prst="rect">
             <a:avLst/>
@@ -6343,38 +7142,716 @@
                 </a:solidFill>
                 <a:latin typeface="Arial"/>
               </a:rPr>
-              <a:t>RESULTS</a:t>
-            </a:r>
-          </a:p>
-        </p:txBody>
-      </p:sp>
-      <p:pic>
-        <p:nvPicPr>
-          <p:cNvPr id="3" name="Picture 2" descr="chart_pares.png"/>
-          <p:cNvPicPr>
-            <a:picLocks noChangeAspect="1"/>
-          </p:cNvPicPr>
-          <p:nvPr/>
-        </p:nvPicPr>
-        <p:blipFill>
-          <a:blip r:embed="rId2"/>
-          <a:stretch>
-            <a:fillRect/>
-          </a:stretch>
-        </p:blipFill>
-        <p:spPr>
-          <a:xfrm>
-            <a:off x="777240" y="1192479"/>
-            <a:ext cx="10637215" cy="4683353"/>
-          </a:xfrm>
-          <a:prstGeom prst="rect">
-            <a:avLst/>
-          </a:prstGeom>
-        </p:spPr>
-      </p:pic>
-      <p:sp>
-        <p:nvSpPr>
-          <p:cNvPr id="4" name="TextBox 3"/>
+              <a:t>ANALYSIS SETUP</a:t>
+            </a:r>
+          </a:p>
+        </p:txBody>
+      </p:sp>
+      <p:sp>
+        <p:nvSpPr>
+          <p:cNvPr id="3" name="TextBox 2"/>
+          <p:cNvSpPr txBox="1"/>
+          <p:nvPr/>
+        </p:nvSpPr>
+        <p:spPr>
+          <a:xfrm>
+            <a:off x="777240" y="932688"/>
+            <a:ext cx="10637215" cy="914400"/>
+          </a:xfrm>
+          <a:prstGeom prst="rect">
+            <a:avLst/>
+          </a:prstGeom>
+          <a:noFill/>
+        </p:spPr>
+        <p:txBody>
+          <a:bodyPr wrap="square" anchor="t" lIns="0" rIns="0" tIns="0" bIns="0">
+            <a:spAutoFit/>
+          </a:bodyPr>
+          <a:lstStyle/>
+          <a:p>
+            <a:pPr algn="l">
+              <a:lnSpc>
+                <a:spcPct val="95000"/>
+              </a:lnSpc>
+            </a:pPr>
+            <a:r>
+              <a:rPr sz="3000" b="1">
+                <a:solidFill>
+                  <a:srgbClr val="1D1D1F"/>
+                </a:solidFill>
+                <a:latin typeface="Arial"/>
+              </a:rPr>
+              <a:t>If the analysis is requested, this is what gets built</a:t>
+            </a:r>
+          </a:p>
+        </p:txBody>
+      </p:sp>
+      <p:sp>
+        <p:nvSpPr>
+          <p:cNvPr id="4" name="Rounded Rectangle 3"/>
+          <p:cNvSpPr/>
+          <p:nvPr/>
+        </p:nvSpPr>
+        <p:spPr>
+          <a:xfrm>
+            <a:off x="777240" y="2011680"/>
+            <a:ext cx="3411626" cy="1664208"/>
+          </a:xfrm>
+          <a:prstGeom prst="roundRect">
+            <a:avLst>
+              <a:gd name="adj" fmla="val 3500"/>
+            </a:avLst>
+          </a:prstGeom>
+          <a:solidFill>
+            <a:srgbClr val="F5F5F7"/>
+          </a:solidFill>
+          <a:ln>
+            <a:noFill/>
+          </a:ln>
+          <a:effectLst/>
+        </p:spPr>
+        <p:style>
+          <a:lnRef idx="1">
+            <a:schemeClr val="accent1"/>
+          </a:lnRef>
+          <a:fillRef idx="3">
+            <a:schemeClr val="accent1"/>
+          </a:fillRef>
+          <a:effectRef idx="2">
+            <a:schemeClr val="accent1"/>
+          </a:effectRef>
+          <a:fontRef idx="minor">
+            <a:schemeClr val="lt1"/>
+          </a:fontRef>
+        </p:style>
+        <p:txBody>
+          <a:bodyPr rtlCol="0" anchor="ctr"/>
+          <a:lstStyle/>
+          <a:p>
+            <a:pPr algn="ctr"/>
+          </a:p>
+        </p:txBody>
+      </p:sp>
+      <p:sp>
+        <p:nvSpPr>
+          <p:cNvPr id="5" name="TextBox 4"/>
+          <p:cNvSpPr txBox="1"/>
+          <p:nvPr/>
+        </p:nvSpPr>
+        <p:spPr>
+          <a:xfrm>
+            <a:off x="996696" y="2194560"/>
+            <a:ext cx="2972714" cy="1371600"/>
+          </a:xfrm>
+          <a:prstGeom prst="rect">
+            <a:avLst/>
+          </a:prstGeom>
+          <a:noFill/>
+        </p:spPr>
+        <p:txBody>
+          <a:bodyPr wrap="square" anchor="t" lIns="0" rIns="0" tIns="0" bIns="0">
+            <a:spAutoFit/>
+          </a:bodyPr>
+          <a:lstStyle/>
+          <a:p>
+            <a:pPr algn="l">
+              <a:lnSpc>
+                <a:spcPct val="110000"/>
+              </a:lnSpc>
+            </a:pPr>
+            <a:r>
+              <a:rPr sz="1350" b="1">
+                <a:solidFill>
+                  <a:srgbClr val="1D1D1F"/>
+                </a:solidFill>
+                <a:latin typeface="Arial"/>
+              </a:rPr>
+              <a:t>Contact</a:t>
+            </a:r>
+          </a:p>
+          <a:p>
+            <a:pPr algn="l">
+              <a:lnSpc>
+                <a:spcPct val="130000"/>
+              </a:lnSpc>
+              <a:spcBef>
+                <a:spcPts val="600"/>
+              </a:spcBef>
+            </a:pPr>
+            <a:r>
+              <a:rPr sz="1050" b="0">
+                <a:solidFill>
+                  <a:srgbClr val="6E6E73"/>
+                </a:solidFill>
+                <a:latin typeface="Arial"/>
+              </a:rPr>
+              <a:t>General contact with isotropic penalty friction and hard normal behaviour with separation allowed.</a:t>
+            </a:r>
+          </a:p>
+        </p:txBody>
+      </p:sp>
+      <p:sp>
+        <p:nvSpPr>
+          <p:cNvPr id="6" name="Rounded Rectangle 5"/>
+          <p:cNvSpPr/>
+          <p:nvPr/>
+        </p:nvSpPr>
+        <p:spPr>
+          <a:xfrm>
+            <a:off x="4390034" y="2011680"/>
+            <a:ext cx="3411626" cy="1664208"/>
+          </a:xfrm>
+          <a:prstGeom prst="roundRect">
+            <a:avLst>
+              <a:gd name="adj" fmla="val 3500"/>
+            </a:avLst>
+          </a:prstGeom>
+          <a:solidFill>
+            <a:srgbClr val="F5F5F7"/>
+          </a:solidFill>
+          <a:ln>
+            <a:noFill/>
+          </a:ln>
+          <a:effectLst/>
+        </p:spPr>
+        <p:style>
+          <a:lnRef idx="1">
+            <a:schemeClr val="accent1"/>
+          </a:lnRef>
+          <a:fillRef idx="3">
+            <a:schemeClr val="accent1"/>
+          </a:fillRef>
+          <a:effectRef idx="2">
+            <a:schemeClr val="accent1"/>
+          </a:effectRef>
+          <a:fontRef idx="minor">
+            <a:schemeClr val="lt1"/>
+          </a:fontRef>
+        </p:style>
+        <p:txBody>
+          <a:bodyPr rtlCol="0" anchor="ctr"/>
+          <a:lstStyle/>
+          <a:p>
+            <a:pPr algn="ctr"/>
+          </a:p>
+        </p:txBody>
+      </p:sp>
+      <p:sp>
+        <p:nvSpPr>
+          <p:cNvPr id="7" name="TextBox 6"/>
+          <p:cNvSpPr txBox="1"/>
+          <p:nvPr/>
+        </p:nvSpPr>
+        <p:spPr>
+          <a:xfrm>
+            <a:off x="4609490" y="2194560"/>
+            <a:ext cx="2972714" cy="1371600"/>
+          </a:xfrm>
+          <a:prstGeom prst="rect">
+            <a:avLst/>
+          </a:prstGeom>
+          <a:noFill/>
+        </p:spPr>
+        <p:txBody>
+          <a:bodyPr wrap="square" anchor="t" lIns="0" rIns="0" tIns="0" bIns="0">
+            <a:spAutoFit/>
+          </a:bodyPr>
+          <a:lstStyle/>
+          <a:p>
+            <a:pPr algn="l">
+              <a:lnSpc>
+                <a:spcPct val="110000"/>
+              </a:lnSpc>
+            </a:pPr>
+            <a:r>
+              <a:rPr sz="1350" b="1">
+                <a:solidFill>
+                  <a:srgbClr val="1D1D1F"/>
+                </a:solidFill>
+                <a:latin typeface="Arial"/>
+              </a:rPr>
+              <a:t>Drive end</a:t>
+            </a:r>
+          </a:p>
+          <a:p>
+            <a:pPr algn="l">
+              <a:lnSpc>
+                <a:spcPct val="130000"/>
+              </a:lnSpc>
+              <a:spcBef>
+                <a:spcPts val="600"/>
+              </a:spcBef>
+            </a:pPr>
+            <a:r>
+              <a:rPr sz="1050" b="0">
+                <a:solidFill>
+                  <a:srgbClr val="6E6E73"/>
+                </a:solidFill>
+                <a:latin typeface="Arial"/>
+              </a:rPr>
+              <a:t>Surface at the shaft end, a reference point and a kinematic coupling over the whole surface.</a:t>
+            </a:r>
+          </a:p>
+        </p:txBody>
+      </p:sp>
+      <p:sp>
+        <p:nvSpPr>
+          <p:cNvPr id="8" name="Rounded Rectangle 7"/>
+          <p:cNvSpPr/>
+          <p:nvPr/>
+        </p:nvSpPr>
+        <p:spPr>
+          <a:xfrm>
+            <a:off x="8002828" y="2011680"/>
+            <a:ext cx="3411626" cy="1664208"/>
+          </a:xfrm>
+          <a:prstGeom prst="roundRect">
+            <a:avLst>
+              <a:gd name="adj" fmla="val 3500"/>
+            </a:avLst>
+          </a:prstGeom>
+          <a:solidFill>
+            <a:srgbClr val="F5F5F7"/>
+          </a:solidFill>
+          <a:ln>
+            <a:noFill/>
+          </a:ln>
+          <a:effectLst/>
+        </p:spPr>
+        <p:style>
+          <a:lnRef idx="1">
+            <a:schemeClr val="accent1"/>
+          </a:lnRef>
+          <a:fillRef idx="3">
+            <a:schemeClr val="accent1"/>
+          </a:fillRef>
+          <a:effectRef idx="2">
+            <a:schemeClr val="accent1"/>
+          </a:effectRef>
+          <a:fontRef idx="minor">
+            <a:schemeClr val="lt1"/>
+          </a:fontRef>
+        </p:style>
+        <p:txBody>
+          <a:bodyPr rtlCol="0" anchor="ctr"/>
+          <a:lstStyle/>
+          <a:p>
+            <a:pPr algn="ctr"/>
+          </a:p>
+        </p:txBody>
+      </p:sp>
+      <p:sp>
+        <p:nvSpPr>
+          <p:cNvPr id="9" name="TextBox 8"/>
+          <p:cNvSpPr txBox="1"/>
+          <p:nvPr/>
+        </p:nvSpPr>
+        <p:spPr>
+          <a:xfrm>
+            <a:off x="8222284" y="2194560"/>
+            <a:ext cx="2972714" cy="1371600"/>
+          </a:xfrm>
+          <a:prstGeom prst="rect">
+            <a:avLst/>
+          </a:prstGeom>
+          <a:noFill/>
+        </p:spPr>
+        <p:txBody>
+          <a:bodyPr wrap="square" anchor="t" lIns="0" rIns="0" tIns="0" bIns="0">
+            <a:spAutoFit/>
+          </a:bodyPr>
+          <a:lstStyle/>
+          <a:p>
+            <a:pPr algn="l">
+              <a:lnSpc>
+                <a:spcPct val="110000"/>
+              </a:lnSpc>
+            </a:pPr>
+            <a:r>
+              <a:rPr sz="1350" b="1">
+                <a:solidFill>
+                  <a:srgbClr val="1D1D1F"/>
+                </a:solidFill>
+                <a:latin typeface="Arial"/>
+              </a:rPr>
+              <a:t>Held region</a:t>
+            </a:r>
+          </a:p>
+          <a:p>
+            <a:pPr algn="l">
+              <a:lnSpc>
+                <a:spcPct val="130000"/>
+              </a:lnSpc>
+              <a:spcBef>
+                <a:spcPts val="600"/>
+              </a:spcBef>
+            </a:pPr>
+            <a:r>
+              <a:rPr sz="1050" b="0">
+                <a:solidFill>
+                  <a:srgbClr val="6E6E73"/>
+                </a:solidFill>
+                <a:latin typeface="Arial"/>
+              </a:rPr>
+              <a:t>The hub outer diameter or both hub faces, encastred. A user choice, not a hidden assumption.</a:t>
+            </a:r>
+          </a:p>
+        </p:txBody>
+      </p:sp>
+      <p:sp>
+        <p:nvSpPr>
+          <p:cNvPr id="10" name="Rounded Rectangle 9"/>
+          <p:cNvSpPr/>
+          <p:nvPr/>
+        </p:nvSpPr>
+        <p:spPr>
+          <a:xfrm>
+            <a:off x="777240" y="3858768"/>
+            <a:ext cx="3411626" cy="1664208"/>
+          </a:xfrm>
+          <a:prstGeom prst="roundRect">
+            <a:avLst>
+              <a:gd name="adj" fmla="val 3500"/>
+            </a:avLst>
+          </a:prstGeom>
+          <a:solidFill>
+            <a:srgbClr val="F5F5F7"/>
+          </a:solidFill>
+          <a:ln>
+            <a:noFill/>
+          </a:ln>
+          <a:effectLst/>
+        </p:spPr>
+        <p:style>
+          <a:lnRef idx="1">
+            <a:schemeClr val="accent1"/>
+          </a:lnRef>
+          <a:fillRef idx="3">
+            <a:schemeClr val="accent1"/>
+          </a:fillRef>
+          <a:effectRef idx="2">
+            <a:schemeClr val="accent1"/>
+          </a:effectRef>
+          <a:fontRef idx="minor">
+            <a:schemeClr val="lt1"/>
+          </a:fontRef>
+        </p:style>
+        <p:txBody>
+          <a:bodyPr rtlCol="0" anchor="ctr"/>
+          <a:lstStyle/>
+          <a:p>
+            <a:pPr algn="ctr"/>
+          </a:p>
+        </p:txBody>
+      </p:sp>
+      <p:sp>
+        <p:nvSpPr>
+          <p:cNvPr id="11" name="TextBox 10"/>
+          <p:cNvSpPr txBox="1"/>
+          <p:nvPr/>
+        </p:nvSpPr>
+        <p:spPr>
+          <a:xfrm>
+            <a:off x="996696" y="4041648"/>
+            <a:ext cx="2972714" cy="1371600"/>
+          </a:xfrm>
+          <a:prstGeom prst="rect">
+            <a:avLst/>
+          </a:prstGeom>
+          <a:noFill/>
+        </p:spPr>
+        <p:txBody>
+          <a:bodyPr wrap="square" anchor="t" lIns="0" rIns="0" tIns="0" bIns="0">
+            <a:spAutoFit/>
+          </a:bodyPr>
+          <a:lstStyle/>
+          <a:p>
+            <a:pPr algn="l">
+              <a:lnSpc>
+                <a:spcPct val="110000"/>
+              </a:lnSpc>
+            </a:pPr>
+            <a:r>
+              <a:rPr sz="1350" b="1">
+                <a:solidFill>
+                  <a:srgbClr val="1D1D1F"/>
+                </a:solidFill>
+                <a:latin typeface="Arial"/>
+              </a:rPr>
+              <a:t>Step</a:t>
+            </a:r>
+          </a:p>
+          <a:p>
+            <a:pPr algn="l">
+              <a:lnSpc>
+                <a:spcPct val="130000"/>
+              </a:lnSpc>
+              <a:spcBef>
+                <a:spcPts val="600"/>
+              </a:spcBef>
+            </a:pPr>
+            <a:r>
+              <a:rPr sz="1050" b="0">
+                <a:solidFill>
+                  <a:srgbClr val="6E6E73"/>
+                </a:solidFill>
+                <a:latin typeface="Arial"/>
+              </a:rPr>
+              <a:t>Static TORSION step, with optional geometric nonlinearity and stabilization, and increment control from the form.</a:t>
+            </a:r>
+          </a:p>
+        </p:txBody>
+      </p:sp>
+      <p:sp>
+        <p:nvSpPr>
+          <p:cNvPr id="12" name="Rounded Rectangle 11"/>
+          <p:cNvSpPr/>
+          <p:nvPr/>
+        </p:nvSpPr>
+        <p:spPr>
+          <a:xfrm>
+            <a:off x="4390034" y="3858768"/>
+            <a:ext cx="3411626" cy="1664208"/>
+          </a:xfrm>
+          <a:prstGeom prst="roundRect">
+            <a:avLst>
+              <a:gd name="adj" fmla="val 3500"/>
+            </a:avLst>
+          </a:prstGeom>
+          <a:solidFill>
+            <a:srgbClr val="F5F5F7"/>
+          </a:solidFill>
+          <a:ln>
+            <a:noFill/>
+          </a:ln>
+          <a:effectLst/>
+        </p:spPr>
+        <p:style>
+          <a:lnRef idx="1">
+            <a:schemeClr val="accent1"/>
+          </a:lnRef>
+          <a:fillRef idx="3">
+            <a:schemeClr val="accent1"/>
+          </a:fillRef>
+          <a:effectRef idx="2">
+            <a:schemeClr val="accent1"/>
+          </a:effectRef>
+          <a:fontRef idx="minor">
+            <a:schemeClr val="lt1"/>
+          </a:fontRef>
+        </p:style>
+        <p:txBody>
+          <a:bodyPr rtlCol="0" anchor="ctr"/>
+          <a:lstStyle/>
+          <a:p>
+            <a:pPr algn="ctr"/>
+          </a:p>
+        </p:txBody>
+      </p:sp>
+      <p:sp>
+        <p:nvSpPr>
+          <p:cNvPr id="13" name="TextBox 12"/>
+          <p:cNvSpPr txBox="1"/>
+          <p:nvPr/>
+        </p:nvSpPr>
+        <p:spPr>
+          <a:xfrm>
+            <a:off x="4609490" y="4041648"/>
+            <a:ext cx="2972714" cy="1371600"/>
+          </a:xfrm>
+          <a:prstGeom prst="rect">
+            <a:avLst/>
+          </a:prstGeom>
+          <a:noFill/>
+        </p:spPr>
+        <p:txBody>
+          <a:bodyPr wrap="square" anchor="t" lIns="0" rIns="0" tIns="0" bIns="0">
+            <a:spAutoFit/>
+          </a:bodyPr>
+          <a:lstStyle/>
+          <a:p>
+            <a:pPr algn="l">
+              <a:lnSpc>
+                <a:spcPct val="110000"/>
+              </a:lnSpc>
+            </a:pPr>
+            <a:r>
+              <a:rPr sz="1350" b="1">
+                <a:solidFill>
+                  <a:srgbClr val="1D1D1F"/>
+                </a:solidFill>
+                <a:latin typeface="Arial"/>
+              </a:rPr>
+              <a:t>Load</a:t>
+            </a:r>
+          </a:p>
+          <a:p>
+            <a:pPr algn="l">
+              <a:lnSpc>
+                <a:spcPct val="130000"/>
+              </a:lnSpc>
+              <a:spcBef>
+                <a:spcPts val="600"/>
+              </a:spcBef>
+            </a:pPr>
+            <a:r>
+              <a:rPr sz="1050" b="0">
+                <a:solidFill>
+                  <a:srgbClr val="6E6E73"/>
+                </a:solidFill>
+                <a:latin typeface="Arial"/>
+              </a:rPr>
+              <a:t>A moment about the shaft axis applied at the reference point; the guide point locks every degree of freedom except the rotation.</a:t>
+            </a:r>
+          </a:p>
+        </p:txBody>
+      </p:sp>
+      <p:sp>
+        <p:nvSpPr>
+          <p:cNvPr id="14" name="Rounded Rectangle 13"/>
+          <p:cNvSpPr/>
+          <p:nvPr/>
+        </p:nvSpPr>
+        <p:spPr>
+          <a:xfrm>
+            <a:off x="8002828" y="3858768"/>
+            <a:ext cx="3411626" cy="1664208"/>
+          </a:xfrm>
+          <a:prstGeom prst="roundRect">
+            <a:avLst>
+              <a:gd name="adj" fmla="val 3500"/>
+            </a:avLst>
+          </a:prstGeom>
+          <a:solidFill>
+            <a:srgbClr val="F5F5F7"/>
+          </a:solidFill>
+          <a:ln>
+            <a:noFill/>
+          </a:ln>
+          <a:effectLst/>
+        </p:spPr>
+        <p:style>
+          <a:lnRef idx="1">
+            <a:schemeClr val="accent1"/>
+          </a:lnRef>
+          <a:fillRef idx="3">
+            <a:schemeClr val="accent1"/>
+          </a:fillRef>
+          <a:effectRef idx="2">
+            <a:schemeClr val="accent1"/>
+          </a:effectRef>
+          <a:fontRef idx="minor">
+            <a:schemeClr val="lt1"/>
+          </a:fontRef>
+        </p:style>
+        <p:txBody>
+          <a:bodyPr rtlCol="0" anchor="ctr"/>
+          <a:lstStyle/>
+          <a:p>
+            <a:pPr algn="ctr"/>
+          </a:p>
+        </p:txBody>
+      </p:sp>
+      <p:sp>
+        <p:nvSpPr>
+          <p:cNvPr id="15" name="TextBox 14"/>
+          <p:cNvSpPr txBox="1"/>
+          <p:nvPr/>
+        </p:nvSpPr>
+        <p:spPr>
+          <a:xfrm>
+            <a:off x="8222284" y="4041648"/>
+            <a:ext cx="2972714" cy="1371600"/>
+          </a:xfrm>
+          <a:prstGeom prst="rect">
+            <a:avLst/>
+          </a:prstGeom>
+          <a:noFill/>
+        </p:spPr>
+        <p:txBody>
+          <a:bodyPr wrap="square" anchor="t" lIns="0" rIns="0" tIns="0" bIns="0">
+            <a:spAutoFit/>
+          </a:bodyPr>
+          <a:lstStyle/>
+          <a:p>
+            <a:pPr algn="l">
+              <a:lnSpc>
+                <a:spcPct val="110000"/>
+              </a:lnSpc>
+            </a:pPr>
+            <a:r>
+              <a:rPr sz="1350" b="1">
+                <a:solidFill>
+                  <a:srgbClr val="1D1D1F"/>
+                </a:solidFill>
+                <a:latin typeface="Arial"/>
+              </a:rPr>
+              <a:t>Output</a:t>
+            </a:r>
+          </a:p>
+          <a:p>
+            <a:pPr algn="l">
+              <a:lnSpc>
+                <a:spcPct val="130000"/>
+              </a:lnSpc>
+              <a:spcBef>
+                <a:spcPts val="600"/>
+              </a:spcBef>
+            </a:pPr>
+            <a:r>
+              <a:rPr sz="1050" b="0">
+                <a:solidFill>
+                  <a:srgbClr val="6E6E73"/>
+                </a:solidFill>
+                <a:latin typeface="Arial"/>
+              </a:rPr>
+              <a:t>Field S, U, E, RF, CSTRESS and CDISP at four intervals; history UR3 and RM3 at the reference point.</a:t>
+            </a:r>
+          </a:p>
+        </p:txBody>
+      </p:sp>
+      <p:sp>
+        <p:nvSpPr>
+          <p:cNvPr id="16" name="TextBox 15"/>
+          <p:cNvSpPr txBox="1"/>
+          <p:nvPr/>
+        </p:nvSpPr>
+        <p:spPr>
+          <a:xfrm>
+            <a:off x="777240" y="6035040"/>
+            <a:ext cx="10058400" cy="640080"/>
+          </a:xfrm>
+          <a:prstGeom prst="rect">
+            <a:avLst/>
+          </a:prstGeom>
+          <a:noFill/>
+        </p:spPr>
+        <p:txBody>
+          <a:bodyPr wrap="square" anchor="t" lIns="0" rIns="0" tIns="0" bIns="0">
+            <a:spAutoFit/>
+          </a:bodyPr>
+          <a:lstStyle/>
+          <a:p>
+            <a:pPr algn="l">
+              <a:lnSpc>
+                <a:spcPct val="125000"/>
+              </a:lnSpc>
+            </a:pPr>
+            <a:r>
+              <a:rPr sz="1150" b="0">
+                <a:solidFill>
+                  <a:srgbClr val="86868B"/>
+                </a:solidFill>
+                <a:latin typeface="Arial"/>
+              </a:rPr>
+              <a:t>Creating the job and submitting it to the solver remain two separate decisions, and neither is the default.</a:t>
+            </a:r>
+          </a:p>
+        </p:txBody>
+      </p:sp>
+      <p:sp>
+        <p:nvSpPr>
+          <p:cNvPr id="17" name="TextBox 16"/>
           <p:cNvSpPr txBox="1"/>
           <p:nvPr/>
         </p:nvSpPr>
@@ -6471,14 +7948,14 @@
                 </a:solidFill>
                 <a:latin typeface="Arial"/>
               </a:rPr>
-              <a:t>CORRECTION 1 OF 2</a:t>
+              <a:t>TRACEABILITY</a:t>
             </a:r>
           </a:p>
         </p:txBody>
       </p:sp>
       <p:pic>
         <p:nvPicPr>
-          <p:cNvPr id="3" name="Picture 2" descr="dia_t2tr.png"/>
+          <p:cNvPr id="3" name="Picture 2" descr="dia_badges.png"/>
           <p:cNvPicPr>
             <a:picLocks noChangeAspect="1"/>
           </p:cNvPicPr>
@@ -6492,8 +7969,8 @@
         </p:blipFill>
         <p:spPr>
           <a:xfrm>
-            <a:off x="1548850" y="1170432"/>
-            <a:ext cx="9093994" cy="4727448"/>
+            <a:off x="1126965" y="1170432"/>
+            <a:ext cx="9937765" cy="4727448"/>
           </a:xfrm>
           <a:prstGeom prst="rect">
             <a:avLst/>
@@ -6599,38 +8076,605 @@
                 </a:solidFill>
                 <a:latin typeface="Arial"/>
               </a:rPr>
-              <a:t>CORRECTION 2 OF 2</a:t>
-            </a:r>
-          </a:p>
-        </p:txBody>
-      </p:sp>
-      <p:pic>
-        <p:nvPicPr>
-          <p:cNvPr id="3" name="Picture 2" descr="chart_fw.png"/>
-          <p:cNvPicPr>
-            <a:picLocks noChangeAspect="1"/>
-          </p:cNvPicPr>
-          <p:nvPr/>
-        </p:nvPicPr>
-        <p:blipFill>
-          <a:blip r:embed="rId2"/>
-          <a:stretch>
-            <a:fillRect/>
-          </a:stretch>
-        </p:blipFill>
-        <p:spPr>
-          <a:xfrm>
-            <a:off x="811838" y="1170432"/>
-            <a:ext cx="10568019" cy="4727448"/>
-          </a:xfrm>
-          <a:prstGeom prst="rect">
-            <a:avLst/>
-          </a:prstGeom>
-        </p:spPr>
-      </p:pic>
+              <a:t>THE NORMATIVE DATUM</a:t>
+            </a:r>
+          </a:p>
+        </p:txBody>
+      </p:sp>
+      <p:sp>
+        <p:nvSpPr>
+          <p:cNvPr id="3" name="TextBox 2"/>
+          <p:cNvSpPr txBox="1"/>
+          <p:nvPr/>
+        </p:nvSpPr>
+        <p:spPr>
+          <a:xfrm>
+            <a:off x="777240" y="932688"/>
+            <a:ext cx="10637215" cy="914400"/>
+          </a:xfrm>
+          <a:prstGeom prst="rect">
+            <a:avLst/>
+          </a:prstGeom>
+          <a:noFill/>
+        </p:spPr>
+        <p:txBody>
+          <a:bodyPr wrap="square" anchor="t" lIns="0" rIns="0" tIns="0" bIns="0">
+            <a:spAutoFit/>
+          </a:bodyPr>
+          <a:lstStyle/>
+          <a:p>
+            <a:pPr algn="l">
+              <a:lnSpc>
+                <a:spcPct val="95000"/>
+              </a:lnSpc>
+            </a:pPr>
+            <a:r>
+              <a:rPr sz="3100" b="1">
+                <a:solidFill>
+                  <a:srgbClr val="1D1D1F"/>
+                </a:solidFill>
+                <a:latin typeface="Arial"/>
+              </a:rPr>
+              <a:t>The table is never interpolated: either a row or an error</a:t>
+            </a:r>
+          </a:p>
+        </p:txBody>
+      </p:sp>
       <p:sp>
         <p:nvSpPr>
           <p:cNvPr id="4" name="TextBox 3"/>
+          <p:cNvSpPr txBox="1"/>
+          <p:nvPr/>
+        </p:nvSpPr>
+        <p:spPr>
+          <a:xfrm>
+            <a:off x="777240" y="1700784"/>
+            <a:ext cx="9509760" cy="822960"/>
+          </a:xfrm>
+          <a:prstGeom prst="rect">
+            <a:avLst/>
+          </a:prstGeom>
+          <a:noFill/>
+        </p:spPr>
+        <p:txBody>
+          <a:bodyPr wrap="square" anchor="t" lIns="0" rIns="0" tIns="0" bIns="0">
+            <a:spAutoFit/>
+          </a:bodyPr>
+          <a:lstStyle/>
+          <a:p>
+            <a:pPr algn="l">
+              <a:lnSpc>
+                <a:spcPct val="125000"/>
+              </a:lnSpc>
+            </a:pPr>
+            <a:r>
+              <a:rPr sz="1450" b="0">
+                <a:solidFill>
+                  <a:srgbClr val="6E6E73"/>
+                </a:solidFill>
+                <a:latin typeface="Arial"/>
+              </a:rPr>
+              <a:t>din6885_row() returns the exact row with its NORMATIVE badge. Outside the range of the standard it raises, so nobody can claim DIN compliance from the nearest row.</a:t>
+            </a:r>
+          </a:p>
+        </p:txBody>
+      </p:sp>
+      <p:sp>
+        <p:nvSpPr>
+          <p:cNvPr id="5" name="Rounded Rectangle 4"/>
+          <p:cNvSpPr/>
+          <p:nvPr/>
+        </p:nvSpPr>
+        <p:spPr>
+          <a:xfrm>
+            <a:off x="777240" y="2788920"/>
+            <a:ext cx="2542032" cy="1627632"/>
+          </a:xfrm>
+          <a:prstGeom prst="roundRect">
+            <a:avLst>
+              <a:gd name="adj" fmla="val 3500"/>
+            </a:avLst>
+          </a:prstGeom>
+          <a:solidFill>
+            <a:srgbClr val="F5F5F7"/>
+          </a:solidFill>
+          <a:ln>
+            <a:noFill/>
+          </a:ln>
+          <a:effectLst/>
+        </p:spPr>
+        <p:style>
+          <a:lnRef idx="1">
+            <a:schemeClr val="accent1"/>
+          </a:lnRef>
+          <a:fillRef idx="3">
+            <a:schemeClr val="accent1"/>
+          </a:fillRef>
+          <a:effectRef idx="2">
+            <a:schemeClr val="accent1"/>
+          </a:effectRef>
+          <a:fontRef idx="minor">
+            <a:schemeClr val="lt1"/>
+          </a:fontRef>
+        </p:style>
+        <p:txBody>
+          <a:bodyPr rtlCol="0" anchor="ctr"/>
+          <a:lstStyle/>
+          <a:p>
+            <a:pPr algn="ctr"/>
+          </a:p>
+        </p:txBody>
+      </p:sp>
+      <p:sp>
+        <p:nvSpPr>
+          <p:cNvPr id="6" name="TextBox 5"/>
+          <p:cNvSpPr txBox="1"/>
+          <p:nvPr/>
+        </p:nvSpPr>
+        <p:spPr>
+          <a:xfrm>
+            <a:off x="1014984" y="2990088"/>
+            <a:ext cx="2084832" cy="1298448"/>
+          </a:xfrm>
+          <a:prstGeom prst="rect">
+            <a:avLst/>
+          </a:prstGeom>
+          <a:noFill/>
+        </p:spPr>
+        <p:txBody>
+          <a:bodyPr wrap="square" anchor="t" lIns="0" rIns="0" tIns="0" bIns="0">
+            <a:spAutoFit/>
+          </a:bodyPr>
+          <a:lstStyle/>
+          <a:p>
+            <a:pPr algn="l">
+              <a:lnSpc>
+                <a:spcPct val="105000"/>
+              </a:lnSpc>
+            </a:pPr>
+            <a:r>
+              <a:rPr sz="1450" b="1">
+                <a:solidFill>
+                  <a:srgbClr val="1D1D1F"/>
+                </a:solidFill>
+                <a:latin typeface="Arial"/>
+              </a:rPr>
+              <a:t>26   cross-section rows</a:t>
+            </a:r>
+          </a:p>
+          <a:p>
+            <a:pPr algn="l">
+              <a:lnSpc>
+                <a:spcPct val="130000"/>
+              </a:lnSpc>
+              <a:spcBef>
+                <a:spcPts val="600"/>
+              </a:spcBef>
+            </a:pPr>
+            <a:r>
+              <a:rPr sz="1050" b="0">
+                <a:solidFill>
+                  <a:srgbClr val="6E6E73"/>
+                </a:solidFill>
+                <a:latin typeface="Arial"/>
+              </a:rPr>
+              <a:t>b × h, t1, t2, the t1 tolerance and the d2 increment for every diameter band</a:t>
+            </a:r>
+          </a:p>
+        </p:txBody>
+      </p:sp>
+      <p:sp>
+        <p:nvSpPr>
+          <p:cNvPr id="7" name="Rounded Rectangle 6"/>
+          <p:cNvSpPr/>
+          <p:nvPr/>
+        </p:nvSpPr>
+        <p:spPr>
+          <a:xfrm>
+            <a:off x="3474720" y="2788920"/>
+            <a:ext cx="2542032" cy="1627632"/>
+          </a:xfrm>
+          <a:prstGeom prst="roundRect">
+            <a:avLst>
+              <a:gd name="adj" fmla="val 3500"/>
+            </a:avLst>
+          </a:prstGeom>
+          <a:solidFill>
+            <a:srgbClr val="F5F5F7"/>
+          </a:solidFill>
+          <a:ln>
+            <a:noFill/>
+          </a:ln>
+          <a:effectLst/>
+        </p:spPr>
+        <p:style>
+          <a:lnRef idx="1">
+            <a:schemeClr val="accent1"/>
+          </a:lnRef>
+          <a:fillRef idx="3">
+            <a:schemeClr val="accent1"/>
+          </a:fillRef>
+          <a:effectRef idx="2">
+            <a:schemeClr val="accent1"/>
+          </a:effectRef>
+          <a:fontRef idx="minor">
+            <a:schemeClr val="lt1"/>
+          </a:fontRef>
+        </p:style>
+        <p:txBody>
+          <a:bodyPr rtlCol="0" anchor="ctr"/>
+          <a:lstStyle/>
+          <a:p>
+            <a:pPr algn="ctr"/>
+          </a:p>
+        </p:txBody>
+      </p:sp>
+      <p:sp>
+        <p:nvSpPr>
+          <p:cNvPr id="8" name="TextBox 7"/>
+          <p:cNvSpPr txBox="1"/>
+          <p:nvPr/>
+        </p:nvSpPr>
+        <p:spPr>
+          <a:xfrm>
+            <a:off x="3712464" y="2990088"/>
+            <a:ext cx="2084832" cy="1298448"/>
+          </a:xfrm>
+          <a:prstGeom prst="rect">
+            <a:avLst/>
+          </a:prstGeom>
+          <a:noFill/>
+        </p:spPr>
+        <p:txBody>
+          <a:bodyPr wrap="square" anchor="t" lIns="0" rIns="0" tIns="0" bIns="0">
+            <a:spAutoFit/>
+          </a:bodyPr>
+          <a:lstStyle/>
+          <a:p>
+            <a:pPr algn="l">
+              <a:lnSpc>
+                <a:spcPct val="105000"/>
+              </a:lnSpc>
+            </a:pPr>
+            <a:r>
+              <a:rPr sz="1450" b="1">
+                <a:solidFill>
+                  <a:srgbClr val="1D1D1F"/>
+                </a:solidFill>
+                <a:latin typeface="Arial"/>
+              </a:rPr>
+              <a:t>34   standard lengths</a:t>
+            </a:r>
+          </a:p>
+          <a:p>
+            <a:pPr algn="l">
+              <a:lnSpc>
+                <a:spcPct val="130000"/>
+              </a:lnSpc>
+              <a:spcBef>
+                <a:spcPts val="600"/>
+              </a:spcBef>
+            </a:pPr>
+            <a:r>
+              <a:rPr sz="1050" b="0">
+                <a:solidFill>
+                  <a:srgbClr val="6E6E73"/>
+                </a:solidFill>
+                <a:latin typeface="Arial"/>
+              </a:rPr>
+              <a:t>from 6 to 400 mm; the key is snapped down, never up</a:t>
+            </a:r>
+          </a:p>
+        </p:txBody>
+      </p:sp>
+      <p:sp>
+        <p:nvSpPr>
+          <p:cNvPr id="9" name="Rounded Rectangle 8"/>
+          <p:cNvSpPr/>
+          <p:nvPr/>
+        </p:nvSpPr>
+        <p:spPr>
+          <a:xfrm>
+            <a:off x="6172200" y="2788920"/>
+            <a:ext cx="2542032" cy="1627632"/>
+          </a:xfrm>
+          <a:prstGeom prst="roundRect">
+            <a:avLst>
+              <a:gd name="adj" fmla="val 3500"/>
+            </a:avLst>
+          </a:prstGeom>
+          <a:solidFill>
+            <a:srgbClr val="F5F5F7"/>
+          </a:solidFill>
+          <a:ln>
+            <a:noFill/>
+          </a:ln>
+          <a:effectLst/>
+        </p:spPr>
+        <p:style>
+          <a:lnRef idx="1">
+            <a:schemeClr val="accent1"/>
+          </a:lnRef>
+          <a:fillRef idx="3">
+            <a:schemeClr val="accent1"/>
+          </a:fillRef>
+          <a:effectRef idx="2">
+            <a:schemeClr val="accent1"/>
+          </a:effectRef>
+          <a:fontRef idx="minor">
+            <a:schemeClr val="lt1"/>
+          </a:fontRef>
+        </p:style>
+        <p:txBody>
+          <a:bodyPr rtlCol="0" anchor="ctr"/>
+          <a:lstStyle/>
+          <a:p>
+            <a:pPr algn="ctr"/>
+          </a:p>
+        </p:txBody>
+      </p:sp>
+      <p:sp>
+        <p:nvSpPr>
+          <p:cNvPr id="10" name="TextBox 9"/>
+          <p:cNvSpPr txBox="1"/>
+          <p:nvPr/>
+        </p:nvSpPr>
+        <p:spPr>
+          <a:xfrm>
+            <a:off x="6409944" y="2990088"/>
+            <a:ext cx="2084832" cy="1298448"/>
+          </a:xfrm>
+          <a:prstGeom prst="rect">
+            <a:avLst/>
+          </a:prstGeom>
+          <a:noFill/>
+        </p:spPr>
+        <p:txBody>
+          <a:bodyPr wrap="square" anchor="t" lIns="0" rIns="0" tIns="0" bIns="0">
+            <a:spAutoFit/>
+          </a:bodyPr>
+          <a:lstStyle/>
+          <a:p>
+            <a:pPr algn="l">
+              <a:lnSpc>
+                <a:spcPct val="105000"/>
+              </a:lnSpc>
+            </a:pPr>
+            <a:r>
+              <a:rPr sz="1450" b="1">
+                <a:solidFill>
+                  <a:srgbClr val="1D1D1F"/>
+                </a:solidFill>
+                <a:latin typeface="Arial"/>
+              </a:rPr>
+              <a:t>7   radius bands</a:t>
+            </a:r>
+          </a:p>
+          <a:p>
+            <a:pPr algn="l">
+              <a:lnSpc>
+                <a:spcPct val="130000"/>
+              </a:lnSpc>
+              <a:spcBef>
+                <a:spcPts val="600"/>
+              </a:spcBef>
+            </a:pPr>
+            <a:r>
+              <a:rPr sz="1050" b="0">
+                <a:solidFill>
+                  <a:srgbClr val="6E6E73"/>
+                </a:solidFill>
+                <a:latin typeface="Arial"/>
+              </a:rPr>
+              <a:t>mouth r1 and root r2 separately: they are not the same radius</a:t>
+            </a:r>
+          </a:p>
+        </p:txBody>
+      </p:sp>
+      <p:sp>
+        <p:nvSpPr>
+          <p:cNvPr id="11" name="Rounded Rectangle 10"/>
+          <p:cNvSpPr/>
+          <p:nvPr/>
+        </p:nvSpPr>
+        <p:spPr>
+          <a:xfrm>
+            <a:off x="8869680" y="2788920"/>
+            <a:ext cx="2542032" cy="1627632"/>
+          </a:xfrm>
+          <a:prstGeom prst="roundRect">
+            <a:avLst>
+              <a:gd name="adj" fmla="val 3500"/>
+            </a:avLst>
+          </a:prstGeom>
+          <a:solidFill>
+            <a:srgbClr val="F5F5F7"/>
+          </a:solidFill>
+          <a:ln>
+            <a:noFill/>
+          </a:ln>
+          <a:effectLst/>
+        </p:spPr>
+        <p:style>
+          <a:lnRef idx="1">
+            <a:schemeClr val="accent1"/>
+          </a:lnRef>
+          <a:fillRef idx="3">
+            <a:schemeClr val="accent1"/>
+          </a:fillRef>
+          <a:effectRef idx="2">
+            <a:schemeClr val="accent1"/>
+          </a:effectRef>
+          <a:fontRef idx="minor">
+            <a:schemeClr val="lt1"/>
+          </a:fontRef>
+        </p:style>
+        <p:txBody>
+          <a:bodyPr rtlCol="0" anchor="ctr"/>
+          <a:lstStyle/>
+          <a:p>
+            <a:pPr algn="ctr"/>
+          </a:p>
+        </p:txBody>
+      </p:sp>
+      <p:sp>
+        <p:nvSpPr>
+          <p:cNvPr id="12" name="TextBox 11"/>
+          <p:cNvSpPr txBox="1"/>
+          <p:nvPr/>
+        </p:nvSpPr>
+        <p:spPr>
+          <a:xfrm>
+            <a:off x="9107424" y="2990088"/>
+            <a:ext cx="2084832" cy="1298448"/>
+          </a:xfrm>
+          <a:prstGeom prst="rect">
+            <a:avLst/>
+          </a:prstGeom>
+          <a:noFill/>
+        </p:spPr>
+        <p:txBody>
+          <a:bodyPr wrap="square" anchor="t" lIns="0" rIns="0" tIns="0" bIns="0">
+            <a:spAutoFit/>
+          </a:bodyPr>
+          <a:lstStyle/>
+          <a:p>
+            <a:pPr algn="l">
+              <a:lnSpc>
+                <a:spcPct val="105000"/>
+              </a:lnSpc>
+            </a:pPr>
+            <a:r>
+              <a:rPr sz="1450" b="1">
+                <a:solidFill>
+                  <a:srgbClr val="1D1D1F"/>
+                </a:solidFill>
+                <a:latin typeface="Arial"/>
+              </a:rPr>
+              <a:t>3   forms implemented</a:t>
+            </a:r>
+          </a:p>
+          <a:p>
+            <a:pPr algn="l">
+              <a:lnSpc>
+                <a:spcPct val="130000"/>
+              </a:lnSpc>
+              <a:spcBef>
+                <a:spcPts val="600"/>
+              </a:spcBef>
+            </a:pPr>
+            <a:r>
+              <a:rPr sz="1050" b="0">
+                <a:solidFill>
+                  <a:srgbClr val="6E6E73"/>
+                </a:solidFill>
+                <a:latin typeface="Arial"/>
+              </a:rPr>
+              <a:t>A, B and AB. C through J are rejected with their own message, not silently</a:t>
+            </a:r>
+          </a:p>
+        </p:txBody>
+      </p:sp>
+      <p:sp>
+        <p:nvSpPr>
+          <p:cNvPr id="13" name="TextBox 12"/>
+          <p:cNvSpPr txBox="1"/>
+          <p:nvPr/>
+        </p:nvSpPr>
+        <p:spPr>
+          <a:xfrm>
+            <a:off x="777240" y="4736592"/>
+            <a:ext cx="10637215" cy="1280160"/>
+          </a:xfrm>
+          <a:prstGeom prst="rect">
+            <a:avLst/>
+          </a:prstGeom>
+          <a:noFill/>
+        </p:spPr>
+        <p:txBody>
+          <a:bodyPr wrap="square" anchor="t" lIns="0" rIns="0" tIns="0" bIns="0">
+            <a:spAutoFit/>
+          </a:bodyPr>
+          <a:lstStyle/>
+          <a:p>
+            <a:pPr algn="l">
+              <a:lnSpc>
+                <a:spcPct val="100000"/>
+              </a:lnSpc>
+            </a:pPr>
+            <a:r>
+              <a:rPr sz="1500" b="1">
+                <a:solidFill>
+                  <a:srgbClr val="1D1D1F"/>
+                </a:solidFill>
+                <a:latin typeface="Arial"/>
+              </a:rPr>
+              <a:t>D40, the project's reference row</a:t>
+            </a:r>
+          </a:p>
+          <a:p>
+            <a:pPr algn="l">
+              <a:lnSpc>
+                <a:spcPct val="135000"/>
+              </a:lnSpc>
+              <a:spcBef>
+                <a:spcPts val="1000"/>
+              </a:spcBef>
+            </a:pPr>
+            <a:r>
+              <a:rPr sz="1300" b="0">
+                <a:solidFill>
+                  <a:srgbClr val="6E6E73"/>
+                </a:solidFill>
+                <a:latin typeface="Consolas"/>
+              </a:rPr>
+              <a:t>38 &lt; d1 ≤ 44 mm     b × h = 12 × 8 mm     t1 = 5.00 +0.20 mm     t2 = 3.30 mm     d2(ref) = 48.00 mm     r1 = 0.25…0.40 mm     r2 = 0.16…0.25 mm</a:t>
+            </a:r>
+          </a:p>
+        </p:txBody>
+      </p:sp>
+      <p:sp>
+        <p:nvSpPr>
+          <p:cNvPr id="14" name="TextBox 13"/>
+          <p:cNvSpPr txBox="1"/>
+          <p:nvPr/>
+        </p:nvSpPr>
+        <p:spPr>
+          <a:xfrm>
+            <a:off x="777240" y="5943600"/>
+            <a:ext cx="10058400" cy="640080"/>
+          </a:xfrm>
+          <a:prstGeom prst="rect">
+            <a:avLst/>
+          </a:prstGeom>
+          <a:noFill/>
+        </p:spPr>
+        <p:txBody>
+          <a:bodyPr wrap="square" anchor="t" lIns="0" rIns="0" tIns="0" bIns="0">
+            <a:spAutoFit/>
+          </a:bodyPr>
+          <a:lstStyle/>
+          <a:p>
+            <a:pPr algn="l">
+              <a:lnSpc>
+                <a:spcPct val="125000"/>
+              </a:lnSpc>
+            </a:pPr>
+            <a:r>
+              <a:rPr sz="1150" b="0">
+                <a:solidFill>
+                  <a:srgbClr val="86868B"/>
+                </a:solidFill>
+                <a:latin typeface="Arial"/>
+              </a:rPr>
+              <a:t>The key chamfer is not in the table: it is a user parameter (c = 0.8 mm by default) and the report says so.</a:t>
+            </a:r>
+          </a:p>
+        </p:txBody>
+      </p:sp>
+      <p:sp>
+        <p:nvSpPr>
+          <p:cNvPr id="15" name="TextBox 14"/>
           <p:cNvSpPr txBox="1"/>
           <p:nvPr/>
         </p:nvSpPr>
@@ -6727,38 +8771,677 @@
                 </a:solidFill>
                 <a:latin typeface="Arial"/>
               </a:rPr>
-              <a:t>OPEN FINDING</a:t>
-            </a:r>
-          </a:p>
-        </p:txBody>
-      </p:sp>
-      <p:pic>
-        <p:nvPicPr>
-          <p:cNvPr id="3" name="Picture 2" descr="dia_eq9.png"/>
-          <p:cNvPicPr>
-            <a:picLocks noChangeAspect="1"/>
-          </p:cNvPicPr>
-          <p:nvPr/>
-        </p:nvPicPr>
-        <p:blipFill>
-          <a:blip r:embed="rId2"/>
-          <a:stretch>
-            <a:fillRect/>
-          </a:stretch>
-        </p:blipFill>
-        <p:spPr>
-          <a:xfrm>
-            <a:off x="1675805" y="1170432"/>
-            <a:ext cx="8840084" cy="4727448"/>
-          </a:xfrm>
-          <a:prstGeom prst="rect">
-            <a:avLst/>
-          </a:prstGeom>
-        </p:spPr>
-      </p:pic>
-      <p:sp>
-        <p:nvSpPr>
-          <p:cNvPr id="4" name="TextBox 3"/>
+              <a:t>THE AUDIT</a:t>
+            </a:r>
+          </a:p>
+        </p:txBody>
+      </p:sp>
+      <p:sp>
+        <p:nvSpPr>
+          <p:cNvPr id="3" name="TextBox 2"/>
+          <p:cNvSpPr txBox="1"/>
+          <p:nvPr/>
+        </p:nvSpPr>
+        <p:spPr>
+          <a:xfrm>
+            <a:off x="777240" y="932688"/>
+            <a:ext cx="10637215" cy="914400"/>
+          </a:xfrm>
+          <a:prstGeom prst="rect">
+            <a:avLst/>
+          </a:prstGeom>
+          <a:noFill/>
+        </p:spPr>
+        <p:txBody>
+          <a:bodyPr wrap="square" anchor="t" lIns="0" rIns="0" tIns="0" bIns="0">
+            <a:spAutoFit/>
+          </a:bodyPr>
+          <a:lstStyle/>
+          <a:p>
+            <a:pPr algn="l">
+              <a:lnSpc>
+                <a:spcPct val="95000"/>
+              </a:lnSpc>
+            </a:pPr>
+            <a:r>
+              <a:rPr sz="3000" b="1">
+                <a:solidFill>
+                  <a:srgbClr val="1D1D1F"/>
+                </a:solidFill>
+                <a:latin typeface="Arial"/>
+              </a:rPr>
+              <a:t>The file that says what was actually built</a:t>
+            </a:r>
+          </a:p>
+        </p:txBody>
+      </p:sp>
+      <p:sp>
+        <p:nvSpPr>
+          <p:cNvPr id="4" name="Rounded Rectangle 3"/>
+          <p:cNvSpPr/>
+          <p:nvPr/>
+        </p:nvSpPr>
+        <p:spPr>
+          <a:xfrm>
+            <a:off x="777240" y="2011680"/>
+            <a:ext cx="3411626" cy="1664208"/>
+          </a:xfrm>
+          <a:prstGeom prst="roundRect">
+            <a:avLst>
+              <a:gd name="adj" fmla="val 3500"/>
+            </a:avLst>
+          </a:prstGeom>
+          <a:solidFill>
+            <a:srgbClr val="F5F5F7"/>
+          </a:solidFill>
+          <a:ln>
+            <a:noFill/>
+          </a:ln>
+          <a:effectLst/>
+        </p:spPr>
+        <p:style>
+          <a:lnRef idx="1">
+            <a:schemeClr val="accent1"/>
+          </a:lnRef>
+          <a:fillRef idx="3">
+            <a:schemeClr val="accent1"/>
+          </a:fillRef>
+          <a:effectRef idx="2">
+            <a:schemeClr val="accent1"/>
+          </a:effectRef>
+          <a:fontRef idx="minor">
+            <a:schemeClr val="lt1"/>
+          </a:fontRef>
+        </p:style>
+        <p:txBody>
+          <a:bodyPr rtlCol="0" anchor="ctr"/>
+          <a:lstStyle/>
+          <a:p>
+            <a:pPr algn="ctr"/>
+          </a:p>
+        </p:txBody>
+      </p:sp>
+      <p:sp>
+        <p:nvSpPr>
+          <p:cNvPr id="5" name="TextBox 4"/>
+          <p:cNvSpPr txBox="1"/>
+          <p:nvPr/>
+        </p:nvSpPr>
+        <p:spPr>
+          <a:xfrm>
+            <a:off x="996696" y="2194560"/>
+            <a:ext cx="2972714" cy="1371600"/>
+          </a:xfrm>
+          <a:prstGeom prst="rect">
+            <a:avLst/>
+          </a:prstGeom>
+          <a:noFill/>
+        </p:spPr>
+        <p:txBody>
+          <a:bodyPr wrap="square" anchor="t" lIns="0" rIns="0" tIns="0" bIns="0">
+            <a:spAutoFit/>
+          </a:bodyPr>
+          <a:lstStyle/>
+          <a:p>
+            <a:pPr algn="l">
+              <a:lnSpc>
+                <a:spcPct val="110000"/>
+              </a:lnSpc>
+            </a:pPr>
+            <a:r>
+              <a:rPr sz="1350" b="1">
+                <a:solidFill>
+                  <a:srgbClr val="1D1D1F"/>
+                </a:solidFill>
+                <a:latin typeface="Arial"/>
+              </a:rPr>
+              <a:t>Two formats</a:t>
+            </a:r>
+          </a:p>
+          <a:p>
+            <a:pPr algn="l">
+              <a:lnSpc>
+                <a:spcPct val="130000"/>
+              </a:lnSpc>
+              <a:spcBef>
+                <a:spcPts val="600"/>
+              </a:spcBef>
+            </a:pPr>
+            <a:r>
+              <a:rPr sz="1050" b="0">
+                <a:solidFill>
+                  <a:srgbClr val="6E6E73"/>
+                </a:solidFill>
+                <a:latin typeface="Arial"/>
+              </a:rPr>
+              <a:t>PARAM_BUILD_AUDIT.txt to read with your eyes and .json to process with a tool.</a:t>
+            </a:r>
+          </a:p>
+        </p:txBody>
+      </p:sp>
+      <p:sp>
+        <p:nvSpPr>
+          <p:cNvPr id="6" name="Rounded Rectangle 5"/>
+          <p:cNvSpPr/>
+          <p:nvPr/>
+        </p:nvSpPr>
+        <p:spPr>
+          <a:xfrm>
+            <a:off x="4390034" y="2011680"/>
+            <a:ext cx="3411626" cy="1664208"/>
+          </a:xfrm>
+          <a:prstGeom prst="roundRect">
+            <a:avLst>
+              <a:gd name="adj" fmla="val 3500"/>
+            </a:avLst>
+          </a:prstGeom>
+          <a:solidFill>
+            <a:srgbClr val="F5F5F7"/>
+          </a:solidFill>
+          <a:ln>
+            <a:noFill/>
+          </a:ln>
+          <a:effectLst/>
+        </p:spPr>
+        <p:style>
+          <a:lnRef idx="1">
+            <a:schemeClr val="accent1"/>
+          </a:lnRef>
+          <a:fillRef idx="3">
+            <a:schemeClr val="accent1"/>
+          </a:fillRef>
+          <a:effectRef idx="2">
+            <a:schemeClr val="accent1"/>
+          </a:effectRef>
+          <a:fontRef idx="minor">
+            <a:schemeClr val="lt1"/>
+          </a:fontRef>
+        </p:style>
+        <p:txBody>
+          <a:bodyPr rtlCol="0" anchor="ctr"/>
+          <a:lstStyle/>
+          <a:p>
+            <a:pPr algn="ctr"/>
+          </a:p>
+        </p:txBody>
+      </p:sp>
+      <p:sp>
+        <p:nvSpPr>
+          <p:cNvPr id="7" name="TextBox 6"/>
+          <p:cNvSpPr txBox="1"/>
+          <p:nvPr/>
+        </p:nvSpPr>
+        <p:spPr>
+          <a:xfrm>
+            <a:off x="4609490" y="2194560"/>
+            <a:ext cx="2972714" cy="1371600"/>
+          </a:xfrm>
+          <a:prstGeom prst="rect">
+            <a:avLst/>
+          </a:prstGeom>
+          <a:noFill/>
+        </p:spPr>
+        <p:txBody>
+          <a:bodyPr wrap="square" anchor="t" lIns="0" rIns="0" tIns="0" bIns="0">
+            <a:spAutoFit/>
+          </a:bodyPr>
+          <a:lstStyle/>
+          <a:p>
+            <a:pPr algn="l">
+              <a:lnSpc>
+                <a:spcPct val="110000"/>
+              </a:lnSpc>
+            </a:pPr>
+            <a:r>
+              <a:rPr sz="1350" b="1">
+                <a:solidFill>
+                  <a:srgbClr val="1D1D1F"/>
+                </a:solidFill>
+                <a:latin typeface="Arial"/>
+              </a:rPr>
+              <a:t>A verdict</a:t>
+            </a:r>
+          </a:p>
+          <a:p>
+            <a:pPr algn="l">
+              <a:lnSpc>
+                <a:spcPct val="130000"/>
+              </a:lnSpc>
+              <a:spcBef>
+                <a:spcPts val="600"/>
+              </a:spcBef>
+            </a:pPr>
+            <a:r>
+              <a:rPr sz="1050" b="0">
+                <a:solidFill>
+                  <a:srgbClr val="6E6E73"/>
+                </a:solidFill>
+                <a:latin typeface="Arial"/>
+              </a:rPr>
+              <a:t>OK or CHECK, and the same verdict is mirrored into the build result: there are not two versions of the truth.</a:t>
+            </a:r>
+          </a:p>
+        </p:txBody>
+      </p:sp>
+      <p:sp>
+        <p:nvSpPr>
+          <p:cNvPr id="8" name="Rounded Rectangle 7"/>
+          <p:cNvSpPr/>
+          <p:nvPr/>
+        </p:nvSpPr>
+        <p:spPr>
+          <a:xfrm>
+            <a:off x="8002828" y="2011680"/>
+            <a:ext cx="3411626" cy="1664208"/>
+          </a:xfrm>
+          <a:prstGeom prst="roundRect">
+            <a:avLst>
+              <a:gd name="adj" fmla="val 3500"/>
+            </a:avLst>
+          </a:prstGeom>
+          <a:solidFill>
+            <a:srgbClr val="F5F5F7"/>
+          </a:solidFill>
+          <a:ln>
+            <a:noFill/>
+          </a:ln>
+          <a:effectLst/>
+        </p:spPr>
+        <p:style>
+          <a:lnRef idx="1">
+            <a:schemeClr val="accent1"/>
+          </a:lnRef>
+          <a:fillRef idx="3">
+            <a:schemeClr val="accent1"/>
+          </a:fillRef>
+          <a:effectRef idx="2">
+            <a:schemeClr val="accent1"/>
+          </a:effectRef>
+          <a:fontRef idx="minor">
+            <a:schemeClr val="lt1"/>
+          </a:fontRef>
+        </p:style>
+        <p:txBody>
+          <a:bodyPr rtlCol="0" anchor="ctr"/>
+          <a:lstStyle/>
+          <a:p>
+            <a:pPr algn="ctr"/>
+          </a:p>
+        </p:txBody>
+      </p:sp>
+      <p:sp>
+        <p:nvSpPr>
+          <p:cNvPr id="9" name="TextBox 8"/>
+          <p:cNvSpPr txBox="1"/>
+          <p:nvPr/>
+        </p:nvSpPr>
+        <p:spPr>
+          <a:xfrm>
+            <a:off x="8222284" y="2194560"/>
+            <a:ext cx="2972714" cy="1371600"/>
+          </a:xfrm>
+          <a:prstGeom prst="rect">
+            <a:avLst/>
+          </a:prstGeom>
+          <a:noFill/>
+        </p:spPr>
+        <p:txBody>
+          <a:bodyPr wrap="square" anchor="t" lIns="0" rIns="0" tIns="0" bIns="0">
+            <a:spAutoFit/>
+          </a:bodyPr>
+          <a:lstStyle/>
+          <a:p>
+            <a:pPr algn="l">
+              <a:lnSpc>
+                <a:spcPct val="110000"/>
+              </a:lnSpc>
+            </a:pPr>
+            <a:r>
+              <a:rPr sz="1350" b="1">
+                <a:solidFill>
+                  <a:srgbClr val="1D1D1F"/>
+                </a:solidFill>
+                <a:latin typeface="Arial"/>
+              </a:rPr>
+              <a:t>Provenance</a:t>
+            </a:r>
+          </a:p>
+          <a:p>
+            <a:pPr algn="l">
+              <a:lnSpc>
+                <a:spcPct val="130000"/>
+              </a:lnSpc>
+              <a:spcBef>
+                <a:spcPts val="600"/>
+              </a:spcBef>
+            </a:pPr>
+            <a:r>
+              <a:rPr sz="1050" b="0">
+                <a:solidFill>
+                  <a:srgbClr val="6E6E73"/>
+                </a:solidFill>
+                <a:latin typeface="Arial"/>
+              </a:rPr>
+              <a:t>SHA-256 of the engine and core files that produced that model, not of whatever is on disk today.</a:t>
+            </a:r>
+          </a:p>
+        </p:txBody>
+      </p:sp>
+      <p:sp>
+        <p:nvSpPr>
+          <p:cNvPr id="10" name="Rounded Rectangle 9"/>
+          <p:cNvSpPr/>
+          <p:nvPr/>
+        </p:nvSpPr>
+        <p:spPr>
+          <a:xfrm>
+            <a:off x="777240" y="3858768"/>
+            <a:ext cx="3411626" cy="1664208"/>
+          </a:xfrm>
+          <a:prstGeom prst="roundRect">
+            <a:avLst>
+              <a:gd name="adj" fmla="val 3500"/>
+            </a:avLst>
+          </a:prstGeom>
+          <a:solidFill>
+            <a:srgbClr val="F5F5F7"/>
+          </a:solidFill>
+          <a:ln>
+            <a:noFill/>
+          </a:ln>
+          <a:effectLst/>
+        </p:spPr>
+        <p:style>
+          <a:lnRef idx="1">
+            <a:schemeClr val="accent1"/>
+          </a:lnRef>
+          <a:fillRef idx="3">
+            <a:schemeClr val="accent1"/>
+          </a:fillRef>
+          <a:effectRef idx="2">
+            <a:schemeClr val="accent1"/>
+          </a:effectRef>
+          <a:fontRef idx="minor">
+            <a:schemeClr val="lt1"/>
+          </a:fontRef>
+        </p:style>
+        <p:txBody>
+          <a:bodyPr rtlCol="0" anchor="ctr"/>
+          <a:lstStyle/>
+          <a:p>
+            <a:pPr algn="ctr"/>
+          </a:p>
+        </p:txBody>
+      </p:sp>
+      <p:sp>
+        <p:nvSpPr>
+          <p:cNvPr id="11" name="TextBox 10"/>
+          <p:cNvSpPr txBox="1"/>
+          <p:nvPr/>
+        </p:nvSpPr>
+        <p:spPr>
+          <a:xfrm>
+            <a:off x="996696" y="4041648"/>
+            <a:ext cx="2972714" cy="1371600"/>
+          </a:xfrm>
+          <a:prstGeom prst="rect">
+            <a:avLst/>
+          </a:prstGeom>
+          <a:noFill/>
+        </p:spPr>
+        <p:txBody>
+          <a:bodyPr wrap="square" anchor="t" lIns="0" rIns="0" tIns="0" bIns="0">
+            <a:spAutoFit/>
+          </a:bodyPr>
+          <a:lstStyle/>
+          <a:p>
+            <a:pPr algn="l">
+              <a:lnSpc>
+                <a:spcPct val="110000"/>
+              </a:lnSpc>
+            </a:pPr>
+            <a:r>
+              <a:rPr sz="1350" b="1">
+                <a:solidFill>
+                  <a:srgbClr val="1D1D1F"/>
+                </a:solidFill>
+                <a:latin typeface="Arial"/>
+              </a:rPr>
+              <a:t>Plan versus reality</a:t>
+            </a:r>
+          </a:p>
+          <a:p>
+            <a:pPr algn="l">
+              <a:lnSpc>
+                <a:spcPct val="130000"/>
+              </a:lnSpc>
+              <a:spcBef>
+                <a:spcPts val="600"/>
+              </a:spcBef>
+            </a:pPr>
+            <a:r>
+              <a:rPr sz="1050" b="0">
+                <a:solidFill>
+                  <a:srgbClr val="6E6E73"/>
+                </a:solidFill>
+                <a:latin typeface="Arial"/>
+              </a:rPr>
+              <a:t>The planned mesh and the realised one, part by part. If they disagree, the project is not declared sound.</a:t>
+            </a:r>
+          </a:p>
+        </p:txBody>
+      </p:sp>
+      <p:sp>
+        <p:nvSpPr>
+          <p:cNvPr id="12" name="Rounded Rectangle 11"/>
+          <p:cNvSpPr/>
+          <p:nvPr/>
+        </p:nvSpPr>
+        <p:spPr>
+          <a:xfrm>
+            <a:off x="4390034" y="3858768"/>
+            <a:ext cx="3411626" cy="1664208"/>
+          </a:xfrm>
+          <a:prstGeom prst="roundRect">
+            <a:avLst>
+              <a:gd name="adj" fmla="val 3500"/>
+            </a:avLst>
+          </a:prstGeom>
+          <a:solidFill>
+            <a:srgbClr val="F5F5F7"/>
+          </a:solidFill>
+          <a:ln>
+            <a:noFill/>
+          </a:ln>
+          <a:effectLst/>
+        </p:spPr>
+        <p:style>
+          <a:lnRef idx="1">
+            <a:schemeClr val="accent1"/>
+          </a:lnRef>
+          <a:fillRef idx="3">
+            <a:schemeClr val="accent1"/>
+          </a:fillRef>
+          <a:effectRef idx="2">
+            <a:schemeClr val="accent1"/>
+          </a:effectRef>
+          <a:fontRef idx="minor">
+            <a:schemeClr val="lt1"/>
+          </a:fontRef>
+        </p:style>
+        <p:txBody>
+          <a:bodyPr rtlCol="0" anchor="ctr"/>
+          <a:lstStyle/>
+          <a:p>
+            <a:pPr algn="ctr"/>
+          </a:p>
+        </p:txBody>
+      </p:sp>
+      <p:sp>
+        <p:nvSpPr>
+          <p:cNvPr id="13" name="TextBox 12"/>
+          <p:cNvSpPr txBox="1"/>
+          <p:nvPr/>
+        </p:nvSpPr>
+        <p:spPr>
+          <a:xfrm>
+            <a:off x="4609490" y="4041648"/>
+            <a:ext cx="2972714" cy="1371600"/>
+          </a:xfrm>
+          <a:prstGeom prst="rect">
+            <a:avLst/>
+          </a:prstGeom>
+          <a:noFill/>
+        </p:spPr>
+        <p:txBody>
+          <a:bodyPr wrap="square" anchor="t" lIns="0" rIns="0" tIns="0" bIns="0">
+            <a:spAutoFit/>
+          </a:bodyPr>
+          <a:lstStyle/>
+          <a:p>
+            <a:pPr algn="l">
+              <a:lnSpc>
+                <a:spcPct val="110000"/>
+              </a:lnSpc>
+            </a:pPr>
+            <a:r>
+              <a:rPr sz="1350" b="1">
+                <a:solidFill>
+                  <a:srgbClr val="1D1D1F"/>
+                </a:solidFill>
+                <a:latin typeface="Arial"/>
+              </a:rPr>
+              <a:t>Per part</a:t>
+            </a:r>
+          </a:p>
+          <a:p>
+            <a:pPr algn="l">
+              <a:lnSpc>
+                <a:spcPct val="130000"/>
+              </a:lnSpc>
+              <a:spcBef>
+                <a:spcPts val="600"/>
+              </a:spcBef>
+            </a:pPr>
+            <a:r>
+              <a:rPr sz="1050" b="0">
+                <a:solidFill>
+                  <a:srgbClr val="6E6E73"/>
+                </a:solidFill>
+                <a:latin typeface="Arial"/>
+              </a:rPr>
+              <a:t>Elements, quality score, hex share, aspect ratio, repairs and the attempt history.</a:t>
+            </a:r>
+          </a:p>
+        </p:txBody>
+      </p:sp>
+      <p:sp>
+        <p:nvSpPr>
+          <p:cNvPr id="14" name="Rounded Rectangle 13"/>
+          <p:cNvSpPr/>
+          <p:nvPr/>
+        </p:nvSpPr>
+        <p:spPr>
+          <a:xfrm>
+            <a:off x="8002828" y="3858768"/>
+            <a:ext cx="3411626" cy="1664208"/>
+          </a:xfrm>
+          <a:prstGeom prst="roundRect">
+            <a:avLst>
+              <a:gd name="adj" fmla="val 3500"/>
+            </a:avLst>
+          </a:prstGeom>
+          <a:solidFill>
+            <a:srgbClr val="F5F5F7"/>
+          </a:solidFill>
+          <a:ln>
+            <a:noFill/>
+          </a:ln>
+          <a:effectLst/>
+        </p:spPr>
+        <p:style>
+          <a:lnRef idx="1">
+            <a:schemeClr val="accent1"/>
+          </a:lnRef>
+          <a:fillRef idx="3">
+            <a:schemeClr val="accent1"/>
+          </a:fillRef>
+          <a:effectRef idx="2">
+            <a:schemeClr val="accent1"/>
+          </a:effectRef>
+          <a:fontRef idx="minor">
+            <a:schemeClr val="lt1"/>
+          </a:fontRef>
+        </p:style>
+        <p:txBody>
+          <a:bodyPr rtlCol="0" anchor="ctr"/>
+          <a:lstStyle/>
+          <a:p>
+            <a:pPr algn="ctr"/>
+          </a:p>
+        </p:txBody>
+      </p:sp>
+      <p:sp>
+        <p:nvSpPr>
+          <p:cNvPr id="15" name="TextBox 14"/>
+          <p:cNvSpPr txBox="1"/>
+          <p:nvPr/>
+        </p:nvSpPr>
+        <p:spPr>
+          <a:xfrm>
+            <a:off x="8222284" y="4041648"/>
+            <a:ext cx="2972714" cy="1371600"/>
+          </a:xfrm>
+          <a:prstGeom prst="rect">
+            <a:avLst/>
+          </a:prstGeom>
+          <a:noFill/>
+        </p:spPr>
+        <p:txBody>
+          <a:bodyPr wrap="square" anchor="t" lIns="0" rIns="0" tIns="0" bIns="0">
+            <a:spAutoFit/>
+          </a:bodyPr>
+          <a:lstStyle/>
+          <a:p>
+            <a:pPr algn="l">
+              <a:lnSpc>
+                <a:spcPct val="110000"/>
+              </a:lnSpc>
+            </a:pPr>
+            <a:r>
+              <a:rPr sz="1350" b="1">
+                <a:solidFill>
+                  <a:srgbClr val="1D1D1F"/>
+                </a:solidFill>
+                <a:latin typeface="Arial"/>
+              </a:rPr>
+              <a:t>The issue list</a:t>
+            </a:r>
+          </a:p>
+          <a:p>
+            <a:pPr algn="l">
+              <a:lnSpc>
+                <a:spcPct val="130000"/>
+              </a:lnSpc>
+              <a:spcBef>
+                <a:spcPts val="600"/>
+              </a:spcBef>
+            </a:pPr>
+            <a:r>
+              <a:rPr sz="1050" b="0">
+                <a:solidFill>
+                  <a:srgbClr val="6E6E73"/>
+                </a:solidFill>
+                <a:latin typeface="Arial"/>
+              </a:rPr>
+              <a:t>Every warning with its stable code, plus the evidence badges and the sets and surfaces created.</a:t>
+            </a:r>
+          </a:p>
+        </p:txBody>
+      </p:sp>
+      <p:sp>
+        <p:nvSpPr>
+          <p:cNvPr id="16" name="TextBox 15"/>
           <p:cNvSpPr txBox="1"/>
           <p:nvPr/>
         </p:nvSpPr>
@@ -6855,7 +9538,7 @@
                 </a:solidFill>
                 <a:latin typeface="Arial"/>
               </a:rPr>
-              <a:t>VERIFICATION</a:t>
+              <a:t>THE DELIVERABLE</a:t>
             </a:r>
           </a:p>
         </p:txBody>
@@ -6888,33 +9571,35 @@
               </a:lnSpc>
             </a:pPr>
             <a:r>
-              <a:rPr sz="3300" b="1">
+              <a:rPr sz="3000" b="1">
                 <a:solidFill>
                   <a:srgbClr val="1D1D1F"/>
                 </a:solidFill>
                 <a:latin typeface="Arial"/>
               </a:rPr>
-              <a:t>What has been checked, and how</a:t>
-            </a:r>
-          </a:p>
-        </p:txBody>
-      </p:sp>
-      <p:sp>
-        <p:nvSpPr>
-          <p:cNvPr id="4" name="Rectangle 3"/>
+              <a:t>The report is the product, not an extra</a:t>
+            </a:r>
+          </a:p>
+        </p:txBody>
+      </p:sp>
+      <p:sp>
+        <p:nvSpPr>
+          <p:cNvPr id="4" name="Rounded Rectangle 3"/>
           <p:cNvSpPr/>
           <p:nvPr/>
         </p:nvSpPr>
         <p:spPr>
           <a:xfrm>
-            <a:off x="777240" y="2148840"/>
-            <a:ext cx="685800" cy="27940"/>
-          </a:xfrm>
-          <a:prstGeom prst="rect">
-            <a:avLst/>
+            <a:off x="777240" y="2011680"/>
+            <a:ext cx="3411626" cy="1664208"/>
+          </a:xfrm>
+          <a:prstGeom prst="roundRect">
+            <a:avLst>
+              <a:gd name="adj" fmla="val 3500"/>
+            </a:avLst>
           </a:prstGeom>
           <a:solidFill>
-            <a:srgbClr val="1B5E20"/>
+            <a:srgbClr val="F5F5F7"/>
           </a:solidFill>
           <a:ln>
             <a:noFill/>
@@ -6951,8 +9636,8 @@
         </p:nvSpPr>
         <p:spPr>
           <a:xfrm>
-            <a:off x="777240" y="2331720"/>
-            <a:ext cx="4937760" cy="1280160"/>
+            <a:off x="996696" y="2194560"/>
+            <a:ext cx="2972714" cy="1371600"/>
           </a:xfrm>
           <a:prstGeom prst="rect">
             <a:avLst/>
@@ -6971,52 +9656,54 @@
               </a:lnSpc>
             </a:pPr>
             <a:r>
-              <a:rPr sz="1500" b="1">
+              <a:rPr sz="1350" b="1">
                 <a:solidFill>
                   <a:srgbClr val="1D1D1F"/>
                 </a:solidFill>
                 <a:latin typeface="Arial"/>
               </a:rPr>
-              <a:t>Packaged self-test</a:t>
-            </a:r>
-          </a:p>
-          <a:p>
-            <a:pPr algn="l">
-              <a:lnSpc>
-                <a:spcPct val="132000"/>
+              <a:t>Ten sections</a:t>
+            </a:r>
+          </a:p>
+          <a:p>
+            <a:pPr algn="l">
+              <a:lnSpc>
+                <a:spcPct val="130000"/>
               </a:lnSpc>
               <a:spcBef>
                 <a:spcPts val="600"/>
               </a:spcBef>
             </a:pPr>
             <a:r>
-              <a:rPr sz="1150" b="0">
+              <a:rPr sz="1050" b="0">
                 <a:solidFill>
                   <a:srgbClr val="6E6E73"/>
                 </a:solidFill>
                 <a:latin typeface="Arial"/>
               </a:rPr>
-              <a:t>4.2 identity and schema 6, the 5→6 migration, DIN and FVA catalogues, golden calculations, six mesh templates, reports in all three languages. Exits with code 0.</a:t>
-            </a:r>
-          </a:p>
-        </p:txBody>
-      </p:sp>
-      <p:sp>
-        <p:nvSpPr>
-          <p:cNvPr id="6" name="Rectangle 5"/>
+              <a:t>Project and provenance, scope, geometry, DIN 6892 and standards, validation, mesh and policy, checks, evidence, deliverables and limitations.</a:t>
+            </a:r>
+          </a:p>
+        </p:txBody>
+      </p:sp>
+      <p:sp>
+        <p:nvSpPr>
+          <p:cNvPr id="6" name="Rounded Rectangle 5"/>
           <p:cNvSpPr/>
           <p:nvPr/>
         </p:nvSpPr>
         <p:spPr>
           <a:xfrm>
-            <a:off x="777240" y="3447288"/>
-            <a:ext cx="685800" cy="27940"/>
-          </a:xfrm>
-          <a:prstGeom prst="rect">
-            <a:avLst/>
+            <a:off x="4390034" y="2011680"/>
+            <a:ext cx="3411626" cy="1664208"/>
+          </a:xfrm>
+          <a:prstGeom prst="roundRect">
+            <a:avLst>
+              <a:gd name="adj" fmla="val 3500"/>
+            </a:avLst>
           </a:prstGeom>
           <a:solidFill>
-            <a:srgbClr val="1B5E20"/>
+            <a:srgbClr val="F5F5F7"/>
           </a:solidFill>
           <a:ln>
             <a:noFill/>
@@ -7053,8 +9740,8 @@
         </p:nvSpPr>
         <p:spPr>
           <a:xfrm>
-            <a:off x="777240" y="3630168"/>
-            <a:ext cx="4937760" cy="1280160"/>
+            <a:off x="4609490" y="2194560"/>
+            <a:ext cx="2972714" cy="1371600"/>
           </a:xfrm>
           <a:prstGeom prst="rect">
             <a:avLst/>
@@ -7073,52 +9760,54 @@
               </a:lnSpc>
             </a:pPr>
             <a:r>
-              <a:rPr sz="1500" b="1">
+              <a:rPr sz="1350" b="1">
                 <a:solidFill>
                   <a:srgbClr val="1D1D1F"/>
                 </a:solidFill>
                 <a:latin typeface="Arial"/>
               </a:rPr>
-              <a:t>Parity across the three catalogues</a:t>
-            </a:r>
-          </a:p>
-          <a:p>
-            <a:pPr algn="l">
-              <a:lnSpc>
-                <a:spcPct val="132000"/>
+              <a:t>Three files and a log</a:t>
+            </a:r>
+          </a:p>
+          <a:p>
+            <a:pPr algn="l">
+              <a:lnSpc>
+                <a:spcPct val="130000"/>
               </a:lnSpc>
               <a:spcBef>
                 <a:spcPts val="600"/>
               </a:spcBef>
             </a:pPr>
             <a:r>
-              <a:rPr sz="1150" b="0">
+              <a:rPr sz="1050" b="0">
                 <a:solidFill>
                   <a:srgbClr val="6E6E73"/>
                 </a:solidFill>
                 <a:latin typeface="Arial"/>
               </a:rPr>
-              <a:t>650 keys per language with no gaps; every validation code has its translated presentation.</a:t>
-            </a:r>
-          </a:p>
-        </p:txBody>
-      </p:sp>
-      <p:sp>
-        <p:nvSpPr>
-          <p:cNvPr id="8" name="Rectangle 7"/>
+              <a:t>report.tex to review, report.pdf to sign, report_data.json to process and latex_build.log to debug.</a:t>
+            </a:r>
+          </a:p>
+        </p:txBody>
+      </p:sp>
+      <p:sp>
+        <p:nvSpPr>
+          <p:cNvPr id="8" name="Rounded Rectangle 7"/>
           <p:cNvSpPr/>
           <p:nvPr/>
         </p:nvSpPr>
         <p:spPr>
           <a:xfrm>
-            <a:off x="777240" y="4745736"/>
-            <a:ext cx="685800" cy="27940"/>
-          </a:xfrm>
-          <a:prstGeom prst="rect">
-            <a:avLst/>
+            <a:off x="8002828" y="2011680"/>
+            <a:ext cx="3411626" cy="1664208"/>
+          </a:xfrm>
+          <a:prstGeom prst="roundRect">
+            <a:avLst>
+              <a:gd name="adj" fmla="val 3500"/>
+            </a:avLst>
           </a:prstGeom>
           <a:solidFill>
-            <a:srgbClr val="1B5E20"/>
+            <a:srgbClr val="F5F5F7"/>
           </a:solidFill>
           <a:ln>
             <a:noFill/>
@@ -7155,8 +9844,8 @@
         </p:nvSpPr>
         <p:spPr>
           <a:xfrm>
-            <a:off x="777240" y="4928616"/>
-            <a:ext cx="4937760" cy="1280160"/>
+            <a:off x="8222284" y="2194560"/>
+            <a:ext cx="2972714" cy="1371600"/>
           </a:xfrm>
           <a:prstGeom prst="rect">
             <a:avLst/>
@@ -7175,52 +9864,54 @@
               </a:lnSpc>
             </a:pPr>
             <a:r>
-              <a:rPr sz="1500" b="1">
+              <a:rPr sz="1350" b="1">
                 <a:solidFill>
                   <a:srgbClr val="1D1D1F"/>
                 </a:solidFill>
                 <a:latin typeface="Arial"/>
               </a:rPr>
-              <a:t>All four presets</a:t>
-            </a:r>
-          </a:p>
-          <a:p>
-            <a:pPr algn="l">
-              <a:lnSpc>
-                <a:spcPct val="132000"/>
+              <a:t>Trilingual</a:t>
+            </a:r>
+          </a:p>
+          <a:p>
+            <a:pPr algn="l">
+              <a:lnSpc>
+                <a:spcPct val="130000"/>
               </a:lnSpc>
               <a:spcBef>
                 <a:spcPts val="600"/>
               </a:spcBef>
             </a:pPr>
             <a:r>
-              <a:rPr sz="1150" b="0">
+              <a:rPr sz="1050" b="0">
                 <a:solidFill>
                   <a:srgbClr val="6E6E73"/>
                 </a:solidFill>
                 <a:latin typeface="Arial"/>
               </a:rPr>
-              <a:t>normalize and validate under schema 6 with zero errors, including the 10-cycle solving one.</a:t>
-            </a:r>
-          </a:p>
-        </p:txBody>
-      </p:sp>
-      <p:sp>
-        <p:nvSpPr>
-          <p:cNvPr id="10" name="Rectangle 9"/>
+              <a:t>Emitted in the project's language, from the same 650-key catalogues the interface uses.</a:t>
+            </a:r>
+          </a:p>
+        </p:txBody>
+      </p:sp>
+      <p:sp>
+        <p:nvSpPr>
+          <p:cNvPr id="10" name="Rounded Rectangle 9"/>
           <p:cNvSpPr/>
           <p:nvPr/>
         </p:nvSpPr>
         <p:spPr>
           <a:xfrm>
-            <a:off x="6217920" y="2148840"/>
-            <a:ext cx="685800" cy="27940"/>
-          </a:xfrm>
-          <a:prstGeom prst="rect">
-            <a:avLst/>
+            <a:off x="777240" y="3858768"/>
+            <a:ext cx="3411626" cy="1664208"/>
+          </a:xfrm>
+          <a:prstGeom prst="roundRect">
+            <a:avLst>
+              <a:gd name="adj" fmla="val 3500"/>
+            </a:avLst>
           </a:prstGeom>
           <a:solidFill>
-            <a:srgbClr val="1B5E20"/>
+            <a:srgbClr val="F5F5F7"/>
           </a:solidFill>
           <a:ln>
             <a:noFill/>
@@ -7257,8 +9948,8 @@
         </p:nvSpPr>
         <p:spPr>
           <a:xfrm>
-            <a:off x="6217920" y="2331720"/>
-            <a:ext cx="4937760" cy="1280160"/>
+            <a:off x="996696" y="4041648"/>
+            <a:ext cx="2972714" cy="1371600"/>
           </a:xfrm>
           <a:prstGeom prst="rect">
             <a:avLst/>
@@ -7277,52 +9968,54 @@
               </a:lnSpc>
             </a:pPr>
             <a:r>
-              <a:rPr sz="1500" b="1">
+              <a:rPr sz="1350" b="1">
                 <a:solidFill>
                   <a:srgbClr val="1D1D1F"/>
                 </a:solidFill>
                 <a:latin typeface="Arial"/>
               </a:rPr>
-              <a:t>Compatibility with the kernel</a:t>
-            </a:r>
-          </a:p>
-          <a:p>
-            <a:pPr algn="l">
-              <a:lnSpc>
-                <a:spcPct val="132000"/>
+              <a:t>The badges survive</a:t>
+            </a:r>
+          </a:p>
+          <a:p>
+            <a:pPr algn="l">
+              <a:lnSpc>
+                <a:spcPct val="130000"/>
               </a:lnSpc>
               <a:spcBef>
                 <a:spcPts val="600"/>
               </a:spcBef>
             </a:pPr>
             <a:r>
-              <a:rPr sz="1150" b="0">
+              <a:rPr sz="1050" b="0">
                 <a:solidFill>
                   <a:srgbClr val="6E6E73"/>
                 </a:solidFill>
                 <a:latin typeface="Arial"/>
               </a:rPr>
-              <a:t>the six modules that run inside Abaqus were audited with AST: no f-strings, no annotations, only os, sys, json, math, time and hashlib. Division imported from __future__.</a:t>
-            </a:r>
-          </a:p>
-        </p:txBody>
-      </p:sp>
-      <p:sp>
-        <p:nvSpPr>
-          <p:cNvPr id="12" name="Rectangle 11"/>
+              <a:t>Every value reaches the PDF with its provenance badge as a coloured chip, not as a footnote.</a:t>
+            </a:r>
+          </a:p>
+        </p:txBody>
+      </p:sp>
+      <p:sp>
+        <p:nvSpPr>
+          <p:cNvPr id="12" name="Rounded Rectangle 11"/>
           <p:cNvSpPr/>
           <p:nvPr/>
         </p:nvSpPr>
         <p:spPr>
           <a:xfrm>
-            <a:off x="6217920" y="3447288"/>
-            <a:ext cx="685800" cy="27940"/>
-          </a:xfrm>
-          <a:prstGeom prst="rect">
-            <a:avLst/>
+            <a:off x="4390034" y="3858768"/>
+            <a:ext cx="3411626" cy="1664208"/>
+          </a:xfrm>
+          <a:prstGeom prst="roundRect">
+            <a:avLst>
+              <a:gd name="adj" fmla="val 3500"/>
+            </a:avLst>
           </a:prstGeom>
           <a:solidFill>
-            <a:srgbClr val="1B5E20"/>
+            <a:srgbClr val="F5F5F7"/>
           </a:solidFill>
           <a:ln>
             <a:noFill/>
@@ -7359,8 +10052,8 @@
         </p:nvSpPr>
         <p:spPr>
           <a:xfrm>
-            <a:off x="6217920" y="3630168"/>
-            <a:ext cx="4937760" cy="1280160"/>
+            <a:off x="4609490" y="4041648"/>
+            <a:ext cx="2972714" cy="1371600"/>
           </a:xfrm>
           <a:prstGeom prst="rect">
             <a:avLst/>
@@ -7379,52 +10072,54 @@
               </a:lnSpc>
             </a:pPr>
             <a:r>
-              <a:rPr sz="1500" b="1">
+              <a:rPr sz="1350" b="1">
                 <a:solidFill>
                   <a:srgbClr val="1D1D1F"/>
                 </a:solidFill>
                 <a:latin typeface="Arial"/>
               </a:rPr>
-              <a:t>Artifact contract</a:t>
-            </a:r>
-          </a:p>
-          <a:p>
-            <a:pPr algn="l">
-              <a:lnSpc>
-                <a:spcPct val="132000"/>
+              <a:t>Compilation</a:t>
+            </a:r>
+          </a:p>
+          <a:p>
+            <a:pPr algn="l">
+              <a:lnSpc>
+                <a:spcPct val="130000"/>
               </a:lnSpc>
               <a:spcBef>
                 <a:spcPts val="600"/>
               </a:spcBef>
             </a:pPr>
             <a:r>
-              <a:rPr sz="1150" b="0">
+              <a:rPr sz="1050" b="0">
                 <a:solidFill>
                   <a:srgbClr val="6E6E73"/>
                 </a:solidFill>
                 <a:latin typeface="Arial"/>
               </a:rPr>
-              <a:t>a project is declared sound only if the audit, BUILD_RESULT, CAE, screenshots and report all exist, and the realised mesh matches the planned one.</a:t>
-            </a:r>
-          </a:p>
-        </p:txBody>
-      </p:sp>
-      <p:sp>
-        <p:nvSpPr>
-          <p:cNvPr id="14" name="Rectangle 13"/>
+              <a:t>latexmk when available, two pdflatex passes otherwise, with no shell and a finite timeout.</a:t>
+            </a:r>
+          </a:p>
+        </p:txBody>
+      </p:sp>
+      <p:sp>
+        <p:nvSpPr>
+          <p:cNvPr id="14" name="Rounded Rectangle 13"/>
           <p:cNvSpPr/>
           <p:nvPr/>
         </p:nvSpPr>
         <p:spPr>
           <a:xfrm>
-            <a:off x="6217920" y="4745736"/>
-            <a:ext cx="685800" cy="27940"/>
-          </a:xfrm>
-          <a:prstGeom prst="rect">
-            <a:avLst/>
+            <a:off x="8002828" y="3858768"/>
+            <a:ext cx="3411626" cy="1664208"/>
+          </a:xfrm>
+          <a:prstGeom prst="roundRect">
+            <a:avLst>
+              <a:gd name="adj" fmla="val 3500"/>
+            </a:avLst>
           </a:prstGeom>
           <a:solidFill>
-            <a:srgbClr val="1B5E20"/>
+            <a:srgbClr val="F5F5F7"/>
           </a:solidFill>
           <a:ln>
             <a:noFill/>
@@ -7461,8 +10156,8 @@
         </p:nvSpPr>
         <p:spPr>
           <a:xfrm>
-            <a:off x="6217920" y="4928616"/>
-            <a:ext cx="4937760" cy="1280160"/>
+            <a:off x="8222284" y="4041648"/>
+            <a:ext cx="2972714" cy="1371600"/>
           </a:xfrm>
           <a:prstGeom prst="rect">
             <a:avLst/>
@@ -7481,32 +10176,32 @@
               </a:lnSpc>
             </a:pPr>
             <a:r>
-              <a:rPr sz="1500" b="1">
+              <a:rPr sz="1350" b="1">
                 <a:solidFill>
                   <a:srgbClr val="1D1D1F"/>
                 </a:solidFill>
                 <a:latin typeface="Arial"/>
               </a:rPr>
-              <a:t>Figures locked in the test</a:t>
-            </a:r>
-          </a:p>
-          <a:p>
-            <a:pPr algn="l">
-              <a:lnSpc>
-                <a:spcPct val="132000"/>
+              <a:t>With no LaTeX installed</a:t>
+            </a:r>
+          </a:p>
+          <a:p>
+            <a:pPr algn="l">
+              <a:lnSpc>
+                <a:spcPct val="130000"/>
               </a:lnSpc>
               <a:spcBef>
                 <a:spcPts val="600"/>
               </a:spcBef>
             </a:pPr>
             <a:r>
-              <a:rPr sz="1150" b="0">
+              <a:rPr sz="1050" b="0">
                 <a:solidFill>
                   <a:srgbClr val="6E6E73"/>
                 </a:solidFill>
                 <a:latin typeface="Arial"/>
               </a:rPr>
-              <a:t>999.18 N·m hub-governed, t2tr = 3.141 mm, f_W from equation 3 and the K_λ domain.</a:t>
+              <a:t>It writes the .tex, says so with a translated message, and does not fail the build over something that is not the model's fault.</a:t>
             </a:r>
           </a:p>
         </p:txBody>
@@ -7514,45 +10209,6 @@
       <p:sp>
         <p:nvSpPr>
           <p:cNvPr id="16" name="TextBox 15"/>
-          <p:cNvSpPr txBox="1"/>
-          <p:nvPr/>
-        </p:nvSpPr>
-        <p:spPr>
-          <a:xfrm>
-            <a:off x="777240" y="6144768"/>
-            <a:ext cx="10058400" cy="640080"/>
-          </a:xfrm>
-          <a:prstGeom prst="rect">
-            <a:avLst/>
-          </a:prstGeom>
-          <a:noFill/>
-        </p:spPr>
-        <p:txBody>
-          <a:bodyPr wrap="square" anchor="t" lIns="0" rIns="0" tIns="0" bIns="0">
-            <a:spAutoFit/>
-          </a:bodyPr>
-          <a:lstStyle/>
-          <a:p>
-            <a:pPr algn="l">
-              <a:lnSpc>
-                <a:spcPct val="125000"/>
-              </a:lnSpc>
-            </a:pPr>
-            <a:r>
-              <a:rPr sz="1150" b="0">
-                <a:solidFill>
-                  <a:srgbClr val="86868B"/>
-                </a:solidFill>
-                <a:latin typeface="Arial"/>
-              </a:rPr>
-              <a:t>What the self-test does not do, and says so: it does not start Abaqus, does not solve, does not compile LaTeX and does not validate an FVA specimen.</a:t>
-            </a:r>
-          </a:p>
-        </p:txBody>
-      </p:sp>
-      <p:sp>
-        <p:nvSpPr>
-          <p:cNvPr id="17" name="TextBox 16"/>
           <p:cNvSpPr txBox="1"/>
           <p:nvPr/>
         </p:nvSpPr>
@@ -7649,14 +10305,14 @@
                 </a:solidFill>
                 <a:latin typeface="Arial"/>
               </a:rPr>
-              <a:t>DISTRIBUTION</a:t>
+              <a:t>LOAD CAPACITY</a:t>
             </a:r>
           </a:p>
         </p:txBody>
       </p:sp>
       <p:pic>
         <p:nvPicPr>
-          <p:cNvPr id="3" name="Picture 2" descr="dia_release.png"/>
+          <p:cNvPr id="3" name="Picture 2" descr="dia_metodos.png"/>
           <p:cNvPicPr>
             <a:picLocks noChangeAspect="1"/>
           </p:cNvPicPr>
@@ -7670,8 +10326,8 @@
         </p:blipFill>
         <p:spPr>
           <a:xfrm>
-            <a:off x="777240" y="1556351"/>
-            <a:ext cx="10637215" cy="3955610"/>
+            <a:off x="973788" y="1170432"/>
+            <a:ext cx="10244119" cy="4727448"/>
           </a:xfrm>
           <a:prstGeom prst="rect">
             <a:avLst/>
@@ -7777,14 +10433,14 @@
                 </a:solidFill>
                 <a:latin typeface="Arial"/>
               </a:rPr>
-              <a:t>STATUS</a:t>
+              <a:t>RESULTS</a:t>
             </a:r>
           </a:p>
         </p:txBody>
       </p:sp>
       <p:pic>
         <p:nvPicPr>
-          <p:cNvPr id="3" name="Picture 2" descr="dia_estado.png"/>
+          <p:cNvPr id="3" name="Picture 2" descr="chart_pares.png"/>
           <p:cNvPicPr>
             <a:picLocks noChangeAspect="1"/>
           </p:cNvPicPr>
@@ -7798,8 +10454,8 @@
         </p:blipFill>
         <p:spPr>
           <a:xfrm>
-            <a:off x="1372101" y="1170432"/>
-            <a:ext cx="9447492" cy="4727448"/>
+            <a:off x="777240" y="1192479"/>
+            <a:ext cx="10637215" cy="4683353"/>
           </a:xfrm>
           <a:prstGeom prst="rect">
             <a:avLst/>
@@ -7859,7 +10515,7 @@
     <p:bg>
       <p:bgPr>
         <a:solidFill>
-          <a:srgbClr val="0A0A0C"/>
+          <a:srgbClr val="FFFFFF"/>
         </a:solidFill>
         <a:effectLst/>
       </p:bgPr>
@@ -7901,480 +10557,42 @@
             <a:r>
               <a:rPr sz="1150" b="1">
                 <a:solidFill>
-                  <a:srgbClr val="2997FF"/>
-                </a:solidFill>
-                <a:latin typeface="Arial"/>
-              </a:rPr>
-              <a:t>NEXT STEPS</a:t>
-            </a:r>
-          </a:p>
-        </p:txBody>
-      </p:sp>
-      <p:sp>
-        <p:nvSpPr>
-          <p:cNvPr id="3" name="TextBox 2"/>
-          <p:cNvSpPr txBox="1"/>
-          <p:nvPr/>
-        </p:nvSpPr>
-        <p:spPr>
-          <a:xfrm>
-            <a:off x="777240" y="932688"/>
-            <a:ext cx="10637215" cy="914400"/>
-          </a:xfrm>
-          <a:prstGeom prst="rect">
-            <a:avLst/>
-          </a:prstGeom>
-          <a:noFill/>
-        </p:spPr>
-        <p:txBody>
-          <a:bodyPr wrap="square" anchor="t" lIns="0" rIns="0" tIns="0" bIns="0">
-            <a:spAutoFit/>
-          </a:bodyPr>
-          <a:lstStyle/>
-          <a:p>
-            <a:pPr algn="l">
-              <a:lnSpc>
-                <a:spcPct val="95000"/>
-              </a:lnSpc>
-            </a:pPr>
-            <a:r>
-              <a:rPr sz="3600" b="1">
-                <a:solidFill>
-                  <a:srgbClr val="FFFFFF"/>
-                </a:solidFill>
-                <a:latin typeface="Arial"/>
-              </a:rPr>
-              <a:t>Three decisions and one build</a:t>
-            </a:r>
-          </a:p>
-        </p:txBody>
-      </p:sp>
+                  <a:srgbClr val="0071E3"/>
+                </a:solidFill>
+                <a:latin typeface="Arial"/>
+              </a:rPr>
+              <a:t>CORRECTION 1 OF 2</a:t>
+            </a:r>
+          </a:p>
+        </p:txBody>
+      </p:sp>
+      <p:pic>
+        <p:nvPicPr>
+          <p:cNvPr id="3" name="Picture 2" descr="dia_t2tr.png"/>
+          <p:cNvPicPr>
+            <a:picLocks noChangeAspect="1"/>
+          </p:cNvPicPr>
+          <p:nvPr/>
+        </p:nvPicPr>
+        <p:blipFill>
+          <a:blip r:embed="rId2"/>
+          <a:stretch>
+            <a:fillRect/>
+          </a:stretch>
+        </p:blipFill>
+        <p:spPr>
+          <a:xfrm>
+            <a:off x="1548850" y="1170432"/>
+            <a:ext cx="9093994" cy="4727448"/>
+          </a:xfrm>
+          <a:prstGeom prst="rect">
+            <a:avLst/>
+          </a:prstGeom>
+        </p:spPr>
+      </p:pic>
       <p:sp>
         <p:nvSpPr>
           <p:cNvPr id="4" name="TextBox 3"/>
-          <p:cNvSpPr txBox="1"/>
-          <p:nvPr/>
-        </p:nvSpPr>
-        <p:spPr>
-          <a:xfrm>
-            <a:off x="777240" y="2468880"/>
-            <a:ext cx="914400" cy="548640"/>
-          </a:xfrm>
-          <a:prstGeom prst="rect">
-            <a:avLst/>
-          </a:prstGeom>
-          <a:noFill/>
-        </p:spPr>
-        <p:txBody>
-          <a:bodyPr wrap="square" anchor="t" lIns="0" rIns="0" tIns="0" bIns="0">
-            <a:spAutoFit/>
-          </a:bodyPr>
-          <a:lstStyle/>
-          <a:p>
-            <a:pPr algn="l">
-              <a:lnSpc>
-                <a:spcPct val="100000"/>
-              </a:lnSpc>
-            </a:pPr>
-            <a:r>
-              <a:rPr sz="1700" b="1">
-                <a:solidFill>
-                  <a:srgbClr val="2997FF"/>
-                </a:solidFill>
-                <a:latin typeface="Arial"/>
-              </a:rPr>
-              <a:t>01</a:t>
-            </a:r>
-          </a:p>
-        </p:txBody>
-      </p:sp>
-      <p:sp>
-        <p:nvSpPr>
-          <p:cNvPr id="5" name="TextBox 4"/>
-          <p:cNvSpPr txBox="1"/>
-          <p:nvPr/>
-        </p:nvSpPr>
-        <p:spPr>
-          <a:xfrm>
-            <a:off x="1783080" y="2468880"/>
-            <a:ext cx="9601200" cy="1188720"/>
-          </a:xfrm>
-          <a:prstGeom prst="rect">
-            <a:avLst/>
-          </a:prstGeom>
-          <a:noFill/>
-        </p:spPr>
-        <p:txBody>
-          <a:bodyPr wrap="square" anchor="t" lIns="0" rIns="0" tIns="0" bIns="0">
-            <a:spAutoFit/>
-          </a:bodyPr>
-          <a:lstStyle/>
-          <a:p>
-            <a:pPr algn="l">
-              <a:lnSpc>
-                <a:spcPct val="105000"/>
-              </a:lnSpc>
-            </a:pPr>
-            <a:r>
-              <a:rPr sz="1900" b="1">
-                <a:solidFill>
-                  <a:srgbClr val="FFFFFF"/>
-                </a:solidFill>
-                <a:latin typeface="Arial"/>
-              </a:rPr>
-              <a:t>Rebuild the executable</a:t>
-            </a:r>
-          </a:p>
-          <a:p>
-            <a:pPr algn="l">
-              <a:lnSpc>
-                <a:spcPct val="135000"/>
-              </a:lnSpc>
-              <a:spcBef>
-                <a:spcPts val="700"/>
-              </a:spcBef>
-            </a:pPr>
-            <a:r>
-              <a:rPr sz="1250" b="0">
-                <a:solidFill>
-                  <a:srgbClr val="9E9EA7"/>
-                </a:solidFill>
-                <a:latin typeface="Arial"/>
-              </a:rPr>
-              <a:t>make_exe.bat, unchanged, from the full project tree. The published .exe predates both corrections: 17 of the 31 manifest entries have changed.</a:t>
-            </a:r>
-          </a:p>
-        </p:txBody>
-      </p:sp>
-      <p:sp>
-        <p:nvSpPr>
-          <p:cNvPr id="6" name="Rectangle 5"/>
-          <p:cNvSpPr/>
-          <p:nvPr/>
-        </p:nvSpPr>
-        <p:spPr>
-          <a:xfrm>
-            <a:off x="777240" y="2249424"/>
-            <a:ext cx="10637215" cy="12700"/>
-          </a:xfrm>
-          <a:prstGeom prst="rect">
-            <a:avLst/>
-          </a:prstGeom>
-          <a:solidFill>
-            <a:srgbClr val="2A2A30"/>
-          </a:solidFill>
-          <a:ln>
-            <a:noFill/>
-          </a:ln>
-          <a:effectLst/>
-        </p:spPr>
-        <p:style>
-          <a:lnRef idx="1">
-            <a:schemeClr val="accent1"/>
-          </a:lnRef>
-          <a:fillRef idx="3">
-            <a:schemeClr val="accent1"/>
-          </a:fillRef>
-          <a:effectRef idx="2">
-            <a:schemeClr val="accent1"/>
-          </a:effectRef>
-          <a:fontRef idx="minor">
-            <a:schemeClr val="lt1"/>
-          </a:fontRef>
-        </p:style>
-        <p:txBody>
-          <a:bodyPr rtlCol="0" anchor="ctr"/>
-          <a:lstStyle/>
-          <a:p>
-            <a:pPr algn="ctr"/>
-          </a:p>
-        </p:txBody>
-      </p:sp>
-      <p:sp>
-        <p:nvSpPr>
-          <p:cNvPr id="7" name="TextBox 6"/>
-          <p:cNvSpPr txBox="1"/>
-          <p:nvPr/>
-        </p:nvSpPr>
-        <p:spPr>
-          <a:xfrm>
-            <a:off x="777240" y="3767328"/>
-            <a:ext cx="914400" cy="548640"/>
-          </a:xfrm>
-          <a:prstGeom prst="rect">
-            <a:avLst/>
-          </a:prstGeom>
-          <a:noFill/>
-        </p:spPr>
-        <p:txBody>
-          <a:bodyPr wrap="square" anchor="t" lIns="0" rIns="0" tIns="0" bIns="0">
-            <a:spAutoFit/>
-          </a:bodyPr>
-          <a:lstStyle/>
-          <a:p>
-            <a:pPr algn="l">
-              <a:lnSpc>
-                <a:spcPct val="100000"/>
-              </a:lnSpc>
-            </a:pPr>
-            <a:r>
-              <a:rPr sz="1700" b="1">
-                <a:solidFill>
-                  <a:srgbClr val="2997FF"/>
-                </a:solidFill>
-                <a:latin typeface="Arial"/>
-              </a:rPr>
-              <a:t>02</a:t>
-            </a:r>
-          </a:p>
-        </p:txBody>
-      </p:sp>
-      <p:sp>
-        <p:nvSpPr>
-          <p:cNvPr id="8" name="TextBox 7"/>
-          <p:cNvSpPr txBox="1"/>
-          <p:nvPr/>
-        </p:nvSpPr>
-        <p:spPr>
-          <a:xfrm>
-            <a:off x="1783080" y="3767328"/>
-            <a:ext cx="9601200" cy="1188720"/>
-          </a:xfrm>
-          <a:prstGeom prst="rect">
-            <a:avLst/>
-          </a:prstGeom>
-          <a:noFill/>
-        </p:spPr>
-        <p:txBody>
-          <a:bodyPr wrap="square" anchor="t" lIns="0" rIns="0" tIns="0" bIns="0">
-            <a:spAutoFit/>
-          </a:bodyPr>
-          <a:lstStyle/>
-          <a:p>
-            <a:pPr algn="l">
-              <a:lnSpc>
-                <a:spcPct val="105000"/>
-              </a:lnSpc>
-            </a:pPr>
-            <a:r>
-              <a:rPr sz="1900" b="1">
-                <a:solidFill>
-                  <a:srgbClr val="FFFFFF"/>
-                </a:solidFill>
-                <a:latin typeface="Arial"/>
-              </a:rPr>
-              <a:t>Settle the sign of equation 9</a:t>
-            </a:r>
-          </a:p>
-          <a:p>
-            <a:pPr algn="l">
-              <a:lnSpc>
-                <a:spcPct val="135000"/>
-              </a:lnSpc>
-              <a:spcBef>
-                <a:spcPts val="700"/>
-              </a:spcBef>
-            </a:pPr>
-            <a:r>
-              <a:rPr sz="1250" b="0">
-                <a:solidFill>
-                  <a:srgbClr val="9E9EA7"/>
-                </a:solidFill>
-                <a:latin typeface="Arial"/>
-              </a:rPr>
-              <a:t>against the licensed DIN 6892 text. If the minus sign is right, the real allowable torque drops another 46 %.</a:t>
-            </a:r>
-          </a:p>
-        </p:txBody>
-      </p:sp>
-      <p:sp>
-        <p:nvSpPr>
-          <p:cNvPr id="9" name="Rectangle 8"/>
-          <p:cNvSpPr/>
-          <p:nvPr/>
-        </p:nvSpPr>
-        <p:spPr>
-          <a:xfrm>
-            <a:off x="777240" y="3547872"/>
-            <a:ext cx="10637215" cy="12700"/>
-          </a:xfrm>
-          <a:prstGeom prst="rect">
-            <a:avLst/>
-          </a:prstGeom>
-          <a:solidFill>
-            <a:srgbClr val="2A2A30"/>
-          </a:solidFill>
-          <a:ln>
-            <a:noFill/>
-          </a:ln>
-          <a:effectLst/>
-        </p:spPr>
-        <p:style>
-          <a:lnRef idx="1">
-            <a:schemeClr val="accent1"/>
-          </a:lnRef>
-          <a:fillRef idx="3">
-            <a:schemeClr val="accent1"/>
-          </a:fillRef>
-          <a:effectRef idx="2">
-            <a:schemeClr val="accent1"/>
-          </a:effectRef>
-          <a:fontRef idx="minor">
-            <a:schemeClr val="lt1"/>
-          </a:fontRef>
-        </p:style>
-        <p:txBody>
-          <a:bodyPr rtlCol="0" anchor="ctr"/>
-          <a:lstStyle/>
-          <a:p>
-            <a:pPr algn="ctr"/>
-          </a:p>
-        </p:txBody>
-      </p:sp>
-      <p:sp>
-        <p:nvSpPr>
-          <p:cNvPr id="10" name="TextBox 9"/>
-          <p:cNvSpPr txBox="1"/>
-          <p:nvPr/>
-        </p:nvSpPr>
-        <p:spPr>
-          <a:xfrm>
-            <a:off x="777240" y="5065776"/>
-            <a:ext cx="914400" cy="548640"/>
-          </a:xfrm>
-          <a:prstGeom prst="rect">
-            <a:avLst/>
-          </a:prstGeom>
-          <a:noFill/>
-        </p:spPr>
-        <p:txBody>
-          <a:bodyPr wrap="square" anchor="t" lIns="0" rIns="0" tIns="0" bIns="0">
-            <a:spAutoFit/>
-          </a:bodyPr>
-          <a:lstStyle/>
-          <a:p>
-            <a:pPr algn="l">
-              <a:lnSpc>
-                <a:spcPct val="100000"/>
-              </a:lnSpc>
-            </a:pPr>
-            <a:r>
-              <a:rPr sz="1700" b="1">
-                <a:solidFill>
-                  <a:srgbClr val="2997FF"/>
-                </a:solidFill>
-                <a:latin typeface="Arial"/>
-              </a:rPr>
-              <a:t>03</a:t>
-            </a:r>
-          </a:p>
-        </p:txBody>
-      </p:sp>
-      <p:sp>
-        <p:nvSpPr>
-          <p:cNvPr id="11" name="TextBox 10"/>
-          <p:cNvSpPr txBox="1"/>
-          <p:nvPr/>
-        </p:nvSpPr>
-        <p:spPr>
-          <a:xfrm>
-            <a:off x="1783080" y="5065776"/>
-            <a:ext cx="9601200" cy="1188720"/>
-          </a:xfrm>
-          <a:prstGeom prst="rect">
-            <a:avLst/>
-          </a:prstGeom>
-          <a:noFill/>
-        </p:spPr>
-        <p:txBody>
-          <a:bodyPr wrap="square" anchor="t" lIns="0" rIns="0" tIns="0" bIns="0">
-            <a:spAutoFit/>
-          </a:bodyPr>
-          <a:lstStyle/>
-          <a:p>
-            <a:pPr algn="l">
-              <a:lnSpc>
-                <a:spcPct val="105000"/>
-              </a:lnSpc>
-            </a:pPr>
-            <a:r>
-              <a:rPr sz="1900" b="1">
-                <a:solidFill>
-                  <a:srgbClr val="FFFFFF"/>
-                </a:solidFill>
-                <a:latin typeface="Arial"/>
-              </a:rPr>
-              <a:t>Number the version</a:t>
-            </a:r>
-          </a:p>
-          <a:p>
-            <a:pPr algn="l">
-              <a:lnSpc>
-                <a:spcPct val="135000"/>
-              </a:lnSpc>
-              <a:spcBef>
-                <a:spcPts val="700"/>
-              </a:spcBef>
-            </a:pPr>
-            <a:r>
-              <a:rPr sz="1250" b="0">
-                <a:solidFill>
-                  <a:srgbClr val="9E9EA7"/>
-                </a:solidFill>
-                <a:latin typeface="Arial"/>
-              </a:rPr>
-              <a:t>two executables that both report 4.2 and return different torques are an identity collision. My recommendation is 4.3.</a:t>
-            </a:r>
-          </a:p>
-        </p:txBody>
-      </p:sp>
-      <p:sp>
-        <p:nvSpPr>
-          <p:cNvPr id="12" name="Rectangle 11"/>
-          <p:cNvSpPr/>
-          <p:nvPr/>
-        </p:nvSpPr>
-        <p:spPr>
-          <a:xfrm>
-            <a:off x="777240" y="4846320"/>
-            <a:ext cx="10637215" cy="12700"/>
-          </a:xfrm>
-          <a:prstGeom prst="rect">
-            <a:avLst/>
-          </a:prstGeom>
-          <a:solidFill>
-            <a:srgbClr val="2A2A30"/>
-          </a:solidFill>
-          <a:ln>
-            <a:noFill/>
-          </a:ln>
-          <a:effectLst/>
-        </p:spPr>
-        <p:style>
-          <a:lnRef idx="1">
-            <a:schemeClr val="accent1"/>
-          </a:lnRef>
-          <a:fillRef idx="3">
-            <a:schemeClr val="accent1"/>
-          </a:fillRef>
-          <a:effectRef idx="2">
-            <a:schemeClr val="accent1"/>
-          </a:effectRef>
-          <a:fontRef idx="minor">
-            <a:schemeClr val="lt1"/>
-          </a:fontRef>
-        </p:style>
-        <p:txBody>
-          <a:bodyPr rtlCol="0" anchor="ctr"/>
-          <a:lstStyle/>
-          <a:p>
-            <a:pPr algn="ctr"/>
-          </a:p>
-        </p:txBody>
-      </p:sp>
-      <p:sp>
-        <p:nvSpPr>
-          <p:cNvPr id="13" name="TextBox 12"/>
           <p:cNvSpPr txBox="1"/>
           <p:nvPr/>
         </p:nvSpPr>
@@ -8402,7 +10620,7 @@
             <a:r>
               <a:rPr sz="1000" b="0">
                 <a:solidFill>
-                  <a:srgbClr val="9E9EA7"/>
+                  <a:srgbClr val="86868B"/>
                 </a:solidFill>
                 <a:latin typeface="Arial"/>
               </a:rPr>
@@ -8425,7 +10643,7 @@
     <p:bg>
       <p:bgPr>
         <a:solidFill>
-          <a:srgbClr val="0A0A0C"/>
+          <a:srgbClr val="FFFFFF"/>
         </a:solidFill>
         <a:effectLst/>
       </p:bgPr>
@@ -8445,48 +10663,8 @@
         </p:nvSpPr>
         <p:spPr>
           <a:xfrm>
-            <a:off x="777240" y="2286000"/>
-            <a:ext cx="10058400" cy="2377440"/>
-          </a:xfrm>
-          <a:prstGeom prst="rect">
-            <a:avLst/>
-          </a:prstGeom>
-          <a:noFill/>
-        </p:spPr>
-        <p:txBody>
-          <a:bodyPr wrap="square" anchor="t" lIns="0" rIns="0" tIns="0" bIns="0">
-            <a:spAutoFit/>
-          </a:bodyPr>
-          <a:lstStyle/>
-          <a:p>
-            <a:pPr algn="l">
-              <a:lnSpc>
-                <a:spcPct val="110000"/>
-              </a:lnSpc>
-            </a:pPr>
-            <a:r>
-              <a:rPr sz="3600" b="1">
-                <a:solidFill>
-                  <a:srgbClr val="FFFFFF"/>
-                </a:solidFill>
-                <a:latin typeface="Arial"/>
-              </a:rPr>
-              <a:t>The value is not the model.
-It is being able to show how it was made.</a:t>
-            </a:r>
-          </a:p>
-        </p:txBody>
-      </p:sp>
-      <p:sp>
-        <p:nvSpPr>
-          <p:cNvPr id="3" name="TextBox 2"/>
-          <p:cNvSpPr txBox="1"/>
-          <p:nvPr/>
-        </p:nvSpPr>
-        <p:spPr>
-          <a:xfrm>
-            <a:off x="777240" y="5120640"/>
-            <a:ext cx="10058400" cy="1097280"/>
+            <a:off x="777240" y="566928"/>
+            <a:ext cx="10637215" cy="292608"/>
           </a:xfrm>
           <a:prstGeom prst="rect">
             <a:avLst/>
@@ -8505,36 +10683,41 @@
               </a:lnSpc>
             </a:pPr>
             <a:r>
-              <a:rPr sz="1250" b="0">
-                <a:solidFill>
-                  <a:srgbClr val="9E9EA7"/>
-                </a:solidFill>
-                <a:latin typeface="Arial"/>
-              </a:rPr>
-              <a:t>Model Builder 4.2  ·  parameter schema 6  ·  din6892-methods-1.0  ·  auto-mesh-2.0</a:t>
-            </a:r>
-          </a:p>
-          <a:p>
-            <a:pPr algn="l">
-              <a:lnSpc>
-                <a:spcPct val="100000"/>
-              </a:lnSpc>
-              <a:spcBef>
-                <a:spcPts val="800"/>
-              </a:spcBef>
-            </a:pPr>
-            <a:r>
-              <a:rPr sz="1250" b="0">
-                <a:solidFill>
-                  <a:srgbClr val="7C7C86"/>
-                </a:solidFill>
-                <a:latin typeface="Arial"/>
-              </a:rPr>
-              <a:t>Every number in this deck is reproducible by running the code in the repository.</a:t>
-            </a:r>
-          </a:p>
-        </p:txBody>
-      </p:sp>
+              <a:rPr sz="1150" b="1">
+                <a:solidFill>
+                  <a:srgbClr val="0071E3"/>
+                </a:solidFill>
+                <a:latin typeface="Arial"/>
+              </a:rPr>
+              <a:t>CORRECTION 2 OF 2</a:t>
+            </a:r>
+          </a:p>
+        </p:txBody>
+      </p:sp>
+      <p:pic>
+        <p:nvPicPr>
+          <p:cNvPr id="3" name="Picture 2" descr="chart_fw.png"/>
+          <p:cNvPicPr>
+            <a:picLocks noChangeAspect="1"/>
+          </p:cNvPicPr>
+          <p:nvPr/>
+        </p:nvPicPr>
+        <p:blipFill>
+          <a:blip r:embed="rId2"/>
+          <a:stretch>
+            <a:fillRect/>
+          </a:stretch>
+        </p:blipFill>
+        <p:spPr>
+          <a:xfrm>
+            <a:off x="811838" y="1170432"/>
+            <a:ext cx="10568019" cy="4727448"/>
+          </a:xfrm>
+          <a:prstGeom prst="rect">
+            <a:avLst/>
+          </a:prstGeom>
+        </p:spPr>
+      </p:pic>
       <p:sp>
         <p:nvSpPr>
           <p:cNvPr id="4" name="TextBox 3"/>
@@ -8565,7 +10748,7 @@
             <a:r>
               <a:rPr sz="1000" b="0">
                 <a:solidFill>
-                  <a:srgbClr val="9E9EA7"/>
+                  <a:srgbClr val="86868B"/>
                 </a:solidFill>
                 <a:latin typeface="Arial"/>
               </a:rPr>
@@ -9362,7 +11545,3704 @@
                 </a:solidFill>
                 <a:latin typeface="Arial"/>
               </a:rPr>
+              <a:t>04</a:t>
+            </a:r>
+          </a:p>
+        </p:txBody>
+      </p:sp>
+    </p:spTree>
+  </p:cSld>
+  <p:clrMapOvr>
+    <a:masterClrMapping/>
+  </p:clrMapOvr>
+</p:sld>
+</file>
+
+<file path=ppt/slides/slide30.xml><?xml version="1.0" encoding="utf-8"?>
+<p:sld xmlns:a="http://schemas.openxmlformats.org/drawingml/2006/main" xmlns:p="http://schemas.openxmlformats.org/presentationml/2006/main" xmlns:r="http://schemas.openxmlformats.org/officeDocument/2006/relationships">
+  <p:cSld>
+    <p:bg>
+      <p:bgPr>
+        <a:solidFill>
+          <a:srgbClr val="FFFFFF"/>
+        </a:solidFill>
+        <a:effectLst/>
+      </p:bgPr>
+    </p:bg>
+    <p:spTree>
+      <p:nvGrpSpPr>
+        <p:cNvPr id="1" name=""/>
+        <p:cNvGrpSpPr/>
+        <p:nvPr/>
+      </p:nvGrpSpPr>
+      <p:grpSpPr/>
+      <p:sp>
+        <p:nvSpPr>
+          <p:cNvPr id="2" name="TextBox 1"/>
+          <p:cNvSpPr txBox="1"/>
+          <p:nvPr/>
+        </p:nvSpPr>
+        <p:spPr>
+          <a:xfrm>
+            <a:off x="777240" y="566928"/>
+            <a:ext cx="10637215" cy="292608"/>
+          </a:xfrm>
+          <a:prstGeom prst="rect">
+            <a:avLst/>
+          </a:prstGeom>
+          <a:noFill/>
+        </p:spPr>
+        <p:txBody>
+          <a:bodyPr wrap="square" anchor="t" lIns="0" rIns="0" tIns="0" bIns="0">
+            <a:spAutoFit/>
+          </a:bodyPr>
+          <a:lstStyle/>
+          <a:p>
+            <a:pPr algn="l">
+              <a:lnSpc>
+                <a:spcPct val="100000"/>
+              </a:lnSpc>
+            </a:pPr>
+            <a:r>
+              <a:rPr sz="1150" b="1">
+                <a:solidFill>
+                  <a:srgbClr val="0071E3"/>
+                </a:solidFill>
+                <a:latin typeface="Arial"/>
+              </a:rPr>
+              <a:t>OPEN FINDING</a:t>
+            </a:r>
+          </a:p>
+        </p:txBody>
+      </p:sp>
+      <p:pic>
+        <p:nvPicPr>
+          <p:cNvPr id="3" name="Picture 2" descr="dia_eq9.png"/>
+          <p:cNvPicPr>
+            <a:picLocks noChangeAspect="1"/>
+          </p:cNvPicPr>
+          <p:nvPr/>
+        </p:nvPicPr>
+        <p:blipFill>
+          <a:blip r:embed="rId2"/>
+          <a:stretch>
+            <a:fillRect/>
+          </a:stretch>
+        </p:blipFill>
+        <p:spPr>
+          <a:xfrm>
+            <a:off x="1675805" y="1170432"/>
+            <a:ext cx="8840084" cy="4727448"/>
+          </a:xfrm>
+          <a:prstGeom prst="rect">
+            <a:avLst/>
+          </a:prstGeom>
+        </p:spPr>
+      </p:pic>
+      <p:sp>
+        <p:nvSpPr>
+          <p:cNvPr id="4" name="TextBox 3"/>
+          <p:cNvSpPr txBox="1"/>
+          <p:nvPr/>
+        </p:nvSpPr>
+        <p:spPr>
+          <a:xfrm>
+            <a:off x="10500055" y="6345936"/>
+            <a:ext cx="914400" cy="274320"/>
+          </a:xfrm>
+          <a:prstGeom prst="rect">
+            <a:avLst/>
+          </a:prstGeom>
+          <a:noFill/>
+        </p:spPr>
+        <p:txBody>
+          <a:bodyPr wrap="square" anchor="t" lIns="0" rIns="0" tIns="0" bIns="0">
+            <a:spAutoFit/>
+          </a:bodyPr>
+          <a:lstStyle/>
+          <a:p>
+            <a:pPr algn="l">
+              <a:lnSpc>
+                <a:spcPct val="100000"/>
+              </a:lnSpc>
+            </a:pPr>
+            <a:r>
+              <a:rPr sz="1000" b="0">
+                <a:solidFill>
+                  <a:srgbClr val="86868B"/>
+                </a:solidFill>
+                <a:latin typeface="Arial"/>
+              </a:rPr>
+              <a:t>30</a:t>
+            </a:r>
+          </a:p>
+        </p:txBody>
+      </p:sp>
+    </p:spTree>
+  </p:cSld>
+  <p:clrMapOvr>
+    <a:masterClrMapping/>
+  </p:clrMapOvr>
+</p:sld>
+</file>
+
+<file path=ppt/slides/slide31.xml><?xml version="1.0" encoding="utf-8"?>
+<p:sld xmlns:a="http://schemas.openxmlformats.org/drawingml/2006/main" xmlns:p="http://schemas.openxmlformats.org/presentationml/2006/main" xmlns:r="http://schemas.openxmlformats.org/officeDocument/2006/relationships">
+  <p:cSld>
+    <p:bg>
+      <p:bgPr>
+        <a:solidFill>
+          <a:srgbClr val="FFFFFF"/>
+        </a:solidFill>
+        <a:effectLst/>
+      </p:bgPr>
+    </p:bg>
+    <p:spTree>
+      <p:nvGrpSpPr>
+        <p:cNvPr id="1" name=""/>
+        <p:cNvGrpSpPr/>
+        <p:nvPr/>
+      </p:nvGrpSpPr>
+      <p:grpSpPr/>
+      <p:sp>
+        <p:nvSpPr>
+          <p:cNvPr id="2" name="TextBox 1"/>
+          <p:cNvSpPr txBox="1"/>
+          <p:nvPr/>
+        </p:nvSpPr>
+        <p:spPr>
+          <a:xfrm>
+            <a:off x="777240" y="566928"/>
+            <a:ext cx="10637215" cy="292608"/>
+          </a:xfrm>
+          <a:prstGeom prst="rect">
+            <a:avLst/>
+          </a:prstGeom>
+          <a:noFill/>
+        </p:spPr>
+        <p:txBody>
+          <a:bodyPr wrap="square" anchor="t" lIns="0" rIns="0" tIns="0" bIns="0">
+            <a:spAutoFit/>
+          </a:bodyPr>
+          <a:lstStyle/>
+          <a:p>
+            <a:pPr algn="l">
+              <a:lnSpc>
+                <a:spcPct val="100000"/>
+              </a:lnSpc>
+            </a:pPr>
+            <a:r>
+              <a:rPr sz="1150" b="1">
+                <a:solidFill>
+                  <a:srgbClr val="0071E3"/>
+                </a:solidFill>
+                <a:latin typeface="Arial"/>
+              </a:rPr>
+              <a:t>METHOD A</a:t>
+            </a:r>
+          </a:p>
+        </p:txBody>
+      </p:sp>
+      <p:pic>
+        <p:nvPicPr>
+          <p:cNvPr id="3" name="Picture 2" descr="dia_method_a.png"/>
+          <p:cNvPicPr>
+            <a:picLocks noChangeAspect="1"/>
+          </p:cNvPicPr>
+          <p:nvPr/>
+        </p:nvPicPr>
+        <p:blipFill>
+          <a:blip r:embed="rId2"/>
+          <a:stretch>
+            <a:fillRect/>
+          </a:stretch>
+        </p:blipFill>
+        <p:spPr>
+          <a:xfrm>
+            <a:off x="777240" y="1475276"/>
+            <a:ext cx="10637215" cy="4117759"/>
+          </a:xfrm>
+          <a:prstGeom prst="rect">
+            <a:avLst/>
+          </a:prstGeom>
+        </p:spPr>
+      </p:pic>
+      <p:sp>
+        <p:nvSpPr>
+          <p:cNvPr id="4" name="TextBox 3"/>
+          <p:cNvSpPr txBox="1"/>
+          <p:nvPr/>
+        </p:nvSpPr>
+        <p:spPr>
+          <a:xfrm>
+            <a:off x="10500055" y="6345936"/>
+            <a:ext cx="914400" cy="274320"/>
+          </a:xfrm>
+          <a:prstGeom prst="rect">
+            <a:avLst/>
+          </a:prstGeom>
+          <a:noFill/>
+        </p:spPr>
+        <p:txBody>
+          <a:bodyPr wrap="square" anchor="t" lIns="0" rIns="0" tIns="0" bIns="0">
+            <a:spAutoFit/>
+          </a:bodyPr>
+          <a:lstStyle/>
+          <a:p>
+            <a:pPr algn="l">
+              <a:lnSpc>
+                <a:spcPct val="100000"/>
+              </a:lnSpc>
+            </a:pPr>
+            <a:r>
+              <a:rPr sz="1000" b="0">
+                <a:solidFill>
+                  <a:srgbClr val="86868B"/>
+                </a:solidFill>
+                <a:latin typeface="Arial"/>
+              </a:rPr>
+              <a:t>31</a:t>
+            </a:r>
+          </a:p>
+        </p:txBody>
+      </p:sp>
+    </p:spTree>
+  </p:cSld>
+  <p:clrMapOvr>
+    <a:masterClrMapping/>
+  </p:clrMapOvr>
+</p:sld>
+</file>
+
+<file path=ppt/slides/slide32.xml><?xml version="1.0" encoding="utf-8"?>
+<p:sld xmlns:a="http://schemas.openxmlformats.org/drawingml/2006/main" xmlns:p="http://schemas.openxmlformats.org/presentationml/2006/main" xmlns:r="http://schemas.openxmlformats.org/officeDocument/2006/relationships">
+  <p:cSld>
+    <p:bg>
+      <p:bgPr>
+        <a:solidFill>
+          <a:srgbClr val="FFFFFF"/>
+        </a:solidFill>
+        <a:effectLst/>
+      </p:bgPr>
+    </p:bg>
+    <p:spTree>
+      <p:nvGrpSpPr>
+        <p:cNvPr id="1" name=""/>
+        <p:cNvGrpSpPr/>
+        <p:nvPr/>
+      </p:nvGrpSpPr>
+      <p:grpSpPr/>
+      <p:sp>
+        <p:nvSpPr>
+          <p:cNvPr id="2" name="TextBox 1"/>
+          <p:cNvSpPr txBox="1"/>
+          <p:nvPr/>
+        </p:nvSpPr>
+        <p:spPr>
+          <a:xfrm>
+            <a:off x="777240" y="566928"/>
+            <a:ext cx="10637215" cy="292608"/>
+          </a:xfrm>
+          <a:prstGeom prst="rect">
+            <a:avLst/>
+          </a:prstGeom>
+          <a:noFill/>
+        </p:spPr>
+        <p:txBody>
+          <a:bodyPr wrap="square" anchor="t" lIns="0" rIns="0" tIns="0" bIns="0">
+            <a:spAutoFit/>
+          </a:bodyPr>
+          <a:lstStyle/>
+          <a:p>
+            <a:pPr algn="l">
+              <a:lnSpc>
+                <a:spcPct val="100000"/>
+              </a:lnSpc>
+            </a:pPr>
+            <a:r>
+              <a:rPr sz="1150" b="1">
+                <a:solidFill>
+                  <a:srgbClr val="0071E3"/>
+                </a:solidFill>
+                <a:latin typeface="Arial"/>
+              </a:rPr>
+              <a:t>NUMERICAL CROSS-CHECK</a:t>
+            </a:r>
+          </a:p>
+        </p:txBody>
+      </p:sp>
+      <p:pic>
+        <p:nvPicPr>
+          <p:cNvPr id="3" name="Picture 2" descr="dia_matlab.png"/>
+          <p:cNvPicPr>
+            <a:picLocks noChangeAspect="1"/>
+          </p:cNvPicPr>
+          <p:nvPr/>
+        </p:nvPicPr>
+        <p:blipFill>
+          <a:blip r:embed="rId2"/>
+          <a:stretch>
+            <a:fillRect/>
+          </a:stretch>
+        </p:blipFill>
+        <p:spPr>
+          <a:xfrm>
+            <a:off x="777240" y="1409581"/>
+            <a:ext cx="10637215" cy="4249149"/>
+          </a:xfrm>
+          <a:prstGeom prst="rect">
+            <a:avLst/>
+          </a:prstGeom>
+        </p:spPr>
+      </p:pic>
+      <p:sp>
+        <p:nvSpPr>
+          <p:cNvPr id="4" name="TextBox 3"/>
+          <p:cNvSpPr txBox="1"/>
+          <p:nvPr/>
+        </p:nvSpPr>
+        <p:spPr>
+          <a:xfrm>
+            <a:off x="10500055" y="6345936"/>
+            <a:ext cx="914400" cy="274320"/>
+          </a:xfrm>
+          <a:prstGeom prst="rect">
+            <a:avLst/>
+          </a:prstGeom>
+          <a:noFill/>
+        </p:spPr>
+        <p:txBody>
+          <a:bodyPr wrap="square" anchor="t" lIns="0" rIns="0" tIns="0" bIns="0">
+            <a:spAutoFit/>
+          </a:bodyPr>
+          <a:lstStyle/>
+          <a:p>
+            <a:pPr algn="l">
+              <a:lnSpc>
+                <a:spcPct val="100000"/>
+              </a:lnSpc>
+            </a:pPr>
+            <a:r>
+              <a:rPr sz="1000" b="0">
+                <a:solidFill>
+                  <a:srgbClr val="86868B"/>
+                </a:solidFill>
+                <a:latin typeface="Arial"/>
+              </a:rPr>
+              <a:t>32</a:t>
+            </a:r>
+          </a:p>
+        </p:txBody>
+      </p:sp>
+    </p:spTree>
+  </p:cSld>
+  <p:clrMapOvr>
+    <a:masterClrMapping/>
+  </p:clrMapOvr>
+</p:sld>
+</file>
+
+<file path=ppt/slides/slide33.xml><?xml version="1.0" encoding="utf-8"?>
+<p:sld xmlns:a="http://schemas.openxmlformats.org/drawingml/2006/main" xmlns:p="http://schemas.openxmlformats.org/presentationml/2006/main" xmlns:r="http://schemas.openxmlformats.org/officeDocument/2006/relationships">
+  <p:cSld>
+    <p:bg>
+      <p:bgPr>
+        <a:solidFill>
+          <a:srgbClr val="FFFFFF"/>
+        </a:solidFill>
+        <a:effectLst/>
+      </p:bgPr>
+    </p:bg>
+    <p:spTree>
+      <p:nvGrpSpPr>
+        <p:cNvPr id="1" name=""/>
+        <p:cNvGrpSpPr/>
+        <p:nvPr/>
+      </p:nvGrpSpPr>
+      <p:grpSpPr/>
+      <p:sp>
+        <p:nvSpPr>
+          <p:cNvPr id="2" name="TextBox 1"/>
+          <p:cNvSpPr txBox="1"/>
+          <p:nvPr/>
+        </p:nvSpPr>
+        <p:spPr>
+          <a:xfrm>
+            <a:off x="777240" y="566928"/>
+            <a:ext cx="10637215" cy="292608"/>
+          </a:xfrm>
+          <a:prstGeom prst="rect">
+            <a:avLst/>
+          </a:prstGeom>
+          <a:noFill/>
+        </p:spPr>
+        <p:txBody>
+          <a:bodyPr wrap="square" anchor="t" lIns="0" rIns="0" tIns="0" bIns="0">
+            <a:spAutoFit/>
+          </a:bodyPr>
+          <a:lstStyle/>
+          <a:p>
+            <a:pPr algn="l">
+              <a:lnSpc>
+                <a:spcPct val="100000"/>
+              </a:lnSpc>
+            </a:pPr>
+            <a:r>
+              <a:rPr sz="1150" b="1">
+                <a:solidFill>
+                  <a:srgbClr val="0071E3"/>
+                </a:solidFill>
+                <a:latin typeface="Arial"/>
+              </a:rPr>
+              <a:t>FVA 600 III CATALOGUE</a:t>
+            </a:r>
+          </a:p>
+        </p:txBody>
+      </p:sp>
+      <p:sp>
+        <p:nvSpPr>
+          <p:cNvPr id="3" name="TextBox 2"/>
+          <p:cNvSpPr txBox="1"/>
+          <p:nvPr/>
+        </p:nvSpPr>
+        <p:spPr>
+          <a:xfrm>
+            <a:off x="777240" y="932688"/>
+            <a:ext cx="10637215" cy="914400"/>
+          </a:xfrm>
+          <a:prstGeom prst="rect">
+            <a:avLst/>
+          </a:prstGeom>
+          <a:noFill/>
+        </p:spPr>
+        <p:txBody>
+          <a:bodyPr wrap="square" anchor="t" lIns="0" rIns="0" tIns="0" bIns="0">
+            <a:spAutoFit/>
+          </a:bodyPr>
+          <a:lstStyle/>
+          <a:p>
+            <a:pPr algn="l">
+              <a:lnSpc>
+                <a:spcPct val="95000"/>
+              </a:lnSpc>
+            </a:pPr>
+            <a:r>
+              <a:rPr sz="3000" b="1">
+                <a:solidFill>
+                  <a:srgbClr val="1D1D1F"/>
+                </a:solidFill>
+                <a:latin typeface="Arial"/>
+              </a:rPr>
+              <a:t>Eight discrete configurations, not a continuous domain</a:t>
+            </a:r>
+          </a:p>
+        </p:txBody>
+      </p:sp>
+      <p:sp>
+        <p:nvSpPr>
+          <p:cNvPr id="4" name="Rounded Rectangle 3"/>
+          <p:cNvSpPr/>
+          <p:nvPr/>
+        </p:nvSpPr>
+        <p:spPr>
+          <a:xfrm>
+            <a:off x="777240" y="2011680"/>
+            <a:ext cx="3411626" cy="1664208"/>
+          </a:xfrm>
+          <a:prstGeom prst="roundRect">
+            <a:avLst>
+              <a:gd name="adj" fmla="val 3500"/>
+            </a:avLst>
+          </a:prstGeom>
+          <a:solidFill>
+            <a:srgbClr val="F5F5F7"/>
+          </a:solidFill>
+          <a:ln>
+            <a:noFill/>
+          </a:ln>
+          <a:effectLst/>
+        </p:spPr>
+        <p:style>
+          <a:lnRef idx="1">
+            <a:schemeClr val="accent1"/>
+          </a:lnRef>
+          <a:fillRef idx="3">
+            <a:schemeClr val="accent1"/>
+          </a:fillRef>
+          <a:effectRef idx="2">
+            <a:schemeClr val="accent1"/>
+          </a:effectRef>
+          <a:fontRef idx="minor">
+            <a:schemeClr val="lt1"/>
+          </a:fontRef>
+        </p:style>
+        <p:txBody>
+          <a:bodyPr rtlCol="0" anchor="ctr"/>
+          <a:lstStyle/>
+          <a:p>
+            <a:pPr algn="ctr"/>
+          </a:p>
+        </p:txBody>
+      </p:sp>
+      <p:sp>
+        <p:nvSpPr>
+          <p:cNvPr id="5" name="TextBox 4"/>
+          <p:cNvSpPr txBox="1"/>
+          <p:nvPr/>
+        </p:nvSpPr>
+        <p:spPr>
+          <a:xfrm>
+            <a:off x="996696" y="2194560"/>
+            <a:ext cx="2972714" cy="1371600"/>
+          </a:xfrm>
+          <a:prstGeom prst="rect">
+            <a:avLst/>
+          </a:prstGeom>
+          <a:noFill/>
+        </p:spPr>
+        <p:txBody>
+          <a:bodyPr wrap="square" anchor="t" lIns="0" rIns="0" tIns="0" bIns="0">
+            <a:spAutoFit/>
+          </a:bodyPr>
+          <a:lstStyle/>
+          <a:p>
+            <a:pPr algn="l">
+              <a:lnSpc>
+                <a:spcPct val="110000"/>
+              </a:lnSpc>
+            </a:pPr>
+            <a:r>
+              <a:rPr sz="1350" b="1">
+                <a:solidFill>
+                  <a:srgbClr val="1D1D1F"/>
+                </a:solidFill>
+                <a:latin typeface="Arial"/>
+              </a:rPr>
+              <a:t>VB1 to VB8</a:t>
+            </a:r>
+          </a:p>
+          <a:p>
+            <a:pPr algn="l">
+              <a:lnSpc>
+                <a:spcPct val="130000"/>
+              </a:lnSpc>
+              <a:spcBef>
+                <a:spcPts val="600"/>
+              </a:spcBef>
+            </a:pPr>
+            <a:r>
+              <a:rPr sz="1050" b="0">
+                <a:solidFill>
+                  <a:srgbClr val="6E6E73"/>
+                </a:solidFill>
+                <a:latin typeface="Arial"/>
+              </a:rPr>
+              <a:t>Each variant fixes d_w, l_tr/d_w, Q_A, the interference, the load ratio R and the key form.</a:t>
+            </a:r>
+          </a:p>
+        </p:txBody>
+      </p:sp>
+      <p:sp>
+        <p:nvSpPr>
+          <p:cNvPr id="6" name="Rounded Rectangle 5"/>
+          <p:cNvSpPr/>
+          <p:nvPr/>
+        </p:nvSpPr>
+        <p:spPr>
+          <a:xfrm>
+            <a:off x="4390034" y="2011680"/>
+            <a:ext cx="3411626" cy="1664208"/>
+          </a:xfrm>
+          <a:prstGeom prst="roundRect">
+            <a:avLst>
+              <a:gd name="adj" fmla="val 3500"/>
+            </a:avLst>
+          </a:prstGeom>
+          <a:solidFill>
+            <a:srgbClr val="F5F5F7"/>
+          </a:solidFill>
+          <a:ln>
+            <a:noFill/>
+          </a:ln>
+          <a:effectLst/>
+        </p:spPr>
+        <p:style>
+          <a:lnRef idx="1">
+            <a:schemeClr val="accent1"/>
+          </a:lnRef>
+          <a:fillRef idx="3">
+            <a:schemeClr val="accent1"/>
+          </a:fillRef>
+          <a:effectRef idx="2">
+            <a:schemeClr val="accent1"/>
+          </a:effectRef>
+          <a:fontRef idx="minor">
+            <a:schemeClr val="lt1"/>
+          </a:fontRef>
+        </p:style>
+        <p:txBody>
+          <a:bodyPr rtlCol="0" anchor="ctr"/>
+          <a:lstStyle/>
+          <a:p>
+            <a:pPr algn="ctr"/>
+          </a:p>
+        </p:txBody>
+      </p:sp>
+      <p:sp>
+        <p:nvSpPr>
+          <p:cNvPr id="7" name="TextBox 6"/>
+          <p:cNvSpPr txBox="1"/>
+          <p:nvPr/>
+        </p:nvSpPr>
+        <p:spPr>
+          <a:xfrm>
+            <a:off x="4609490" y="2194560"/>
+            <a:ext cx="2972714" cy="1371600"/>
+          </a:xfrm>
+          <a:prstGeom prst="rect">
+            <a:avLst/>
+          </a:prstGeom>
+          <a:noFill/>
+        </p:spPr>
+        <p:txBody>
+          <a:bodyPr wrap="square" anchor="t" lIns="0" rIns="0" tIns="0" bIns="0">
+            <a:spAutoFit/>
+          </a:bodyPr>
+          <a:lstStyle/>
+          <a:p>
+            <a:pPr algn="l">
+              <a:lnSpc>
+                <a:spcPct val="110000"/>
+              </a:lnSpc>
+            </a:pPr>
+            <a:r>
+              <a:rPr sz="1350" b="1">
+                <a:solidFill>
+                  <a:srgbClr val="1D1D1F"/>
+                </a:solidFill>
+                <a:latin typeface="Arial"/>
+              </a:rPr>
+              <a:t>They are points, not a range</a:t>
+            </a:r>
+          </a:p>
+          <a:p>
+            <a:pPr algn="l">
+              <a:lnSpc>
+                <a:spcPct val="130000"/>
+              </a:lnSpc>
+              <a:spcBef>
+                <a:spcPts val="600"/>
+              </a:spcBef>
+            </a:pPr>
+            <a:r>
+              <a:rPr sz="1050" b="0">
+                <a:solidFill>
+                  <a:srgbClr val="6E6E73"/>
+                </a:solidFill>
+                <a:latin typeface="Arial"/>
+              </a:rPr>
+              <a:t>The catalogue is documented as discrete research configurations: interpolating between them is not supported.</a:t>
+            </a:r>
+          </a:p>
+        </p:txBody>
+      </p:sp>
+      <p:sp>
+        <p:nvSpPr>
+          <p:cNvPr id="8" name="Rounded Rectangle 7"/>
+          <p:cNvSpPr/>
+          <p:nvPr/>
+        </p:nvSpPr>
+        <p:spPr>
+          <a:xfrm>
+            <a:off x="8002828" y="2011680"/>
+            <a:ext cx="3411626" cy="1664208"/>
+          </a:xfrm>
+          <a:prstGeom prst="roundRect">
+            <a:avLst>
+              <a:gd name="adj" fmla="val 3500"/>
+            </a:avLst>
+          </a:prstGeom>
+          <a:solidFill>
+            <a:srgbClr val="F5F5F7"/>
+          </a:solidFill>
+          <a:ln>
+            <a:noFill/>
+          </a:ln>
+          <a:effectLst/>
+        </p:spPr>
+        <p:style>
+          <a:lnRef idx="1">
+            <a:schemeClr val="accent1"/>
+          </a:lnRef>
+          <a:fillRef idx="3">
+            <a:schemeClr val="accent1"/>
+          </a:fillRef>
+          <a:effectRef idx="2">
+            <a:schemeClr val="accent1"/>
+          </a:effectRef>
+          <a:fontRef idx="minor">
+            <a:schemeClr val="lt1"/>
+          </a:fontRef>
+        </p:style>
+        <p:txBody>
+          <a:bodyPr rtlCol="0" anchor="ctr"/>
+          <a:lstStyle/>
+          <a:p>
+            <a:pPr algn="ctr"/>
+          </a:p>
+        </p:txBody>
+      </p:sp>
+      <p:sp>
+        <p:nvSpPr>
+          <p:cNvPr id="9" name="TextBox 8"/>
+          <p:cNvSpPr txBox="1"/>
+          <p:nvPr/>
+        </p:nvSpPr>
+        <p:spPr>
+          <a:xfrm>
+            <a:off x="8222284" y="2194560"/>
+            <a:ext cx="2972714" cy="1371600"/>
+          </a:xfrm>
+          <a:prstGeom prst="rect">
+            <a:avLst/>
+          </a:prstGeom>
+          <a:noFill/>
+        </p:spPr>
+        <p:txBody>
+          <a:bodyPr wrap="square" anchor="t" lIns="0" rIns="0" tIns="0" bIns="0">
+            <a:spAutoFit/>
+          </a:bodyPr>
+          <a:lstStyle/>
+          <a:p>
+            <a:pPr algn="l">
+              <a:lnSpc>
+                <a:spcPct val="110000"/>
+              </a:lnSpc>
+            </a:pPr>
+            <a:r>
+              <a:rPr sz="1350" b="1">
+                <a:solidFill>
+                  <a:srgbClr val="1D1D1F"/>
+                </a:solidFill>
+                <a:latin typeface="Arial"/>
+              </a:rPr>
+              <a:t>VB1, the reference</a:t>
+            </a:r>
+          </a:p>
+          <a:p>
+            <a:pPr algn="l">
+              <a:lnSpc>
+                <a:spcPct val="130000"/>
+              </a:lnSpc>
+              <a:spcBef>
+                <a:spcPts val="600"/>
+              </a:spcBef>
+            </a:pPr>
+            <a:r>
+              <a:rPr sz="1050" b="0">
+                <a:solidFill>
+                  <a:srgbClr val="6E6E73"/>
+                </a:solidFill>
+                <a:latin typeface="Arial"/>
+              </a:rPr>
+              <a:t>d_w = 40 mm, l_tr/d_w = 0.95, Q_A = 0.5, R = 0 and a form A key. It is the variant of the bundled presets.</a:t>
+            </a:r>
+          </a:p>
+        </p:txBody>
+      </p:sp>
+      <p:sp>
+        <p:nvSpPr>
+          <p:cNvPr id="10" name="Rounded Rectangle 9"/>
+          <p:cNvSpPr/>
+          <p:nvPr/>
+        </p:nvSpPr>
+        <p:spPr>
+          <a:xfrm>
+            <a:off x="777240" y="3858768"/>
+            <a:ext cx="3411626" cy="1664208"/>
+          </a:xfrm>
+          <a:prstGeom prst="roundRect">
+            <a:avLst>
+              <a:gd name="adj" fmla="val 3500"/>
+            </a:avLst>
+          </a:prstGeom>
+          <a:solidFill>
+            <a:srgbClr val="F5F5F7"/>
+          </a:solidFill>
+          <a:ln>
+            <a:noFill/>
+          </a:ln>
+          <a:effectLst/>
+        </p:spPr>
+        <p:style>
+          <a:lnRef idx="1">
+            <a:schemeClr val="accent1"/>
+          </a:lnRef>
+          <a:fillRef idx="3">
+            <a:schemeClr val="accent1"/>
+          </a:fillRef>
+          <a:effectRef idx="2">
+            <a:schemeClr val="accent1"/>
+          </a:effectRef>
+          <a:fontRef idx="minor">
+            <a:schemeClr val="lt1"/>
+          </a:fontRef>
+        </p:style>
+        <p:txBody>
+          <a:bodyPr rtlCol="0" anchor="ctr"/>
+          <a:lstStyle/>
+          <a:p>
+            <a:pPr algn="ctr"/>
+          </a:p>
+        </p:txBody>
+      </p:sp>
+      <p:sp>
+        <p:nvSpPr>
+          <p:cNvPr id="11" name="TextBox 10"/>
+          <p:cNvSpPr txBox="1"/>
+          <p:nvPr/>
+        </p:nvSpPr>
+        <p:spPr>
+          <a:xfrm>
+            <a:off x="996696" y="4041648"/>
+            <a:ext cx="2972714" cy="1371600"/>
+          </a:xfrm>
+          <a:prstGeom prst="rect">
+            <a:avLst/>
+          </a:prstGeom>
+          <a:noFill/>
+        </p:spPr>
+        <p:txBody>
+          <a:bodyPr wrap="square" anchor="t" lIns="0" rIns="0" tIns="0" bIns="0">
+            <a:spAutoFit/>
+          </a:bodyPr>
+          <a:lstStyle/>
+          <a:p>
+            <a:pPr algn="l">
+              <a:lnSpc>
+                <a:spcPct val="110000"/>
+              </a:lnSpc>
+            </a:pPr>
+            <a:r>
+              <a:rPr sz="1350" b="1">
+                <a:solidFill>
+                  <a:srgbClr val="1D1D1F"/>
+                </a:solidFill>
+                <a:latin typeface="Arial"/>
+              </a:rPr>
+              <a:t>Material models</a:t>
+            </a:r>
+          </a:p>
+          <a:p>
+            <a:pPr algn="l">
+              <a:lnSpc>
+                <a:spcPct val="130000"/>
+              </a:lnSpc>
+              <a:spcBef>
+                <a:spcPts val="600"/>
+              </a:spcBef>
+            </a:pPr>
+            <a:r>
+              <a:rPr sz="1050" b="0">
+                <a:solidFill>
+                  <a:srgbClr val="6E6E73"/>
+                </a:solidFill>
+                <a:latin typeface="Arial"/>
+              </a:rPr>
+              <a:t>Chaboche-Lemaitre combined on the shaft, UML Ramberg-Osgood on the hub and elastic-ideal-plastic on the key.</a:t>
+            </a:r>
+          </a:p>
+        </p:txBody>
+      </p:sp>
+      <p:sp>
+        <p:nvSpPr>
+          <p:cNvPr id="12" name="Rounded Rectangle 11"/>
+          <p:cNvSpPr/>
+          <p:nvPr/>
+        </p:nvSpPr>
+        <p:spPr>
+          <a:xfrm>
+            <a:off x="4390034" y="3858768"/>
+            <a:ext cx="3411626" cy="1664208"/>
+          </a:xfrm>
+          <a:prstGeom prst="roundRect">
+            <a:avLst>
+              <a:gd name="adj" fmla="val 3500"/>
+            </a:avLst>
+          </a:prstGeom>
+          <a:solidFill>
+            <a:srgbClr val="F5F5F7"/>
+          </a:solidFill>
+          <a:ln>
+            <a:noFill/>
+          </a:ln>
+          <a:effectLst/>
+        </p:spPr>
+        <p:style>
+          <a:lnRef idx="1">
+            <a:schemeClr val="accent1"/>
+          </a:lnRef>
+          <a:fillRef idx="3">
+            <a:schemeClr val="accent1"/>
+          </a:fillRef>
+          <a:effectRef idx="2">
+            <a:schemeClr val="accent1"/>
+          </a:effectRef>
+          <a:fontRef idx="minor">
+            <a:schemeClr val="lt1"/>
+          </a:fontRef>
+        </p:style>
+        <p:txBody>
+          <a:bodyPr rtlCol="0" anchor="ctr"/>
+          <a:lstStyle/>
+          <a:p>
+            <a:pPr algn="ctr"/>
+          </a:p>
+        </p:txBody>
+      </p:sp>
+      <p:sp>
+        <p:nvSpPr>
+          <p:cNvPr id="13" name="TextBox 12"/>
+          <p:cNvSpPr txBox="1"/>
+          <p:nvPr/>
+        </p:nvSpPr>
+        <p:spPr>
+          <a:xfrm>
+            <a:off x="4609490" y="4041648"/>
+            <a:ext cx="2972714" cy="1371600"/>
+          </a:xfrm>
+          <a:prstGeom prst="rect">
+            <a:avLst/>
+          </a:prstGeom>
+          <a:noFill/>
+        </p:spPr>
+        <p:txBody>
+          <a:bodyPr wrap="square" anchor="t" lIns="0" rIns="0" tIns="0" bIns="0">
+            <a:spAutoFit/>
+          </a:bodyPr>
+          <a:lstStyle/>
+          <a:p>
+            <a:pPr algn="l">
+              <a:lnSpc>
+                <a:spcPct val="110000"/>
+              </a:lnSpc>
+            </a:pPr>
+            <a:r>
+              <a:rPr sz="1350" b="1">
+                <a:solidFill>
+                  <a:srgbClr val="1D1D1F"/>
+                </a:solidFill>
+                <a:latin typeface="Arial"/>
+              </a:rPr>
+              <a:t>Matching mesh</a:t>
+            </a:r>
+          </a:p>
+          <a:p>
+            <a:pPr algn="l">
+              <a:lnSpc>
+                <a:spcPct val="130000"/>
+              </a:lnSpc>
+              <a:spcBef>
+                <a:spcPts val="600"/>
+              </a:spcBef>
+            </a:pPr>
+            <a:r>
+              <a:rPr sz="1050" b="0">
+                <a:solidFill>
+                  <a:srgbClr val="6E6E73"/>
+                </a:solidFill>
+                <a:latin typeface="Arial"/>
+              </a:rPr>
+              <a:t>Five interfaces verified after meshing, with a 0.8 mm target size and a 1e-6 mm tolerance.</a:t>
+            </a:r>
+          </a:p>
+        </p:txBody>
+      </p:sp>
+      <p:sp>
+        <p:nvSpPr>
+          <p:cNvPr id="14" name="Rounded Rectangle 13"/>
+          <p:cNvSpPr/>
+          <p:nvPr/>
+        </p:nvSpPr>
+        <p:spPr>
+          <a:xfrm>
+            <a:off x="8002828" y="3858768"/>
+            <a:ext cx="3411626" cy="1664208"/>
+          </a:xfrm>
+          <a:prstGeom prst="roundRect">
+            <a:avLst>
+              <a:gd name="adj" fmla="val 3500"/>
+            </a:avLst>
+          </a:prstGeom>
+          <a:solidFill>
+            <a:srgbClr val="F5F5F7"/>
+          </a:solidFill>
+          <a:ln>
+            <a:noFill/>
+          </a:ln>
+          <a:effectLst/>
+        </p:spPr>
+        <p:style>
+          <a:lnRef idx="1">
+            <a:schemeClr val="accent1"/>
+          </a:lnRef>
+          <a:fillRef idx="3">
+            <a:schemeClr val="accent1"/>
+          </a:fillRef>
+          <a:effectRef idx="2">
+            <a:schemeClr val="accent1"/>
+          </a:effectRef>
+          <a:fontRef idx="minor">
+            <a:schemeClr val="lt1"/>
+          </a:fontRef>
+        </p:style>
+        <p:txBody>
+          <a:bodyPr rtlCol="0" anchor="ctr"/>
+          <a:lstStyle/>
+          <a:p>
+            <a:pPr algn="ctr"/>
+          </a:p>
+        </p:txBody>
+      </p:sp>
+      <p:sp>
+        <p:nvSpPr>
+          <p:cNvPr id="15" name="TextBox 14"/>
+          <p:cNvSpPr txBox="1"/>
+          <p:nvPr/>
+        </p:nvSpPr>
+        <p:spPr>
+          <a:xfrm>
+            <a:off x="8222284" y="4041648"/>
+            <a:ext cx="2972714" cy="1371600"/>
+          </a:xfrm>
+          <a:prstGeom prst="rect">
+            <a:avLst/>
+          </a:prstGeom>
+          <a:noFill/>
+        </p:spPr>
+        <p:txBody>
+          <a:bodyPr wrap="square" anchor="t" lIns="0" rIns="0" tIns="0" bIns="0">
+            <a:spAutoFit/>
+          </a:bodyPr>
+          <a:lstStyle/>
+          <a:p>
+            <a:pPr algn="l">
+              <a:lnSpc>
+                <a:spcPct val="110000"/>
+              </a:lnSpc>
+            </a:pPr>
+            <a:r>
+              <a:rPr sz="1350" b="1">
+                <a:solidFill>
+                  <a:srgbClr val="1D1D1F"/>
+                </a:solidFill>
+                <a:latin typeface="Arial"/>
+              </a:rPr>
+              <a:t>MATCHED is earned</a:t>
+            </a:r>
+          </a:p>
+          <a:p>
+            <a:pPr algn="l">
+              <a:lnSpc>
+                <a:spcPct val="130000"/>
+              </a:lnSpc>
+              <a:spcBef>
+                <a:spcPts val="600"/>
+              </a:spcBef>
+            </a:pPr>
+            <a:r>
+              <a:rPr sz="1050" b="0">
+                <a:solidFill>
+                  <a:srgbClr val="6E6E73"/>
+                </a:solidFill>
+                <a:latin typeface="Arial"/>
+              </a:rPr>
+              <a:t>Only declared after comparing real node coordinates on every load-carrying interface. Equal seeding is not proof.</a:t>
+            </a:r>
+          </a:p>
+        </p:txBody>
+      </p:sp>
+      <p:sp>
+        <p:nvSpPr>
+          <p:cNvPr id="16" name="TextBox 15"/>
+          <p:cNvSpPr txBox="1"/>
+          <p:nvPr/>
+        </p:nvSpPr>
+        <p:spPr>
+          <a:xfrm>
+            <a:off x="10500055" y="6345936"/>
+            <a:ext cx="914400" cy="274320"/>
+          </a:xfrm>
+          <a:prstGeom prst="rect">
+            <a:avLst/>
+          </a:prstGeom>
+          <a:noFill/>
+        </p:spPr>
+        <p:txBody>
+          <a:bodyPr wrap="square" anchor="t" lIns="0" rIns="0" tIns="0" bIns="0">
+            <a:spAutoFit/>
+          </a:bodyPr>
+          <a:lstStyle/>
+          <a:p>
+            <a:pPr algn="l">
+              <a:lnSpc>
+                <a:spcPct val="100000"/>
+              </a:lnSpc>
+            </a:pPr>
+            <a:r>
+              <a:rPr sz="1000" b="0">
+                <a:solidFill>
+                  <a:srgbClr val="86868B"/>
+                </a:solidFill>
+                <a:latin typeface="Arial"/>
+              </a:rPr>
+              <a:t>33</a:t>
+            </a:r>
+          </a:p>
+        </p:txBody>
+      </p:sp>
+    </p:spTree>
+  </p:cSld>
+  <p:clrMapOvr>
+    <a:masterClrMapping/>
+  </p:clrMapOvr>
+</p:sld>
+</file>
+
+<file path=ppt/slides/slide34.xml><?xml version="1.0" encoding="utf-8"?>
+<p:sld xmlns:a="http://schemas.openxmlformats.org/drawingml/2006/main" xmlns:p="http://schemas.openxmlformats.org/presentationml/2006/main" xmlns:r="http://schemas.openxmlformats.org/officeDocument/2006/relationships">
+  <p:cSld>
+    <p:bg>
+      <p:bgPr>
+        <a:solidFill>
+          <a:srgbClr val="FFFFFF"/>
+        </a:solidFill>
+        <a:effectLst/>
+      </p:bgPr>
+    </p:bg>
+    <p:spTree>
+      <p:nvGrpSpPr>
+        <p:cNvPr id="1" name=""/>
+        <p:cNvGrpSpPr/>
+        <p:nvPr/>
+      </p:nvGrpSpPr>
+      <p:grpSpPr/>
+      <p:sp>
+        <p:nvSpPr>
+          <p:cNvPr id="2" name="TextBox 1"/>
+          <p:cNvSpPr txBox="1"/>
+          <p:nvPr/>
+        </p:nvSpPr>
+        <p:spPr>
+          <a:xfrm>
+            <a:off x="777240" y="566928"/>
+            <a:ext cx="10637215" cy="292608"/>
+          </a:xfrm>
+          <a:prstGeom prst="rect">
+            <a:avLst/>
+          </a:prstGeom>
+          <a:noFill/>
+        </p:spPr>
+        <p:txBody>
+          <a:bodyPr wrap="square" anchor="t" lIns="0" rIns="0" tIns="0" bIns="0">
+            <a:spAutoFit/>
+          </a:bodyPr>
+          <a:lstStyle/>
+          <a:p>
+            <a:pPr algn="l">
+              <a:lnSpc>
+                <a:spcPct val="100000"/>
+              </a:lnSpc>
+            </a:pPr>
+            <a:r>
+              <a:rPr sz="1150" b="1">
+                <a:solidFill>
+                  <a:srgbClr val="0071E3"/>
+                </a:solidFill>
+                <a:latin typeface="Arial"/>
+              </a:rPr>
+              <a:t>VERIFICATION</a:t>
+            </a:r>
+          </a:p>
+        </p:txBody>
+      </p:sp>
+      <p:sp>
+        <p:nvSpPr>
+          <p:cNvPr id="3" name="TextBox 2"/>
+          <p:cNvSpPr txBox="1"/>
+          <p:nvPr/>
+        </p:nvSpPr>
+        <p:spPr>
+          <a:xfrm>
+            <a:off x="777240" y="932688"/>
+            <a:ext cx="10637215" cy="914400"/>
+          </a:xfrm>
+          <a:prstGeom prst="rect">
+            <a:avLst/>
+          </a:prstGeom>
+          <a:noFill/>
+        </p:spPr>
+        <p:txBody>
+          <a:bodyPr wrap="square" anchor="t" lIns="0" rIns="0" tIns="0" bIns="0">
+            <a:spAutoFit/>
+          </a:bodyPr>
+          <a:lstStyle/>
+          <a:p>
+            <a:pPr algn="l">
+              <a:lnSpc>
+                <a:spcPct val="95000"/>
+              </a:lnSpc>
+            </a:pPr>
+            <a:r>
+              <a:rPr sz="3300" b="1">
+                <a:solidFill>
+                  <a:srgbClr val="1D1D1F"/>
+                </a:solidFill>
+                <a:latin typeface="Arial"/>
+              </a:rPr>
+              <a:t>What has been checked, and how</a:t>
+            </a:r>
+          </a:p>
+        </p:txBody>
+      </p:sp>
+      <p:sp>
+        <p:nvSpPr>
+          <p:cNvPr id="4" name="Rectangle 3"/>
+          <p:cNvSpPr/>
+          <p:nvPr/>
+        </p:nvSpPr>
+        <p:spPr>
+          <a:xfrm>
+            <a:off x="777240" y="2148840"/>
+            <a:ext cx="685800" cy="27940"/>
+          </a:xfrm>
+          <a:prstGeom prst="rect">
+            <a:avLst/>
+          </a:prstGeom>
+          <a:solidFill>
+            <a:srgbClr val="1B5E20"/>
+          </a:solidFill>
+          <a:ln>
+            <a:noFill/>
+          </a:ln>
+          <a:effectLst/>
+        </p:spPr>
+        <p:style>
+          <a:lnRef idx="1">
+            <a:schemeClr val="accent1"/>
+          </a:lnRef>
+          <a:fillRef idx="3">
+            <a:schemeClr val="accent1"/>
+          </a:fillRef>
+          <a:effectRef idx="2">
+            <a:schemeClr val="accent1"/>
+          </a:effectRef>
+          <a:fontRef idx="minor">
+            <a:schemeClr val="lt1"/>
+          </a:fontRef>
+        </p:style>
+        <p:txBody>
+          <a:bodyPr rtlCol="0" anchor="ctr"/>
+          <a:lstStyle/>
+          <a:p>
+            <a:pPr algn="ctr"/>
+          </a:p>
+        </p:txBody>
+      </p:sp>
+      <p:sp>
+        <p:nvSpPr>
+          <p:cNvPr id="5" name="TextBox 4"/>
+          <p:cNvSpPr txBox="1"/>
+          <p:nvPr/>
+        </p:nvSpPr>
+        <p:spPr>
+          <a:xfrm>
+            <a:off x="777240" y="2331720"/>
+            <a:ext cx="4937760" cy="1280160"/>
+          </a:xfrm>
+          <a:prstGeom prst="rect">
+            <a:avLst/>
+          </a:prstGeom>
+          <a:noFill/>
+        </p:spPr>
+        <p:txBody>
+          <a:bodyPr wrap="square" anchor="t" lIns="0" rIns="0" tIns="0" bIns="0">
+            <a:spAutoFit/>
+          </a:bodyPr>
+          <a:lstStyle/>
+          <a:p>
+            <a:pPr algn="l">
+              <a:lnSpc>
+                <a:spcPct val="110000"/>
+              </a:lnSpc>
+            </a:pPr>
+            <a:r>
+              <a:rPr sz="1500" b="1">
+                <a:solidFill>
+                  <a:srgbClr val="1D1D1F"/>
+                </a:solidFill>
+                <a:latin typeface="Arial"/>
+              </a:rPr>
+              <a:t>Packaged self-test</a:t>
+            </a:r>
+          </a:p>
+          <a:p>
+            <a:pPr algn="l">
+              <a:lnSpc>
+                <a:spcPct val="132000"/>
+              </a:lnSpc>
+              <a:spcBef>
+                <a:spcPts val="600"/>
+              </a:spcBef>
+            </a:pPr>
+            <a:r>
+              <a:rPr sz="1150" b="0">
+                <a:solidFill>
+                  <a:srgbClr val="6E6E73"/>
+                </a:solidFill>
+                <a:latin typeface="Arial"/>
+              </a:rPr>
+              <a:t>4.2 identity and schema 6, the 5→6 migration, DIN and FVA catalogues, golden calculations, six mesh templates, reports in all three languages. Exits with code 0.</a:t>
+            </a:r>
+          </a:p>
+        </p:txBody>
+      </p:sp>
+      <p:sp>
+        <p:nvSpPr>
+          <p:cNvPr id="6" name="Rectangle 5"/>
+          <p:cNvSpPr/>
+          <p:nvPr/>
+        </p:nvSpPr>
+        <p:spPr>
+          <a:xfrm>
+            <a:off x="777240" y="3447288"/>
+            <a:ext cx="685800" cy="27940"/>
+          </a:xfrm>
+          <a:prstGeom prst="rect">
+            <a:avLst/>
+          </a:prstGeom>
+          <a:solidFill>
+            <a:srgbClr val="1B5E20"/>
+          </a:solidFill>
+          <a:ln>
+            <a:noFill/>
+          </a:ln>
+          <a:effectLst/>
+        </p:spPr>
+        <p:style>
+          <a:lnRef idx="1">
+            <a:schemeClr val="accent1"/>
+          </a:lnRef>
+          <a:fillRef idx="3">
+            <a:schemeClr val="accent1"/>
+          </a:fillRef>
+          <a:effectRef idx="2">
+            <a:schemeClr val="accent1"/>
+          </a:effectRef>
+          <a:fontRef idx="minor">
+            <a:schemeClr val="lt1"/>
+          </a:fontRef>
+        </p:style>
+        <p:txBody>
+          <a:bodyPr rtlCol="0" anchor="ctr"/>
+          <a:lstStyle/>
+          <a:p>
+            <a:pPr algn="ctr"/>
+          </a:p>
+        </p:txBody>
+      </p:sp>
+      <p:sp>
+        <p:nvSpPr>
+          <p:cNvPr id="7" name="TextBox 6"/>
+          <p:cNvSpPr txBox="1"/>
+          <p:nvPr/>
+        </p:nvSpPr>
+        <p:spPr>
+          <a:xfrm>
+            <a:off x="777240" y="3630168"/>
+            <a:ext cx="4937760" cy="1280160"/>
+          </a:xfrm>
+          <a:prstGeom prst="rect">
+            <a:avLst/>
+          </a:prstGeom>
+          <a:noFill/>
+        </p:spPr>
+        <p:txBody>
+          <a:bodyPr wrap="square" anchor="t" lIns="0" rIns="0" tIns="0" bIns="0">
+            <a:spAutoFit/>
+          </a:bodyPr>
+          <a:lstStyle/>
+          <a:p>
+            <a:pPr algn="l">
+              <a:lnSpc>
+                <a:spcPct val="110000"/>
+              </a:lnSpc>
+            </a:pPr>
+            <a:r>
+              <a:rPr sz="1500" b="1">
+                <a:solidFill>
+                  <a:srgbClr val="1D1D1F"/>
+                </a:solidFill>
+                <a:latin typeface="Arial"/>
+              </a:rPr>
+              <a:t>Parity across the three catalogues</a:t>
+            </a:r>
+          </a:p>
+          <a:p>
+            <a:pPr algn="l">
+              <a:lnSpc>
+                <a:spcPct val="132000"/>
+              </a:lnSpc>
+              <a:spcBef>
+                <a:spcPts val="600"/>
+              </a:spcBef>
+            </a:pPr>
+            <a:r>
+              <a:rPr sz="1150" b="0">
+                <a:solidFill>
+                  <a:srgbClr val="6E6E73"/>
+                </a:solidFill>
+                <a:latin typeface="Arial"/>
+              </a:rPr>
+              <a:t>650 keys per language with no gaps; every validation code has its translated presentation.</a:t>
+            </a:r>
+          </a:p>
+        </p:txBody>
+      </p:sp>
+      <p:sp>
+        <p:nvSpPr>
+          <p:cNvPr id="8" name="Rectangle 7"/>
+          <p:cNvSpPr/>
+          <p:nvPr/>
+        </p:nvSpPr>
+        <p:spPr>
+          <a:xfrm>
+            <a:off x="777240" y="4745736"/>
+            <a:ext cx="685800" cy="27940"/>
+          </a:xfrm>
+          <a:prstGeom prst="rect">
+            <a:avLst/>
+          </a:prstGeom>
+          <a:solidFill>
+            <a:srgbClr val="1B5E20"/>
+          </a:solidFill>
+          <a:ln>
+            <a:noFill/>
+          </a:ln>
+          <a:effectLst/>
+        </p:spPr>
+        <p:style>
+          <a:lnRef idx="1">
+            <a:schemeClr val="accent1"/>
+          </a:lnRef>
+          <a:fillRef idx="3">
+            <a:schemeClr val="accent1"/>
+          </a:fillRef>
+          <a:effectRef idx="2">
+            <a:schemeClr val="accent1"/>
+          </a:effectRef>
+          <a:fontRef idx="minor">
+            <a:schemeClr val="lt1"/>
+          </a:fontRef>
+        </p:style>
+        <p:txBody>
+          <a:bodyPr rtlCol="0" anchor="ctr"/>
+          <a:lstStyle/>
+          <a:p>
+            <a:pPr algn="ctr"/>
+          </a:p>
+        </p:txBody>
+      </p:sp>
+      <p:sp>
+        <p:nvSpPr>
+          <p:cNvPr id="9" name="TextBox 8"/>
+          <p:cNvSpPr txBox="1"/>
+          <p:nvPr/>
+        </p:nvSpPr>
+        <p:spPr>
+          <a:xfrm>
+            <a:off x="777240" y="4928616"/>
+            <a:ext cx="4937760" cy="1280160"/>
+          </a:xfrm>
+          <a:prstGeom prst="rect">
+            <a:avLst/>
+          </a:prstGeom>
+          <a:noFill/>
+        </p:spPr>
+        <p:txBody>
+          <a:bodyPr wrap="square" anchor="t" lIns="0" rIns="0" tIns="0" bIns="0">
+            <a:spAutoFit/>
+          </a:bodyPr>
+          <a:lstStyle/>
+          <a:p>
+            <a:pPr algn="l">
+              <a:lnSpc>
+                <a:spcPct val="110000"/>
+              </a:lnSpc>
+            </a:pPr>
+            <a:r>
+              <a:rPr sz="1500" b="1">
+                <a:solidFill>
+                  <a:srgbClr val="1D1D1F"/>
+                </a:solidFill>
+                <a:latin typeface="Arial"/>
+              </a:rPr>
+              <a:t>All four presets</a:t>
+            </a:r>
+          </a:p>
+          <a:p>
+            <a:pPr algn="l">
+              <a:lnSpc>
+                <a:spcPct val="132000"/>
+              </a:lnSpc>
+              <a:spcBef>
+                <a:spcPts val="600"/>
+              </a:spcBef>
+            </a:pPr>
+            <a:r>
+              <a:rPr sz="1150" b="0">
+                <a:solidFill>
+                  <a:srgbClr val="6E6E73"/>
+                </a:solidFill>
+                <a:latin typeface="Arial"/>
+              </a:rPr>
+              <a:t>normalize and validate under schema 6 with zero errors, including the 10-cycle solving one.</a:t>
+            </a:r>
+          </a:p>
+        </p:txBody>
+      </p:sp>
+      <p:sp>
+        <p:nvSpPr>
+          <p:cNvPr id="10" name="Rectangle 9"/>
+          <p:cNvSpPr/>
+          <p:nvPr/>
+        </p:nvSpPr>
+        <p:spPr>
+          <a:xfrm>
+            <a:off x="6217920" y="2148840"/>
+            <a:ext cx="685800" cy="27940"/>
+          </a:xfrm>
+          <a:prstGeom prst="rect">
+            <a:avLst/>
+          </a:prstGeom>
+          <a:solidFill>
+            <a:srgbClr val="1B5E20"/>
+          </a:solidFill>
+          <a:ln>
+            <a:noFill/>
+          </a:ln>
+          <a:effectLst/>
+        </p:spPr>
+        <p:style>
+          <a:lnRef idx="1">
+            <a:schemeClr val="accent1"/>
+          </a:lnRef>
+          <a:fillRef idx="3">
+            <a:schemeClr val="accent1"/>
+          </a:fillRef>
+          <a:effectRef idx="2">
+            <a:schemeClr val="accent1"/>
+          </a:effectRef>
+          <a:fontRef idx="minor">
+            <a:schemeClr val="lt1"/>
+          </a:fontRef>
+        </p:style>
+        <p:txBody>
+          <a:bodyPr rtlCol="0" anchor="ctr"/>
+          <a:lstStyle/>
+          <a:p>
+            <a:pPr algn="ctr"/>
+          </a:p>
+        </p:txBody>
+      </p:sp>
+      <p:sp>
+        <p:nvSpPr>
+          <p:cNvPr id="11" name="TextBox 10"/>
+          <p:cNvSpPr txBox="1"/>
+          <p:nvPr/>
+        </p:nvSpPr>
+        <p:spPr>
+          <a:xfrm>
+            <a:off x="6217920" y="2331720"/>
+            <a:ext cx="4937760" cy="1280160"/>
+          </a:xfrm>
+          <a:prstGeom prst="rect">
+            <a:avLst/>
+          </a:prstGeom>
+          <a:noFill/>
+        </p:spPr>
+        <p:txBody>
+          <a:bodyPr wrap="square" anchor="t" lIns="0" rIns="0" tIns="0" bIns="0">
+            <a:spAutoFit/>
+          </a:bodyPr>
+          <a:lstStyle/>
+          <a:p>
+            <a:pPr algn="l">
+              <a:lnSpc>
+                <a:spcPct val="110000"/>
+              </a:lnSpc>
+            </a:pPr>
+            <a:r>
+              <a:rPr sz="1500" b="1">
+                <a:solidFill>
+                  <a:srgbClr val="1D1D1F"/>
+                </a:solidFill>
+                <a:latin typeface="Arial"/>
+              </a:rPr>
+              <a:t>Compatibility with the kernel</a:t>
+            </a:r>
+          </a:p>
+          <a:p>
+            <a:pPr algn="l">
+              <a:lnSpc>
+                <a:spcPct val="132000"/>
+              </a:lnSpc>
+              <a:spcBef>
+                <a:spcPts val="600"/>
+              </a:spcBef>
+            </a:pPr>
+            <a:r>
+              <a:rPr sz="1150" b="0">
+                <a:solidFill>
+                  <a:srgbClr val="6E6E73"/>
+                </a:solidFill>
+                <a:latin typeface="Arial"/>
+              </a:rPr>
+              <a:t>the six modules that run inside Abaqus were audited with AST: no f-strings, no annotations, only os, sys, json, math, time and hashlib. Division imported from __future__.</a:t>
+            </a:r>
+          </a:p>
+        </p:txBody>
+      </p:sp>
+      <p:sp>
+        <p:nvSpPr>
+          <p:cNvPr id="12" name="Rectangle 11"/>
+          <p:cNvSpPr/>
+          <p:nvPr/>
+        </p:nvSpPr>
+        <p:spPr>
+          <a:xfrm>
+            <a:off x="6217920" y="3447288"/>
+            <a:ext cx="685800" cy="27940"/>
+          </a:xfrm>
+          <a:prstGeom prst="rect">
+            <a:avLst/>
+          </a:prstGeom>
+          <a:solidFill>
+            <a:srgbClr val="1B5E20"/>
+          </a:solidFill>
+          <a:ln>
+            <a:noFill/>
+          </a:ln>
+          <a:effectLst/>
+        </p:spPr>
+        <p:style>
+          <a:lnRef idx="1">
+            <a:schemeClr val="accent1"/>
+          </a:lnRef>
+          <a:fillRef idx="3">
+            <a:schemeClr val="accent1"/>
+          </a:fillRef>
+          <a:effectRef idx="2">
+            <a:schemeClr val="accent1"/>
+          </a:effectRef>
+          <a:fontRef idx="minor">
+            <a:schemeClr val="lt1"/>
+          </a:fontRef>
+        </p:style>
+        <p:txBody>
+          <a:bodyPr rtlCol="0" anchor="ctr"/>
+          <a:lstStyle/>
+          <a:p>
+            <a:pPr algn="ctr"/>
+          </a:p>
+        </p:txBody>
+      </p:sp>
+      <p:sp>
+        <p:nvSpPr>
+          <p:cNvPr id="13" name="TextBox 12"/>
+          <p:cNvSpPr txBox="1"/>
+          <p:nvPr/>
+        </p:nvSpPr>
+        <p:spPr>
+          <a:xfrm>
+            <a:off x="6217920" y="3630168"/>
+            <a:ext cx="4937760" cy="1280160"/>
+          </a:xfrm>
+          <a:prstGeom prst="rect">
+            <a:avLst/>
+          </a:prstGeom>
+          <a:noFill/>
+        </p:spPr>
+        <p:txBody>
+          <a:bodyPr wrap="square" anchor="t" lIns="0" rIns="0" tIns="0" bIns="0">
+            <a:spAutoFit/>
+          </a:bodyPr>
+          <a:lstStyle/>
+          <a:p>
+            <a:pPr algn="l">
+              <a:lnSpc>
+                <a:spcPct val="110000"/>
+              </a:lnSpc>
+            </a:pPr>
+            <a:r>
+              <a:rPr sz="1500" b="1">
+                <a:solidFill>
+                  <a:srgbClr val="1D1D1F"/>
+                </a:solidFill>
+                <a:latin typeface="Arial"/>
+              </a:rPr>
+              <a:t>Artifact contract</a:t>
+            </a:r>
+          </a:p>
+          <a:p>
+            <a:pPr algn="l">
+              <a:lnSpc>
+                <a:spcPct val="132000"/>
+              </a:lnSpc>
+              <a:spcBef>
+                <a:spcPts val="600"/>
+              </a:spcBef>
+            </a:pPr>
+            <a:r>
+              <a:rPr sz="1150" b="0">
+                <a:solidFill>
+                  <a:srgbClr val="6E6E73"/>
+                </a:solidFill>
+                <a:latin typeface="Arial"/>
+              </a:rPr>
+              <a:t>a project is declared sound only if the audit, BUILD_RESULT, CAE, screenshots and report all exist, and the realised mesh matches the planned one.</a:t>
+            </a:r>
+          </a:p>
+        </p:txBody>
+      </p:sp>
+      <p:sp>
+        <p:nvSpPr>
+          <p:cNvPr id="14" name="Rectangle 13"/>
+          <p:cNvSpPr/>
+          <p:nvPr/>
+        </p:nvSpPr>
+        <p:spPr>
+          <a:xfrm>
+            <a:off x="6217920" y="4745736"/>
+            <a:ext cx="685800" cy="27940"/>
+          </a:xfrm>
+          <a:prstGeom prst="rect">
+            <a:avLst/>
+          </a:prstGeom>
+          <a:solidFill>
+            <a:srgbClr val="1B5E20"/>
+          </a:solidFill>
+          <a:ln>
+            <a:noFill/>
+          </a:ln>
+          <a:effectLst/>
+        </p:spPr>
+        <p:style>
+          <a:lnRef idx="1">
+            <a:schemeClr val="accent1"/>
+          </a:lnRef>
+          <a:fillRef idx="3">
+            <a:schemeClr val="accent1"/>
+          </a:fillRef>
+          <a:effectRef idx="2">
+            <a:schemeClr val="accent1"/>
+          </a:effectRef>
+          <a:fontRef idx="minor">
+            <a:schemeClr val="lt1"/>
+          </a:fontRef>
+        </p:style>
+        <p:txBody>
+          <a:bodyPr rtlCol="0" anchor="ctr"/>
+          <a:lstStyle/>
+          <a:p>
+            <a:pPr algn="ctr"/>
+          </a:p>
+        </p:txBody>
+      </p:sp>
+      <p:sp>
+        <p:nvSpPr>
+          <p:cNvPr id="15" name="TextBox 14"/>
+          <p:cNvSpPr txBox="1"/>
+          <p:nvPr/>
+        </p:nvSpPr>
+        <p:spPr>
+          <a:xfrm>
+            <a:off x="6217920" y="4928616"/>
+            <a:ext cx="4937760" cy="1280160"/>
+          </a:xfrm>
+          <a:prstGeom prst="rect">
+            <a:avLst/>
+          </a:prstGeom>
+          <a:noFill/>
+        </p:spPr>
+        <p:txBody>
+          <a:bodyPr wrap="square" anchor="t" lIns="0" rIns="0" tIns="0" bIns="0">
+            <a:spAutoFit/>
+          </a:bodyPr>
+          <a:lstStyle/>
+          <a:p>
+            <a:pPr algn="l">
+              <a:lnSpc>
+                <a:spcPct val="110000"/>
+              </a:lnSpc>
+            </a:pPr>
+            <a:r>
+              <a:rPr sz="1500" b="1">
+                <a:solidFill>
+                  <a:srgbClr val="1D1D1F"/>
+                </a:solidFill>
+                <a:latin typeface="Arial"/>
+              </a:rPr>
+              <a:t>Figures locked in the test</a:t>
+            </a:r>
+          </a:p>
+          <a:p>
+            <a:pPr algn="l">
+              <a:lnSpc>
+                <a:spcPct val="132000"/>
+              </a:lnSpc>
+              <a:spcBef>
+                <a:spcPts val="600"/>
+              </a:spcBef>
+            </a:pPr>
+            <a:r>
+              <a:rPr sz="1150" b="0">
+                <a:solidFill>
+                  <a:srgbClr val="6E6E73"/>
+                </a:solidFill>
+                <a:latin typeface="Arial"/>
+              </a:rPr>
+              <a:t>999.18 N·m hub-governed, t2tr = 3.141 mm, f_W from equation 3 and the K_λ domain.</a:t>
+            </a:r>
+          </a:p>
+        </p:txBody>
+      </p:sp>
+      <p:sp>
+        <p:nvSpPr>
+          <p:cNvPr id="16" name="TextBox 15"/>
+          <p:cNvSpPr txBox="1"/>
+          <p:nvPr/>
+        </p:nvSpPr>
+        <p:spPr>
+          <a:xfrm>
+            <a:off x="777240" y="6144768"/>
+            <a:ext cx="10058400" cy="640080"/>
+          </a:xfrm>
+          <a:prstGeom prst="rect">
+            <a:avLst/>
+          </a:prstGeom>
+          <a:noFill/>
+        </p:spPr>
+        <p:txBody>
+          <a:bodyPr wrap="square" anchor="t" lIns="0" rIns="0" tIns="0" bIns="0">
+            <a:spAutoFit/>
+          </a:bodyPr>
+          <a:lstStyle/>
+          <a:p>
+            <a:pPr algn="l">
+              <a:lnSpc>
+                <a:spcPct val="125000"/>
+              </a:lnSpc>
+            </a:pPr>
+            <a:r>
+              <a:rPr sz="1150" b="0">
+                <a:solidFill>
+                  <a:srgbClr val="86868B"/>
+                </a:solidFill>
+                <a:latin typeface="Arial"/>
+              </a:rPr>
+              <a:t>What the self-test does not do, and says so: it does not start Abaqus, does not solve, does not compile LaTeX and does not validate an FVA specimen.</a:t>
+            </a:r>
+          </a:p>
+        </p:txBody>
+      </p:sp>
+      <p:sp>
+        <p:nvSpPr>
+          <p:cNvPr id="17" name="TextBox 16"/>
+          <p:cNvSpPr txBox="1"/>
+          <p:nvPr/>
+        </p:nvSpPr>
+        <p:spPr>
+          <a:xfrm>
+            <a:off x="10500055" y="6345936"/>
+            <a:ext cx="914400" cy="274320"/>
+          </a:xfrm>
+          <a:prstGeom prst="rect">
+            <a:avLst/>
+          </a:prstGeom>
+          <a:noFill/>
+        </p:spPr>
+        <p:txBody>
+          <a:bodyPr wrap="square" anchor="t" lIns="0" rIns="0" tIns="0" bIns="0">
+            <a:spAutoFit/>
+          </a:bodyPr>
+          <a:lstStyle/>
+          <a:p>
+            <a:pPr algn="l">
+              <a:lnSpc>
+                <a:spcPct val="100000"/>
+              </a:lnSpc>
+            </a:pPr>
+            <a:r>
+              <a:rPr sz="1000" b="0">
+                <a:solidFill>
+                  <a:srgbClr val="86868B"/>
+                </a:solidFill>
+                <a:latin typeface="Arial"/>
+              </a:rPr>
+              <a:t>34</a:t>
+            </a:r>
+          </a:p>
+        </p:txBody>
+      </p:sp>
+    </p:spTree>
+  </p:cSld>
+  <p:clrMapOvr>
+    <a:masterClrMapping/>
+  </p:clrMapOvr>
+</p:sld>
+</file>
+
+<file path=ppt/slides/slide35.xml><?xml version="1.0" encoding="utf-8"?>
+<p:sld xmlns:a="http://schemas.openxmlformats.org/drawingml/2006/main" xmlns:p="http://schemas.openxmlformats.org/presentationml/2006/main" xmlns:r="http://schemas.openxmlformats.org/officeDocument/2006/relationships">
+  <p:cSld>
+    <p:bg>
+      <p:bgPr>
+        <a:solidFill>
+          <a:srgbClr val="FFFFFF"/>
+        </a:solidFill>
+        <a:effectLst/>
+      </p:bgPr>
+    </p:bg>
+    <p:spTree>
+      <p:nvGrpSpPr>
+        <p:cNvPr id="1" name=""/>
+        <p:cNvGrpSpPr/>
+        <p:nvPr/>
+      </p:nvGrpSpPr>
+      <p:grpSpPr/>
+      <p:sp>
+        <p:nvSpPr>
+          <p:cNvPr id="2" name="TextBox 1"/>
+          <p:cNvSpPr txBox="1"/>
+          <p:nvPr/>
+        </p:nvSpPr>
+        <p:spPr>
+          <a:xfrm>
+            <a:off x="777240" y="566928"/>
+            <a:ext cx="10637215" cy="292608"/>
+          </a:xfrm>
+          <a:prstGeom prst="rect">
+            <a:avLst/>
+          </a:prstGeom>
+          <a:noFill/>
+        </p:spPr>
+        <p:txBody>
+          <a:bodyPr wrap="square" anchor="t" lIns="0" rIns="0" tIns="0" bIns="0">
+            <a:spAutoFit/>
+          </a:bodyPr>
+          <a:lstStyle/>
+          <a:p>
+            <a:pPr algn="l">
+              <a:lnSpc>
+                <a:spcPct val="100000"/>
+              </a:lnSpc>
+            </a:pPr>
+            <a:r>
+              <a:rPr sz="1150" b="1">
+                <a:solidFill>
+                  <a:srgbClr val="0071E3"/>
+                </a:solidFill>
+                <a:latin typeface="Arial"/>
+              </a:rPr>
+              <a:t>ROBUSTNESS</a:t>
+            </a:r>
+          </a:p>
+        </p:txBody>
+      </p:sp>
+      <p:sp>
+        <p:nvSpPr>
+          <p:cNvPr id="3" name="TextBox 2"/>
+          <p:cNvSpPr txBox="1"/>
+          <p:nvPr/>
+        </p:nvSpPr>
+        <p:spPr>
+          <a:xfrm>
+            <a:off x="777240" y="932688"/>
+            <a:ext cx="10637215" cy="914400"/>
+          </a:xfrm>
+          <a:prstGeom prst="rect">
+            <a:avLst/>
+          </a:prstGeom>
+          <a:noFill/>
+        </p:spPr>
+        <p:txBody>
+          <a:bodyPr wrap="square" anchor="t" lIns="0" rIns="0" tIns="0" bIns="0">
+            <a:spAutoFit/>
+          </a:bodyPr>
+          <a:lstStyle/>
+          <a:p>
+            <a:pPr algn="l">
+              <a:lnSpc>
+                <a:spcPct val="95000"/>
+              </a:lnSpc>
+            </a:pPr>
+            <a:r>
+              <a:rPr sz="3000" b="1">
+                <a:solidFill>
+                  <a:srgbClr val="1D1D1F"/>
+                </a:solidFill>
+                <a:latin typeface="Arial"/>
+              </a:rPr>
+              <a:t>Decisions that rule out whole classes of error</a:t>
+            </a:r>
+          </a:p>
+        </p:txBody>
+      </p:sp>
+      <p:sp>
+        <p:nvSpPr>
+          <p:cNvPr id="4" name="Rounded Rectangle 3"/>
+          <p:cNvSpPr/>
+          <p:nvPr/>
+        </p:nvSpPr>
+        <p:spPr>
+          <a:xfrm>
+            <a:off x="777240" y="2011680"/>
+            <a:ext cx="3411626" cy="1664208"/>
+          </a:xfrm>
+          <a:prstGeom prst="roundRect">
+            <a:avLst>
+              <a:gd name="adj" fmla="val 3500"/>
+            </a:avLst>
+          </a:prstGeom>
+          <a:solidFill>
+            <a:srgbClr val="F5F5F7"/>
+          </a:solidFill>
+          <a:ln>
+            <a:noFill/>
+          </a:ln>
+          <a:effectLst/>
+        </p:spPr>
+        <p:style>
+          <a:lnRef idx="1">
+            <a:schemeClr val="accent1"/>
+          </a:lnRef>
+          <a:fillRef idx="3">
+            <a:schemeClr val="accent1"/>
+          </a:fillRef>
+          <a:effectRef idx="2">
+            <a:schemeClr val="accent1"/>
+          </a:effectRef>
+          <a:fontRef idx="minor">
+            <a:schemeClr val="lt1"/>
+          </a:fontRef>
+        </p:style>
+        <p:txBody>
+          <a:bodyPr rtlCol="0" anchor="ctr"/>
+          <a:lstStyle/>
+          <a:p>
+            <a:pPr algn="ctr"/>
+          </a:p>
+        </p:txBody>
+      </p:sp>
+      <p:sp>
+        <p:nvSpPr>
+          <p:cNvPr id="5" name="TextBox 4"/>
+          <p:cNvSpPr txBox="1"/>
+          <p:nvPr/>
+        </p:nvSpPr>
+        <p:spPr>
+          <a:xfrm>
+            <a:off x="996696" y="2194560"/>
+            <a:ext cx="2972714" cy="1371600"/>
+          </a:xfrm>
+          <a:prstGeom prst="rect">
+            <a:avLst/>
+          </a:prstGeom>
+          <a:noFill/>
+        </p:spPr>
+        <p:txBody>
+          <a:bodyPr wrap="square" anchor="t" lIns="0" rIns="0" tIns="0" bIns="0">
+            <a:spAutoFit/>
+          </a:bodyPr>
+          <a:lstStyle/>
+          <a:p>
+            <a:pPr algn="l">
+              <a:lnSpc>
+                <a:spcPct val="110000"/>
+              </a:lnSpc>
+            </a:pPr>
+            <a:r>
+              <a:rPr sz="1350" b="1">
+                <a:solidFill>
+                  <a:srgbClr val="1D1D1F"/>
+                </a:solidFill>
+                <a:latin typeface="Arial"/>
+              </a:rPr>
+              <a:t>No shell</a:t>
+            </a:r>
+          </a:p>
+          <a:p>
+            <a:pPr algn="l">
+              <a:lnSpc>
+                <a:spcPct val="130000"/>
+              </a:lnSpc>
+              <a:spcBef>
+                <a:spcPts val="600"/>
+              </a:spcBef>
+            </a:pPr>
+            <a:r>
+              <a:rPr sz="1050" b="0">
+                <a:solidFill>
+                  <a:srgbClr val="6E6E73"/>
+                </a:solidFill>
+                <a:latin typeface="Arial"/>
+              </a:rPr>
+              <a:t>The launcher is built as an argument list; shell=True is never used and control characters are rejected.</a:t>
+            </a:r>
+          </a:p>
+        </p:txBody>
+      </p:sp>
+      <p:sp>
+        <p:nvSpPr>
+          <p:cNvPr id="6" name="Rounded Rectangle 5"/>
+          <p:cNvSpPr/>
+          <p:nvPr/>
+        </p:nvSpPr>
+        <p:spPr>
+          <a:xfrm>
+            <a:off x="4390034" y="2011680"/>
+            <a:ext cx="3411626" cy="1664208"/>
+          </a:xfrm>
+          <a:prstGeom prst="roundRect">
+            <a:avLst>
+              <a:gd name="adj" fmla="val 3500"/>
+            </a:avLst>
+          </a:prstGeom>
+          <a:solidFill>
+            <a:srgbClr val="F5F5F7"/>
+          </a:solidFill>
+          <a:ln>
+            <a:noFill/>
+          </a:ln>
+          <a:effectLst/>
+        </p:spPr>
+        <p:style>
+          <a:lnRef idx="1">
+            <a:schemeClr val="accent1"/>
+          </a:lnRef>
+          <a:fillRef idx="3">
+            <a:schemeClr val="accent1"/>
+          </a:fillRef>
+          <a:effectRef idx="2">
+            <a:schemeClr val="accent1"/>
+          </a:effectRef>
+          <a:fontRef idx="minor">
+            <a:schemeClr val="lt1"/>
+          </a:fontRef>
+        </p:style>
+        <p:txBody>
+          <a:bodyPr rtlCol="0" anchor="ctr"/>
+          <a:lstStyle/>
+          <a:p>
+            <a:pPr algn="ctr"/>
+          </a:p>
+        </p:txBody>
+      </p:sp>
+      <p:sp>
+        <p:nvSpPr>
+          <p:cNvPr id="7" name="TextBox 6"/>
+          <p:cNvSpPr txBox="1"/>
+          <p:nvPr/>
+        </p:nvSpPr>
+        <p:spPr>
+          <a:xfrm>
+            <a:off x="4609490" y="2194560"/>
+            <a:ext cx="2972714" cy="1371600"/>
+          </a:xfrm>
+          <a:prstGeom prst="rect">
+            <a:avLst/>
+          </a:prstGeom>
+          <a:noFill/>
+        </p:spPr>
+        <p:txBody>
+          <a:bodyPr wrap="square" anchor="t" lIns="0" rIns="0" tIns="0" bIns="0">
+            <a:spAutoFit/>
+          </a:bodyPr>
+          <a:lstStyle/>
+          <a:p>
+            <a:pPr algn="l">
+              <a:lnSpc>
+                <a:spcPct val="110000"/>
+              </a:lnSpc>
+            </a:pPr>
+            <a:r>
+              <a:rPr sz="1350" b="1">
+                <a:solidFill>
+                  <a:srgbClr val="1D1D1F"/>
+                </a:solidFill>
+                <a:latin typeface="Arial"/>
+              </a:rPr>
+              <a:t>Contained</a:t>
+            </a:r>
+          </a:p>
+          <a:p>
+            <a:pPr algn="l">
+              <a:lnSpc>
+                <a:spcPct val="130000"/>
+              </a:lnSpc>
+              <a:spcBef>
+                <a:spcPts val="600"/>
+              </a:spcBef>
+            </a:pPr>
+            <a:r>
+              <a:rPr sz="1050" b="0">
+                <a:solidFill>
+                  <a:srgbClr val="6E6E73"/>
+                </a:solidFill>
+                <a:latin typeface="Arial"/>
+              </a:rPr>
+              <a:t>The subprocess runs with cwd = jobs/ and artifact routes must be absolute: there is no fallback to the current directory.</a:t>
+            </a:r>
+          </a:p>
+        </p:txBody>
+      </p:sp>
+      <p:sp>
+        <p:nvSpPr>
+          <p:cNvPr id="8" name="Rounded Rectangle 7"/>
+          <p:cNvSpPr/>
+          <p:nvPr/>
+        </p:nvSpPr>
+        <p:spPr>
+          <a:xfrm>
+            <a:off x="8002828" y="2011680"/>
+            <a:ext cx="3411626" cy="1664208"/>
+          </a:xfrm>
+          <a:prstGeom prst="roundRect">
+            <a:avLst>
+              <a:gd name="adj" fmla="val 3500"/>
+            </a:avLst>
+          </a:prstGeom>
+          <a:solidFill>
+            <a:srgbClr val="F5F5F7"/>
+          </a:solidFill>
+          <a:ln>
+            <a:noFill/>
+          </a:ln>
+          <a:effectLst/>
+        </p:spPr>
+        <p:style>
+          <a:lnRef idx="1">
+            <a:schemeClr val="accent1"/>
+          </a:lnRef>
+          <a:fillRef idx="3">
+            <a:schemeClr val="accent1"/>
+          </a:fillRef>
+          <a:effectRef idx="2">
+            <a:schemeClr val="accent1"/>
+          </a:effectRef>
+          <a:fontRef idx="minor">
+            <a:schemeClr val="lt1"/>
+          </a:fontRef>
+        </p:style>
+        <p:txBody>
+          <a:bodyPr rtlCol="0" anchor="ctr"/>
+          <a:lstStyle/>
+          <a:p>
+            <a:pPr algn="ctr"/>
+          </a:p>
+        </p:txBody>
+      </p:sp>
+      <p:sp>
+        <p:nvSpPr>
+          <p:cNvPr id="9" name="TextBox 8"/>
+          <p:cNvSpPr txBox="1"/>
+          <p:nvPr/>
+        </p:nvSpPr>
+        <p:spPr>
+          <a:xfrm>
+            <a:off x="8222284" y="2194560"/>
+            <a:ext cx="2972714" cy="1371600"/>
+          </a:xfrm>
+          <a:prstGeom prst="rect">
+            <a:avLst/>
+          </a:prstGeom>
+          <a:noFill/>
+        </p:spPr>
+        <p:txBody>
+          <a:bodyPr wrap="square" anchor="t" lIns="0" rIns="0" tIns="0" bIns="0">
+            <a:spAutoFit/>
+          </a:bodyPr>
+          <a:lstStyle/>
+          <a:p>
+            <a:pPr algn="l">
+              <a:lnSpc>
+                <a:spcPct val="110000"/>
+              </a:lnSpc>
+            </a:pPr>
+            <a:r>
+              <a:rPr sz="1350" b="1">
+                <a:solidFill>
+                  <a:srgbClr val="1D1D1F"/>
+                </a:solidFill>
+                <a:latin typeface="Arial"/>
+              </a:rPr>
+              <a:t>Three NOJOB guards</a:t>
+            </a:r>
+          </a:p>
+          <a:p>
+            <a:pPr algn="l">
+              <a:lnSpc>
+                <a:spcPct val="130000"/>
+              </a:lnSpc>
+              <a:spcBef>
+                <a:spcPts val="600"/>
+              </a:spcBef>
+            </a:pPr>
+            <a:r>
+              <a:rPr sz="1050" b="0">
+                <a:solidFill>
+                  <a:srgbClr val="6E6E73"/>
+                </a:solidFill>
+                <a:latin typeface="Arial"/>
+              </a:rPr>
+              <a:t>No job objects, no solver files, plus an explicit configuration check.</a:t>
+            </a:r>
+          </a:p>
+        </p:txBody>
+      </p:sp>
+      <p:sp>
+        <p:nvSpPr>
+          <p:cNvPr id="10" name="Rounded Rectangle 9"/>
+          <p:cNvSpPr/>
+          <p:nvPr/>
+        </p:nvSpPr>
+        <p:spPr>
+          <a:xfrm>
+            <a:off x="777240" y="3858768"/>
+            <a:ext cx="3411626" cy="1664208"/>
+          </a:xfrm>
+          <a:prstGeom prst="roundRect">
+            <a:avLst>
+              <a:gd name="adj" fmla="val 3500"/>
+            </a:avLst>
+          </a:prstGeom>
+          <a:solidFill>
+            <a:srgbClr val="F5F5F7"/>
+          </a:solidFill>
+          <a:ln>
+            <a:noFill/>
+          </a:ln>
+          <a:effectLst/>
+        </p:spPr>
+        <p:style>
+          <a:lnRef idx="1">
+            <a:schemeClr val="accent1"/>
+          </a:lnRef>
+          <a:fillRef idx="3">
+            <a:schemeClr val="accent1"/>
+          </a:fillRef>
+          <a:effectRef idx="2">
+            <a:schemeClr val="accent1"/>
+          </a:effectRef>
+          <a:fontRef idx="minor">
+            <a:schemeClr val="lt1"/>
+          </a:fontRef>
+        </p:style>
+        <p:txBody>
+          <a:bodyPr rtlCol="0" anchor="ctr"/>
+          <a:lstStyle/>
+          <a:p>
+            <a:pPr algn="ctr"/>
+          </a:p>
+        </p:txBody>
+      </p:sp>
+      <p:sp>
+        <p:nvSpPr>
+          <p:cNvPr id="11" name="TextBox 10"/>
+          <p:cNvSpPr txBox="1"/>
+          <p:nvPr/>
+        </p:nvSpPr>
+        <p:spPr>
+          <a:xfrm>
+            <a:off x="996696" y="4041648"/>
+            <a:ext cx="2972714" cy="1371600"/>
+          </a:xfrm>
+          <a:prstGeom prst="rect">
+            <a:avLst/>
+          </a:prstGeom>
+          <a:noFill/>
+        </p:spPr>
+        <p:txBody>
+          <a:bodyPr wrap="square" anchor="t" lIns="0" rIns="0" tIns="0" bIns="0">
+            <a:spAutoFit/>
+          </a:bodyPr>
+          <a:lstStyle/>
+          <a:p>
+            <a:pPr algn="l">
+              <a:lnSpc>
+                <a:spcPct val="110000"/>
+              </a:lnSpc>
+            </a:pPr>
+            <a:r>
+              <a:rPr sz="1350" b="1">
+                <a:solidFill>
+                  <a:srgbClr val="1D1D1F"/>
+                </a:solidFill>
+                <a:latin typeface="Arial"/>
+              </a:rPr>
+              <a:t>Cancel means cancel</a:t>
+            </a:r>
+          </a:p>
+          <a:p>
+            <a:pPr algn="l">
+              <a:lnSpc>
+                <a:spcPct val="130000"/>
+              </a:lnSpc>
+              <a:spcBef>
+                <a:spcPts val="600"/>
+              </a:spcBef>
+            </a:pPr>
+            <a:r>
+              <a:rPr sz="1050" b="0">
+                <a:solidFill>
+                  <a:srgbClr val="6E6E73"/>
+                </a:solidFill>
+                <a:latin typeface="Arial"/>
+              </a:rPr>
+              <a:t>The whole solver process tree is killed and the project is marked CANCELLED, not finished.</a:t>
+            </a:r>
+          </a:p>
+        </p:txBody>
+      </p:sp>
+      <p:sp>
+        <p:nvSpPr>
+          <p:cNvPr id="12" name="Rounded Rectangle 11"/>
+          <p:cNvSpPr/>
+          <p:nvPr/>
+        </p:nvSpPr>
+        <p:spPr>
+          <a:xfrm>
+            <a:off x="4390034" y="3858768"/>
+            <a:ext cx="3411626" cy="1664208"/>
+          </a:xfrm>
+          <a:prstGeom prst="roundRect">
+            <a:avLst>
+              <a:gd name="adj" fmla="val 3500"/>
+            </a:avLst>
+          </a:prstGeom>
+          <a:solidFill>
+            <a:srgbClr val="F5F5F7"/>
+          </a:solidFill>
+          <a:ln>
+            <a:noFill/>
+          </a:ln>
+          <a:effectLst/>
+        </p:spPr>
+        <p:style>
+          <a:lnRef idx="1">
+            <a:schemeClr val="accent1"/>
+          </a:lnRef>
+          <a:fillRef idx="3">
+            <a:schemeClr val="accent1"/>
+          </a:fillRef>
+          <a:effectRef idx="2">
+            <a:schemeClr val="accent1"/>
+          </a:effectRef>
+          <a:fontRef idx="minor">
+            <a:schemeClr val="lt1"/>
+          </a:fontRef>
+        </p:style>
+        <p:txBody>
+          <a:bodyPr rtlCol="0" anchor="ctr"/>
+          <a:lstStyle/>
+          <a:p>
+            <a:pPr algn="ctr"/>
+          </a:p>
+        </p:txBody>
+      </p:sp>
+      <p:sp>
+        <p:nvSpPr>
+          <p:cNvPr id="13" name="TextBox 12"/>
+          <p:cNvSpPr txBox="1"/>
+          <p:nvPr/>
+        </p:nvSpPr>
+        <p:spPr>
+          <a:xfrm>
+            <a:off x="4609490" y="4041648"/>
+            <a:ext cx="2972714" cy="1371600"/>
+          </a:xfrm>
+          <a:prstGeom prst="rect">
+            <a:avLst/>
+          </a:prstGeom>
+          <a:noFill/>
+        </p:spPr>
+        <p:txBody>
+          <a:bodyPr wrap="square" anchor="t" lIns="0" rIns="0" tIns="0" bIns="0">
+            <a:spAutoFit/>
+          </a:bodyPr>
+          <a:lstStyle/>
+          <a:p>
+            <a:pPr algn="l">
+              <a:lnSpc>
+                <a:spcPct val="110000"/>
+              </a:lnSpc>
+            </a:pPr>
+            <a:r>
+              <a:rPr sz="1350" b="1">
+                <a:solidFill>
+                  <a:srgbClr val="1D1D1F"/>
+                </a:solidFill>
+                <a:latin typeface="Arial"/>
+              </a:rPr>
+              <a:t>Atomic writes</a:t>
+            </a:r>
+          </a:p>
+          <a:p>
+            <a:pPr algn="l">
+              <a:lnSpc>
+                <a:spcPct val="130000"/>
+              </a:lnSpc>
+              <a:spcBef>
+                <a:spcPts val="600"/>
+              </a:spcBef>
+            </a:pPr>
+            <a:r>
+              <a:rPr sz="1050" b="0">
+                <a:solidFill>
+                  <a:srgbClr val="6E6E73"/>
+                </a:solidFill>
+                <a:latin typeface="Arial"/>
+              </a:rPr>
+              <a:t>Every JSON is written to .tmp and renamed, so a crash cannot leave half a manifest.</a:t>
+            </a:r>
+          </a:p>
+        </p:txBody>
+      </p:sp>
+      <p:sp>
+        <p:nvSpPr>
+          <p:cNvPr id="14" name="Rounded Rectangle 13"/>
+          <p:cNvSpPr/>
+          <p:nvPr/>
+        </p:nvSpPr>
+        <p:spPr>
+          <a:xfrm>
+            <a:off x="8002828" y="3858768"/>
+            <a:ext cx="3411626" cy="1664208"/>
+          </a:xfrm>
+          <a:prstGeom prst="roundRect">
+            <a:avLst>
+              <a:gd name="adj" fmla="val 3500"/>
+            </a:avLst>
+          </a:prstGeom>
+          <a:solidFill>
+            <a:srgbClr val="F5F5F7"/>
+          </a:solidFill>
+          <a:ln>
+            <a:noFill/>
+          </a:ln>
+          <a:effectLst/>
+        </p:spPr>
+        <p:style>
+          <a:lnRef idx="1">
+            <a:schemeClr val="accent1"/>
+          </a:lnRef>
+          <a:fillRef idx="3">
+            <a:schemeClr val="accent1"/>
+          </a:fillRef>
+          <a:effectRef idx="2">
+            <a:schemeClr val="accent1"/>
+          </a:effectRef>
+          <a:fontRef idx="minor">
+            <a:schemeClr val="lt1"/>
+          </a:fontRef>
+        </p:style>
+        <p:txBody>
+          <a:bodyPr rtlCol="0" anchor="ctr"/>
+          <a:lstStyle/>
+          <a:p>
+            <a:pPr algn="ctr"/>
+          </a:p>
+        </p:txBody>
+      </p:sp>
+      <p:sp>
+        <p:nvSpPr>
+          <p:cNvPr id="15" name="TextBox 14"/>
+          <p:cNvSpPr txBox="1"/>
+          <p:nvPr/>
+        </p:nvSpPr>
+        <p:spPr>
+          <a:xfrm>
+            <a:off x="8222284" y="4041648"/>
+            <a:ext cx="2972714" cy="1371600"/>
+          </a:xfrm>
+          <a:prstGeom prst="rect">
+            <a:avLst/>
+          </a:prstGeom>
+          <a:noFill/>
+        </p:spPr>
+        <p:txBody>
+          <a:bodyPr wrap="square" anchor="t" lIns="0" rIns="0" tIns="0" bIns="0">
+            <a:spAutoFit/>
+          </a:bodyPr>
+          <a:lstStyle/>
+          <a:p>
+            <a:pPr algn="l">
+              <a:lnSpc>
+                <a:spcPct val="110000"/>
+              </a:lnSpc>
+            </a:pPr>
+            <a:r>
+              <a:rPr sz="1350" b="1">
+                <a:solidFill>
+                  <a:srgbClr val="1D1D1F"/>
+                </a:solidFill>
+                <a:latin typeface="Arial"/>
+              </a:rPr>
+              <a:t>Nothing licensed ships</a:t>
+            </a:r>
+          </a:p>
+          <a:p>
+            <a:pPr algn="l">
+              <a:lnSpc>
+                <a:spcPct val="130000"/>
+              </a:lnSpc>
+              <a:spcBef>
+                <a:spcPts val="600"/>
+              </a:spcBef>
+            </a:pPr>
+            <a:r>
+              <a:rPr sz="1050" b="0">
+                <a:solidFill>
+                  <a:srgbClr val="6E6E73"/>
+                </a:solidFill>
+                <a:latin typeface="Arial"/>
+              </a:rPr>
+              <a:t>DIN and FVA documents stay out of the package by whitelist, not by accident.</a:t>
+            </a:r>
+          </a:p>
+        </p:txBody>
+      </p:sp>
+      <p:sp>
+        <p:nvSpPr>
+          <p:cNvPr id="16" name="TextBox 15"/>
+          <p:cNvSpPr txBox="1"/>
+          <p:nvPr/>
+        </p:nvSpPr>
+        <p:spPr>
+          <a:xfrm>
+            <a:off x="10500055" y="6345936"/>
+            <a:ext cx="914400" cy="274320"/>
+          </a:xfrm>
+          <a:prstGeom prst="rect">
+            <a:avLst/>
+          </a:prstGeom>
+          <a:noFill/>
+        </p:spPr>
+        <p:txBody>
+          <a:bodyPr wrap="square" anchor="t" lIns="0" rIns="0" tIns="0" bIns="0">
+            <a:spAutoFit/>
+          </a:bodyPr>
+          <a:lstStyle/>
+          <a:p>
+            <a:pPr algn="l">
+              <a:lnSpc>
+                <a:spcPct val="100000"/>
+              </a:lnSpc>
+            </a:pPr>
+            <a:r>
+              <a:rPr sz="1000" b="0">
+                <a:solidFill>
+                  <a:srgbClr val="86868B"/>
+                </a:solidFill>
+                <a:latin typeface="Arial"/>
+              </a:rPr>
+              <a:t>35</a:t>
+            </a:r>
+          </a:p>
+        </p:txBody>
+      </p:sp>
+    </p:spTree>
+  </p:cSld>
+  <p:clrMapOvr>
+    <a:masterClrMapping/>
+  </p:clrMapOvr>
+</p:sld>
+</file>
+
+<file path=ppt/slides/slide36.xml><?xml version="1.0" encoding="utf-8"?>
+<p:sld xmlns:a="http://schemas.openxmlformats.org/drawingml/2006/main" xmlns:p="http://schemas.openxmlformats.org/presentationml/2006/main" xmlns:r="http://schemas.openxmlformats.org/officeDocument/2006/relationships">
+  <p:cSld>
+    <p:bg>
+      <p:bgPr>
+        <a:solidFill>
+          <a:srgbClr val="FFFFFF"/>
+        </a:solidFill>
+        <a:effectLst/>
+      </p:bgPr>
+    </p:bg>
+    <p:spTree>
+      <p:nvGrpSpPr>
+        <p:cNvPr id="1" name=""/>
+        <p:cNvGrpSpPr/>
+        <p:nvPr/>
+      </p:nvGrpSpPr>
+      <p:grpSpPr/>
+      <p:sp>
+        <p:nvSpPr>
+          <p:cNvPr id="2" name="TextBox 1"/>
+          <p:cNvSpPr txBox="1"/>
+          <p:nvPr/>
+        </p:nvSpPr>
+        <p:spPr>
+          <a:xfrm>
+            <a:off x="777240" y="566928"/>
+            <a:ext cx="10637215" cy="292608"/>
+          </a:xfrm>
+          <a:prstGeom prst="rect">
+            <a:avLst/>
+          </a:prstGeom>
+          <a:noFill/>
+        </p:spPr>
+        <p:txBody>
+          <a:bodyPr wrap="square" anchor="t" lIns="0" rIns="0" tIns="0" bIns="0">
+            <a:spAutoFit/>
+          </a:bodyPr>
+          <a:lstStyle/>
+          <a:p>
+            <a:pPr algn="l">
+              <a:lnSpc>
+                <a:spcPct val="100000"/>
+              </a:lnSpc>
+            </a:pPr>
+            <a:r>
+              <a:rPr sz="1150" b="1">
+                <a:solidFill>
+                  <a:srgbClr val="0071E3"/>
+                </a:solidFill>
+                <a:latin typeface="Arial"/>
+              </a:rPr>
+              <a:t>DISTRIBUTION</a:t>
+            </a:r>
+          </a:p>
+        </p:txBody>
+      </p:sp>
+      <p:pic>
+        <p:nvPicPr>
+          <p:cNvPr id="3" name="Picture 2" descr="dia_release.png"/>
+          <p:cNvPicPr>
+            <a:picLocks noChangeAspect="1"/>
+          </p:cNvPicPr>
+          <p:nvPr/>
+        </p:nvPicPr>
+        <p:blipFill>
+          <a:blip r:embed="rId2"/>
+          <a:stretch>
+            <a:fillRect/>
+          </a:stretch>
+        </p:blipFill>
+        <p:spPr>
+          <a:xfrm>
+            <a:off x="777240" y="1556351"/>
+            <a:ext cx="10637215" cy="3955610"/>
+          </a:xfrm>
+          <a:prstGeom prst="rect">
+            <a:avLst/>
+          </a:prstGeom>
+        </p:spPr>
+      </p:pic>
+      <p:sp>
+        <p:nvSpPr>
+          <p:cNvPr id="4" name="TextBox 3"/>
+          <p:cNvSpPr txBox="1"/>
+          <p:nvPr/>
+        </p:nvSpPr>
+        <p:spPr>
+          <a:xfrm>
+            <a:off x="10500055" y="6345936"/>
+            <a:ext cx="914400" cy="274320"/>
+          </a:xfrm>
+          <a:prstGeom prst="rect">
+            <a:avLst/>
+          </a:prstGeom>
+          <a:noFill/>
+        </p:spPr>
+        <p:txBody>
+          <a:bodyPr wrap="square" anchor="t" lIns="0" rIns="0" tIns="0" bIns="0">
+            <a:spAutoFit/>
+          </a:bodyPr>
+          <a:lstStyle/>
+          <a:p>
+            <a:pPr algn="l">
+              <a:lnSpc>
+                <a:spcPct val="100000"/>
+              </a:lnSpc>
+            </a:pPr>
+            <a:r>
+              <a:rPr sz="1000" b="0">
+                <a:solidFill>
+                  <a:srgbClr val="86868B"/>
+                </a:solidFill>
+                <a:latin typeface="Arial"/>
+              </a:rPr>
+              <a:t>36</a:t>
+            </a:r>
+          </a:p>
+        </p:txBody>
+      </p:sp>
+    </p:spTree>
+  </p:cSld>
+  <p:clrMapOvr>
+    <a:masterClrMapping/>
+  </p:clrMapOvr>
+</p:sld>
+</file>
+
+<file path=ppt/slides/slide37.xml><?xml version="1.0" encoding="utf-8"?>
+<p:sld xmlns:a="http://schemas.openxmlformats.org/drawingml/2006/main" xmlns:p="http://schemas.openxmlformats.org/presentationml/2006/main" xmlns:r="http://schemas.openxmlformats.org/officeDocument/2006/relationships">
+  <p:cSld>
+    <p:bg>
+      <p:bgPr>
+        <a:solidFill>
+          <a:srgbClr val="FFFFFF"/>
+        </a:solidFill>
+        <a:effectLst/>
+      </p:bgPr>
+    </p:bg>
+    <p:spTree>
+      <p:nvGrpSpPr>
+        <p:cNvPr id="1" name=""/>
+        <p:cNvGrpSpPr/>
+        <p:nvPr/>
+      </p:nvGrpSpPr>
+      <p:grpSpPr/>
+      <p:sp>
+        <p:nvSpPr>
+          <p:cNvPr id="2" name="TextBox 1"/>
+          <p:cNvSpPr txBox="1"/>
+          <p:nvPr/>
+        </p:nvSpPr>
+        <p:spPr>
+          <a:xfrm>
+            <a:off x="777240" y="566928"/>
+            <a:ext cx="10637215" cy="292608"/>
+          </a:xfrm>
+          <a:prstGeom prst="rect">
+            <a:avLst/>
+          </a:prstGeom>
+          <a:noFill/>
+        </p:spPr>
+        <p:txBody>
+          <a:bodyPr wrap="square" anchor="t" lIns="0" rIns="0" tIns="0" bIns="0">
+            <a:spAutoFit/>
+          </a:bodyPr>
+          <a:lstStyle/>
+          <a:p>
+            <a:pPr algn="l">
+              <a:lnSpc>
+                <a:spcPct val="100000"/>
+              </a:lnSpc>
+            </a:pPr>
+            <a:r>
+              <a:rPr sz="1150" b="1">
+                <a:solidFill>
+                  <a:srgbClr val="0071E3"/>
+                </a:solidFill>
+                <a:latin typeface="Arial"/>
+              </a:rPr>
+              <a:t>STATUS</a:t>
+            </a:r>
+          </a:p>
+        </p:txBody>
+      </p:sp>
+      <p:pic>
+        <p:nvPicPr>
+          <p:cNvPr id="3" name="Picture 2" descr="dia_estado.png"/>
+          <p:cNvPicPr>
+            <a:picLocks noChangeAspect="1"/>
+          </p:cNvPicPr>
+          <p:nvPr/>
+        </p:nvPicPr>
+        <p:blipFill>
+          <a:blip r:embed="rId2"/>
+          <a:stretch>
+            <a:fillRect/>
+          </a:stretch>
+        </p:blipFill>
+        <p:spPr>
+          <a:xfrm>
+            <a:off x="1372101" y="1170432"/>
+            <a:ext cx="9447492" cy="4727448"/>
+          </a:xfrm>
+          <a:prstGeom prst="rect">
+            <a:avLst/>
+          </a:prstGeom>
+        </p:spPr>
+      </p:pic>
+      <p:sp>
+        <p:nvSpPr>
+          <p:cNvPr id="4" name="TextBox 3"/>
+          <p:cNvSpPr txBox="1"/>
+          <p:nvPr/>
+        </p:nvSpPr>
+        <p:spPr>
+          <a:xfrm>
+            <a:off x="10500055" y="6345936"/>
+            <a:ext cx="914400" cy="274320"/>
+          </a:xfrm>
+          <a:prstGeom prst="rect">
+            <a:avLst/>
+          </a:prstGeom>
+          <a:noFill/>
+        </p:spPr>
+        <p:txBody>
+          <a:bodyPr wrap="square" anchor="t" lIns="0" rIns="0" tIns="0" bIns="0">
+            <a:spAutoFit/>
+          </a:bodyPr>
+          <a:lstStyle/>
+          <a:p>
+            <a:pPr algn="l">
+              <a:lnSpc>
+                <a:spcPct val="100000"/>
+              </a:lnSpc>
+            </a:pPr>
+            <a:r>
+              <a:rPr sz="1000" b="0">
+                <a:solidFill>
+                  <a:srgbClr val="86868B"/>
+                </a:solidFill>
+                <a:latin typeface="Arial"/>
+              </a:rPr>
+              <a:t>37</a:t>
+            </a:r>
+          </a:p>
+        </p:txBody>
+      </p:sp>
+    </p:spTree>
+  </p:cSld>
+  <p:clrMapOvr>
+    <a:masterClrMapping/>
+  </p:clrMapOvr>
+</p:sld>
+</file>
+
+<file path=ppt/slides/slide38.xml><?xml version="1.0" encoding="utf-8"?>
+<p:sld xmlns:a="http://schemas.openxmlformats.org/drawingml/2006/main" xmlns:p="http://schemas.openxmlformats.org/presentationml/2006/main" xmlns:r="http://schemas.openxmlformats.org/officeDocument/2006/relationships">
+  <p:cSld>
+    <p:bg>
+      <p:bgPr>
+        <a:solidFill>
+          <a:srgbClr val="0A0A0C"/>
+        </a:solidFill>
+        <a:effectLst/>
+      </p:bgPr>
+    </p:bg>
+    <p:spTree>
+      <p:nvGrpSpPr>
+        <p:cNvPr id="1" name=""/>
+        <p:cNvGrpSpPr/>
+        <p:nvPr/>
+      </p:nvGrpSpPr>
+      <p:grpSpPr/>
+      <p:sp>
+        <p:nvSpPr>
+          <p:cNvPr id="2" name="TextBox 1"/>
+          <p:cNvSpPr txBox="1"/>
+          <p:nvPr/>
+        </p:nvSpPr>
+        <p:spPr>
+          <a:xfrm>
+            <a:off x="777240" y="566928"/>
+            <a:ext cx="10637215" cy="292608"/>
+          </a:xfrm>
+          <a:prstGeom prst="rect">
+            <a:avLst/>
+          </a:prstGeom>
+          <a:noFill/>
+        </p:spPr>
+        <p:txBody>
+          <a:bodyPr wrap="square" anchor="t" lIns="0" rIns="0" tIns="0" bIns="0">
+            <a:spAutoFit/>
+          </a:bodyPr>
+          <a:lstStyle/>
+          <a:p>
+            <a:pPr algn="l">
+              <a:lnSpc>
+                <a:spcPct val="100000"/>
+              </a:lnSpc>
+            </a:pPr>
+            <a:r>
+              <a:rPr sz="1150" b="1">
+                <a:solidFill>
+                  <a:srgbClr val="2997FF"/>
+                </a:solidFill>
+                <a:latin typeface="Arial"/>
+              </a:rPr>
+              <a:t>NEXT STEPS</a:t>
+            </a:r>
+          </a:p>
+        </p:txBody>
+      </p:sp>
+      <p:sp>
+        <p:nvSpPr>
+          <p:cNvPr id="3" name="TextBox 2"/>
+          <p:cNvSpPr txBox="1"/>
+          <p:nvPr/>
+        </p:nvSpPr>
+        <p:spPr>
+          <a:xfrm>
+            <a:off x="777240" y="932688"/>
+            <a:ext cx="10637215" cy="914400"/>
+          </a:xfrm>
+          <a:prstGeom prst="rect">
+            <a:avLst/>
+          </a:prstGeom>
+          <a:noFill/>
+        </p:spPr>
+        <p:txBody>
+          <a:bodyPr wrap="square" anchor="t" lIns="0" rIns="0" tIns="0" bIns="0">
+            <a:spAutoFit/>
+          </a:bodyPr>
+          <a:lstStyle/>
+          <a:p>
+            <a:pPr algn="l">
+              <a:lnSpc>
+                <a:spcPct val="95000"/>
+              </a:lnSpc>
+            </a:pPr>
+            <a:r>
+              <a:rPr sz="3600" b="1">
+                <a:solidFill>
+                  <a:srgbClr val="FFFFFF"/>
+                </a:solidFill>
+                <a:latin typeface="Arial"/>
+              </a:rPr>
+              <a:t>Three decisions and one build</a:t>
+            </a:r>
+          </a:p>
+        </p:txBody>
+      </p:sp>
+      <p:sp>
+        <p:nvSpPr>
+          <p:cNvPr id="4" name="TextBox 3"/>
+          <p:cNvSpPr txBox="1"/>
+          <p:nvPr/>
+        </p:nvSpPr>
+        <p:spPr>
+          <a:xfrm>
+            <a:off x="777240" y="2468880"/>
+            <a:ext cx="914400" cy="548640"/>
+          </a:xfrm>
+          <a:prstGeom prst="rect">
+            <a:avLst/>
+          </a:prstGeom>
+          <a:noFill/>
+        </p:spPr>
+        <p:txBody>
+          <a:bodyPr wrap="square" anchor="t" lIns="0" rIns="0" tIns="0" bIns="0">
+            <a:spAutoFit/>
+          </a:bodyPr>
+          <a:lstStyle/>
+          <a:p>
+            <a:pPr algn="l">
+              <a:lnSpc>
+                <a:spcPct val="100000"/>
+              </a:lnSpc>
+            </a:pPr>
+            <a:r>
+              <a:rPr sz="1700" b="1">
+                <a:solidFill>
+                  <a:srgbClr val="2997FF"/>
+                </a:solidFill>
+                <a:latin typeface="Arial"/>
+              </a:rPr>
+              <a:t>01</a:t>
+            </a:r>
+          </a:p>
+        </p:txBody>
+      </p:sp>
+      <p:sp>
+        <p:nvSpPr>
+          <p:cNvPr id="5" name="TextBox 4"/>
+          <p:cNvSpPr txBox="1"/>
+          <p:nvPr/>
+        </p:nvSpPr>
+        <p:spPr>
+          <a:xfrm>
+            <a:off x="1783080" y="2468880"/>
+            <a:ext cx="9601200" cy="1188720"/>
+          </a:xfrm>
+          <a:prstGeom prst="rect">
+            <a:avLst/>
+          </a:prstGeom>
+          <a:noFill/>
+        </p:spPr>
+        <p:txBody>
+          <a:bodyPr wrap="square" anchor="t" lIns="0" rIns="0" tIns="0" bIns="0">
+            <a:spAutoFit/>
+          </a:bodyPr>
+          <a:lstStyle/>
+          <a:p>
+            <a:pPr algn="l">
+              <a:lnSpc>
+                <a:spcPct val="105000"/>
+              </a:lnSpc>
+            </a:pPr>
+            <a:r>
+              <a:rPr sz="1900" b="1">
+                <a:solidFill>
+                  <a:srgbClr val="FFFFFF"/>
+                </a:solidFill>
+                <a:latin typeface="Arial"/>
+              </a:rPr>
+              <a:t>Rebuild the executable</a:t>
+            </a:r>
+          </a:p>
+          <a:p>
+            <a:pPr algn="l">
+              <a:lnSpc>
+                <a:spcPct val="135000"/>
+              </a:lnSpc>
+              <a:spcBef>
+                <a:spcPts val="700"/>
+              </a:spcBef>
+            </a:pPr>
+            <a:r>
+              <a:rPr sz="1250" b="0">
+                <a:solidFill>
+                  <a:srgbClr val="9E9EA7"/>
+                </a:solidFill>
+                <a:latin typeface="Arial"/>
+              </a:rPr>
+              <a:t>make_exe.bat, unchanged, from the full project tree. The published .exe predates both corrections: 17 of the 31 manifest entries have changed.</a:t>
+            </a:r>
+          </a:p>
+        </p:txBody>
+      </p:sp>
+      <p:sp>
+        <p:nvSpPr>
+          <p:cNvPr id="6" name="Rectangle 5"/>
+          <p:cNvSpPr/>
+          <p:nvPr/>
+        </p:nvSpPr>
+        <p:spPr>
+          <a:xfrm>
+            <a:off x="777240" y="2249424"/>
+            <a:ext cx="10637215" cy="12700"/>
+          </a:xfrm>
+          <a:prstGeom prst="rect">
+            <a:avLst/>
+          </a:prstGeom>
+          <a:solidFill>
+            <a:srgbClr val="2A2A30"/>
+          </a:solidFill>
+          <a:ln>
+            <a:noFill/>
+          </a:ln>
+          <a:effectLst/>
+        </p:spPr>
+        <p:style>
+          <a:lnRef idx="1">
+            <a:schemeClr val="accent1"/>
+          </a:lnRef>
+          <a:fillRef idx="3">
+            <a:schemeClr val="accent1"/>
+          </a:fillRef>
+          <a:effectRef idx="2">
+            <a:schemeClr val="accent1"/>
+          </a:effectRef>
+          <a:fontRef idx="minor">
+            <a:schemeClr val="lt1"/>
+          </a:fontRef>
+        </p:style>
+        <p:txBody>
+          <a:bodyPr rtlCol="0" anchor="ctr"/>
+          <a:lstStyle/>
+          <a:p>
+            <a:pPr algn="ctr"/>
+          </a:p>
+        </p:txBody>
+      </p:sp>
+      <p:sp>
+        <p:nvSpPr>
+          <p:cNvPr id="7" name="TextBox 6"/>
+          <p:cNvSpPr txBox="1"/>
+          <p:nvPr/>
+        </p:nvSpPr>
+        <p:spPr>
+          <a:xfrm>
+            <a:off x="777240" y="3767328"/>
+            <a:ext cx="914400" cy="548640"/>
+          </a:xfrm>
+          <a:prstGeom prst="rect">
+            <a:avLst/>
+          </a:prstGeom>
+          <a:noFill/>
+        </p:spPr>
+        <p:txBody>
+          <a:bodyPr wrap="square" anchor="t" lIns="0" rIns="0" tIns="0" bIns="0">
+            <a:spAutoFit/>
+          </a:bodyPr>
+          <a:lstStyle/>
+          <a:p>
+            <a:pPr algn="l">
+              <a:lnSpc>
+                <a:spcPct val="100000"/>
+              </a:lnSpc>
+            </a:pPr>
+            <a:r>
+              <a:rPr sz="1700" b="1">
+                <a:solidFill>
+                  <a:srgbClr val="2997FF"/>
+                </a:solidFill>
+                <a:latin typeface="Arial"/>
+              </a:rPr>
+              <a:t>02</a:t>
+            </a:r>
+          </a:p>
+        </p:txBody>
+      </p:sp>
+      <p:sp>
+        <p:nvSpPr>
+          <p:cNvPr id="8" name="TextBox 7"/>
+          <p:cNvSpPr txBox="1"/>
+          <p:nvPr/>
+        </p:nvSpPr>
+        <p:spPr>
+          <a:xfrm>
+            <a:off x="1783080" y="3767328"/>
+            <a:ext cx="9601200" cy="1188720"/>
+          </a:xfrm>
+          <a:prstGeom prst="rect">
+            <a:avLst/>
+          </a:prstGeom>
+          <a:noFill/>
+        </p:spPr>
+        <p:txBody>
+          <a:bodyPr wrap="square" anchor="t" lIns="0" rIns="0" tIns="0" bIns="0">
+            <a:spAutoFit/>
+          </a:bodyPr>
+          <a:lstStyle/>
+          <a:p>
+            <a:pPr algn="l">
+              <a:lnSpc>
+                <a:spcPct val="105000"/>
+              </a:lnSpc>
+            </a:pPr>
+            <a:r>
+              <a:rPr sz="1900" b="1">
+                <a:solidFill>
+                  <a:srgbClr val="FFFFFF"/>
+                </a:solidFill>
+                <a:latin typeface="Arial"/>
+              </a:rPr>
+              <a:t>Settle the sign of equation 9</a:t>
+            </a:r>
+          </a:p>
+          <a:p>
+            <a:pPr algn="l">
+              <a:lnSpc>
+                <a:spcPct val="135000"/>
+              </a:lnSpc>
+              <a:spcBef>
+                <a:spcPts val="700"/>
+              </a:spcBef>
+            </a:pPr>
+            <a:r>
+              <a:rPr sz="1250" b="0">
+                <a:solidFill>
+                  <a:srgbClr val="9E9EA7"/>
+                </a:solidFill>
+                <a:latin typeface="Arial"/>
+              </a:rPr>
+              <a:t>against the licensed DIN 6892 text. If the minus sign is right, the real allowable torque drops another 46 %.</a:t>
+            </a:r>
+          </a:p>
+        </p:txBody>
+      </p:sp>
+      <p:sp>
+        <p:nvSpPr>
+          <p:cNvPr id="9" name="Rectangle 8"/>
+          <p:cNvSpPr/>
+          <p:nvPr/>
+        </p:nvSpPr>
+        <p:spPr>
+          <a:xfrm>
+            <a:off x="777240" y="3547872"/>
+            <a:ext cx="10637215" cy="12700"/>
+          </a:xfrm>
+          <a:prstGeom prst="rect">
+            <a:avLst/>
+          </a:prstGeom>
+          <a:solidFill>
+            <a:srgbClr val="2A2A30"/>
+          </a:solidFill>
+          <a:ln>
+            <a:noFill/>
+          </a:ln>
+          <a:effectLst/>
+        </p:spPr>
+        <p:style>
+          <a:lnRef idx="1">
+            <a:schemeClr val="accent1"/>
+          </a:lnRef>
+          <a:fillRef idx="3">
+            <a:schemeClr val="accent1"/>
+          </a:fillRef>
+          <a:effectRef idx="2">
+            <a:schemeClr val="accent1"/>
+          </a:effectRef>
+          <a:fontRef idx="minor">
+            <a:schemeClr val="lt1"/>
+          </a:fontRef>
+        </p:style>
+        <p:txBody>
+          <a:bodyPr rtlCol="0" anchor="ctr"/>
+          <a:lstStyle/>
+          <a:p>
+            <a:pPr algn="ctr"/>
+          </a:p>
+        </p:txBody>
+      </p:sp>
+      <p:sp>
+        <p:nvSpPr>
+          <p:cNvPr id="10" name="TextBox 9"/>
+          <p:cNvSpPr txBox="1"/>
+          <p:nvPr/>
+        </p:nvSpPr>
+        <p:spPr>
+          <a:xfrm>
+            <a:off x="777240" y="5065776"/>
+            <a:ext cx="914400" cy="548640"/>
+          </a:xfrm>
+          <a:prstGeom prst="rect">
+            <a:avLst/>
+          </a:prstGeom>
+          <a:noFill/>
+        </p:spPr>
+        <p:txBody>
+          <a:bodyPr wrap="square" anchor="t" lIns="0" rIns="0" tIns="0" bIns="0">
+            <a:spAutoFit/>
+          </a:bodyPr>
+          <a:lstStyle/>
+          <a:p>
+            <a:pPr algn="l">
+              <a:lnSpc>
+                <a:spcPct val="100000"/>
+              </a:lnSpc>
+            </a:pPr>
+            <a:r>
+              <a:rPr sz="1700" b="1">
+                <a:solidFill>
+                  <a:srgbClr val="2997FF"/>
+                </a:solidFill>
+                <a:latin typeface="Arial"/>
+              </a:rPr>
               <a:t>03</a:t>
+            </a:r>
+          </a:p>
+        </p:txBody>
+      </p:sp>
+      <p:sp>
+        <p:nvSpPr>
+          <p:cNvPr id="11" name="TextBox 10"/>
+          <p:cNvSpPr txBox="1"/>
+          <p:nvPr/>
+        </p:nvSpPr>
+        <p:spPr>
+          <a:xfrm>
+            <a:off x="1783080" y="5065776"/>
+            <a:ext cx="9601200" cy="1188720"/>
+          </a:xfrm>
+          <a:prstGeom prst="rect">
+            <a:avLst/>
+          </a:prstGeom>
+          <a:noFill/>
+        </p:spPr>
+        <p:txBody>
+          <a:bodyPr wrap="square" anchor="t" lIns="0" rIns="0" tIns="0" bIns="0">
+            <a:spAutoFit/>
+          </a:bodyPr>
+          <a:lstStyle/>
+          <a:p>
+            <a:pPr algn="l">
+              <a:lnSpc>
+                <a:spcPct val="105000"/>
+              </a:lnSpc>
+            </a:pPr>
+            <a:r>
+              <a:rPr sz="1900" b="1">
+                <a:solidFill>
+                  <a:srgbClr val="FFFFFF"/>
+                </a:solidFill>
+                <a:latin typeface="Arial"/>
+              </a:rPr>
+              <a:t>Number the version</a:t>
+            </a:r>
+          </a:p>
+          <a:p>
+            <a:pPr algn="l">
+              <a:lnSpc>
+                <a:spcPct val="135000"/>
+              </a:lnSpc>
+              <a:spcBef>
+                <a:spcPts val="700"/>
+              </a:spcBef>
+            </a:pPr>
+            <a:r>
+              <a:rPr sz="1250" b="0">
+                <a:solidFill>
+                  <a:srgbClr val="9E9EA7"/>
+                </a:solidFill>
+                <a:latin typeface="Arial"/>
+              </a:rPr>
+              <a:t>two executables that both report 4.2 and return different torques are an identity collision. My recommendation is 4.3.</a:t>
+            </a:r>
+          </a:p>
+        </p:txBody>
+      </p:sp>
+      <p:sp>
+        <p:nvSpPr>
+          <p:cNvPr id="12" name="Rectangle 11"/>
+          <p:cNvSpPr/>
+          <p:nvPr/>
+        </p:nvSpPr>
+        <p:spPr>
+          <a:xfrm>
+            <a:off x="777240" y="4846320"/>
+            <a:ext cx="10637215" cy="12700"/>
+          </a:xfrm>
+          <a:prstGeom prst="rect">
+            <a:avLst/>
+          </a:prstGeom>
+          <a:solidFill>
+            <a:srgbClr val="2A2A30"/>
+          </a:solidFill>
+          <a:ln>
+            <a:noFill/>
+          </a:ln>
+          <a:effectLst/>
+        </p:spPr>
+        <p:style>
+          <a:lnRef idx="1">
+            <a:schemeClr val="accent1"/>
+          </a:lnRef>
+          <a:fillRef idx="3">
+            <a:schemeClr val="accent1"/>
+          </a:fillRef>
+          <a:effectRef idx="2">
+            <a:schemeClr val="accent1"/>
+          </a:effectRef>
+          <a:fontRef idx="minor">
+            <a:schemeClr val="lt1"/>
+          </a:fontRef>
+        </p:style>
+        <p:txBody>
+          <a:bodyPr rtlCol="0" anchor="ctr"/>
+          <a:lstStyle/>
+          <a:p>
+            <a:pPr algn="ctr"/>
+          </a:p>
+        </p:txBody>
+      </p:sp>
+      <p:sp>
+        <p:nvSpPr>
+          <p:cNvPr id="13" name="TextBox 12"/>
+          <p:cNvSpPr txBox="1"/>
+          <p:nvPr/>
+        </p:nvSpPr>
+        <p:spPr>
+          <a:xfrm>
+            <a:off x="10500055" y="6345936"/>
+            <a:ext cx="914400" cy="274320"/>
+          </a:xfrm>
+          <a:prstGeom prst="rect">
+            <a:avLst/>
+          </a:prstGeom>
+          <a:noFill/>
+        </p:spPr>
+        <p:txBody>
+          <a:bodyPr wrap="square" anchor="t" lIns="0" rIns="0" tIns="0" bIns="0">
+            <a:spAutoFit/>
+          </a:bodyPr>
+          <a:lstStyle/>
+          <a:p>
+            <a:pPr algn="l">
+              <a:lnSpc>
+                <a:spcPct val="100000"/>
+              </a:lnSpc>
+            </a:pPr>
+            <a:r>
+              <a:rPr sz="1000" b="0">
+                <a:solidFill>
+                  <a:srgbClr val="9E9EA7"/>
+                </a:solidFill>
+                <a:latin typeface="Arial"/>
+              </a:rPr>
+              <a:t>38</a:t>
+            </a:r>
+          </a:p>
+        </p:txBody>
+      </p:sp>
+    </p:spTree>
+  </p:cSld>
+  <p:clrMapOvr>
+    <a:masterClrMapping/>
+  </p:clrMapOvr>
+</p:sld>
+</file>
+
+<file path=ppt/slides/slide39.xml><?xml version="1.0" encoding="utf-8"?>
+<p:sld xmlns:a="http://schemas.openxmlformats.org/drawingml/2006/main" xmlns:p="http://schemas.openxmlformats.org/presentationml/2006/main" xmlns:r="http://schemas.openxmlformats.org/officeDocument/2006/relationships">
+  <p:cSld>
+    <p:bg>
+      <p:bgPr>
+        <a:solidFill>
+          <a:srgbClr val="0A0A0C"/>
+        </a:solidFill>
+        <a:effectLst/>
+      </p:bgPr>
+    </p:bg>
+    <p:spTree>
+      <p:nvGrpSpPr>
+        <p:cNvPr id="1" name=""/>
+        <p:cNvGrpSpPr/>
+        <p:nvPr/>
+      </p:nvGrpSpPr>
+      <p:grpSpPr/>
+      <p:sp>
+        <p:nvSpPr>
+          <p:cNvPr id="2" name="TextBox 1"/>
+          <p:cNvSpPr txBox="1"/>
+          <p:nvPr/>
+        </p:nvSpPr>
+        <p:spPr>
+          <a:xfrm>
+            <a:off x="777240" y="2286000"/>
+            <a:ext cx="10058400" cy="2377440"/>
+          </a:xfrm>
+          <a:prstGeom prst="rect">
+            <a:avLst/>
+          </a:prstGeom>
+          <a:noFill/>
+        </p:spPr>
+        <p:txBody>
+          <a:bodyPr wrap="square" anchor="t" lIns="0" rIns="0" tIns="0" bIns="0">
+            <a:spAutoFit/>
+          </a:bodyPr>
+          <a:lstStyle/>
+          <a:p>
+            <a:pPr algn="l">
+              <a:lnSpc>
+                <a:spcPct val="110000"/>
+              </a:lnSpc>
+            </a:pPr>
+            <a:r>
+              <a:rPr sz="3600" b="1">
+                <a:solidFill>
+                  <a:srgbClr val="FFFFFF"/>
+                </a:solidFill>
+                <a:latin typeface="Arial"/>
+              </a:rPr>
+              <a:t>The value is not the model.
+It is being able to show how it was made.</a:t>
+            </a:r>
+          </a:p>
+        </p:txBody>
+      </p:sp>
+      <p:sp>
+        <p:nvSpPr>
+          <p:cNvPr id="3" name="TextBox 2"/>
+          <p:cNvSpPr txBox="1"/>
+          <p:nvPr/>
+        </p:nvSpPr>
+        <p:spPr>
+          <a:xfrm>
+            <a:off x="777240" y="5120640"/>
+            <a:ext cx="10058400" cy="1097280"/>
+          </a:xfrm>
+          <a:prstGeom prst="rect">
+            <a:avLst/>
+          </a:prstGeom>
+          <a:noFill/>
+        </p:spPr>
+        <p:txBody>
+          <a:bodyPr wrap="square" anchor="t" lIns="0" rIns="0" tIns="0" bIns="0">
+            <a:spAutoFit/>
+          </a:bodyPr>
+          <a:lstStyle/>
+          <a:p>
+            <a:pPr algn="l">
+              <a:lnSpc>
+                <a:spcPct val="100000"/>
+              </a:lnSpc>
+            </a:pPr>
+            <a:r>
+              <a:rPr sz="1250" b="0">
+                <a:solidFill>
+                  <a:srgbClr val="9E9EA7"/>
+                </a:solidFill>
+                <a:latin typeface="Arial"/>
+              </a:rPr>
+              <a:t>Model Builder 4.2  ·  parameter schema 6  ·  din6892-methods-1.0  ·  auto-mesh-2.0</a:t>
+            </a:r>
+          </a:p>
+          <a:p>
+            <a:pPr algn="l">
+              <a:lnSpc>
+                <a:spcPct val="100000"/>
+              </a:lnSpc>
+              <a:spcBef>
+                <a:spcPts val="800"/>
+              </a:spcBef>
+            </a:pPr>
+            <a:r>
+              <a:rPr sz="1250" b="0">
+                <a:solidFill>
+                  <a:srgbClr val="7C7C86"/>
+                </a:solidFill>
+                <a:latin typeface="Arial"/>
+              </a:rPr>
+              <a:t>Every number in this deck is reproducible by running the code in the repository.</a:t>
+            </a:r>
+          </a:p>
+        </p:txBody>
+      </p:sp>
+      <p:sp>
+        <p:nvSpPr>
+          <p:cNvPr id="4" name="TextBox 3"/>
+          <p:cNvSpPr txBox="1"/>
+          <p:nvPr/>
+        </p:nvSpPr>
+        <p:spPr>
+          <a:xfrm>
+            <a:off x="10500055" y="6345936"/>
+            <a:ext cx="914400" cy="274320"/>
+          </a:xfrm>
+          <a:prstGeom prst="rect">
+            <a:avLst/>
+          </a:prstGeom>
+          <a:noFill/>
+        </p:spPr>
+        <p:txBody>
+          <a:bodyPr wrap="square" anchor="t" lIns="0" rIns="0" tIns="0" bIns="0">
+            <a:spAutoFit/>
+          </a:bodyPr>
+          <a:lstStyle/>
+          <a:p>
+            <a:pPr algn="l">
+              <a:lnSpc>
+                <a:spcPct val="100000"/>
+              </a:lnSpc>
+            </a:pPr>
+            <a:r>
+              <a:rPr sz="1000" b="0">
+                <a:solidFill>
+                  <a:srgbClr val="9E9EA7"/>
+                </a:solidFill>
+                <a:latin typeface="Arial"/>
+              </a:rPr>
+              <a:t>39</a:t>
             </a:r>
           </a:p>
         </p:txBody>
@@ -10364,7 +16244,7 @@
                 </a:solidFill>
                 <a:latin typeface="Arial"/>
               </a:rPr>
-              <a:t>Seeds left at 0 mean automatic: D/32 on the shaft, b/20 on the key, d_a/80 on the hub.</a:t>
+              <a:t>A seed left at 0 means automatic, and the rule follows the refinement: with the notch band on it is D/16 on the shaft and d_a/40 on the hub. The key is always b/20.</a:t>
             </a:r>
           </a:p>
           <a:p>

--- a/presentation/ModelBuilder_4.2_Presentation.pptx
+++ b/presentation/ModelBuilder_4.2_Presentation.pptx
@@ -4766,7 +4766,7 @@
                 </a:solidFill>
                 <a:latin typeface="Arial"/>
               </a:rPr>
-              <a:t>D40 1-cycle pre-solve and Method A D40 with matching mesh over 20 cycles. Both with the solver deliberately off.</a:t>
+              <a:t>D40 1-cycle pre-solve and a 20-cycle D40 Method A setup whose matching must be verified at build time. Both with the solver deliberately off.</a:t>
             </a:r>
           </a:p>
         </p:txBody>
@@ -6065,7 +6065,7 @@
                 </a:solidFill>
                 <a:latin typeface="Arial"/>
               </a:rPr>
-              <a:t>The mesh is hexahedral and matching on the interfaces that carry load.</a:t>
+              <a:t>This evidence shows a hexahedral mesh. Exact interface matching is not inferred from the image: the specialized Method A backend checks it by comparing node coordinates after meshing.</a:t>
             </a:r>
           </a:p>
           <a:p>
@@ -12902,7 +12902,7 @@
                 </a:solidFill>
                 <a:latin typeface="Arial"/>
               </a:rPr>
-              <a:t>4.2 identity and schema 6, the 5→6 migration, DIN and FVA catalogues, golden calculations, six mesh templates, reports in all three languages. Exits with code 0.</a:t>
+              <a:t>4.2 identity and schema 6, the 5→6 migration, DIN and FVA catalogues, golden calculations, eight mesh templates, reports in all three languages. Exits with code 0.</a:t>
             </a:r>
           </a:p>
         </p:txBody>
@@ -13087,7 +13087,7 @@
                 </a:solidFill>
                 <a:latin typeface="Arial"/>
               </a:rPr>
-              <a:t>All four presets</a:t>
+              <a:t>Guarded configurations</a:t>
             </a:r>
           </a:p>
           <a:p>
@@ -13106,7 +13106,7 @@
                 </a:solidFill>
                 <a:latin typeface="Arial"/>
               </a:rPr>
-              <a:t>normalize and validate under schema 6 with zero errors, including the 10-cycle solving one.</a:t>
+              <a:t>the defaults and the two packaged FVA companions validate under schema 6. The repository's 10-cycle setup is validated separately and is not packaged.</a:t>
             </a:r>
           </a:p>
         </p:txBody>
@@ -13310,7 +13310,7 @@
                 </a:solidFill>
                 <a:latin typeface="Arial"/>
               </a:rPr>
-              <a:t>a project is declared sound only if the audit, BUILD_RESULT, CAE, screenshots and report all exist, and the realised mesh matches the planned one.</a:t>
+              <a:t>a project is declared sound only if the audit, BUILD_RESULT and all requested or required artifacts exist, and the realised mesh matches the planned one.</a:t>
             </a:r>
           </a:p>
         </p:txBody>
@@ -14855,7 +14855,7 @@
                 </a:solidFill>
                 <a:latin typeface="Arial"/>
               </a:rPr>
-              <a:t>against the licensed DIN 6892 text. If the minus sign is right, the real allowable torque drops another 46 %.</a:t>
+              <a:t>against the licensed DIN 6892 text. The sign changes the shaft depth and shaft component by 46.35%; in the bundled D40 default, the hub still governs at 999.18 N·m.</a:t>
             </a:r>
           </a:p>
         </p:txBody>
@@ -15203,7 +15203,7 @@
                 </a:solidFill>
                 <a:latin typeface="Arial"/>
               </a:rPr>
-              <a:t>Every number in this deck is reproducible by running the code in the repository.</a:t>
+              <a:t>Every calculation can be traced to code; historical screenshots and renders are identified as source evidence.</a:t>
             </a:r>
           </a:p>
         </p:txBody>
